--- a/ABC-startup/ABC STARTUPU - zadanie warsztatowe 4.pptx
+++ b/ABC-startup/ABC STARTUPU - zadanie warsztatowe 4.pptx
@@ -54,7 +54,7 @@
         <p:spPr>
           <a:xfrm>
             <a:off x="685800" y="2130480"/>
-            <a:ext cx="7772040" cy="1469520"/>
+            <a:ext cx="7771680" cy="1469160"/>
           </a:xfrm>
           <a:prstGeom prst="rect">
             <a:avLst/>
@@ -69,14 +69,14 @@
             <a:noAutofit/>
           </a:bodyPr>
           <a:p>
-            <a:pPr indent="0">
+            <a:pPr indent="0" algn="ctr">
               <a:buNone/>
             </a:pPr>
-            <a:endParaRPr b="0" lang="pl-PL" sz="1800" spc="-1" strike="noStrike">
+            <a:endParaRPr b="0" lang="en-US" sz="4400" spc="-1" strike="noStrike">
               <a:solidFill>
-                <a:schemeClr val="dk1"/>
+                <a:srgbClr val="000000"/>
               </a:solidFill>
-              <a:latin typeface="Calibri"/>
+              <a:latin typeface="Arial"/>
             </a:endParaRPr>
           </a:p>
         </p:txBody>
@@ -128,7 +128,7 @@
             <a:spLocks noGrp="1"/>
           </p:cNvSpPr>
           <p:nvPr>
-            <p:ph type="ftr" idx="2"/>
+            <p:ph type="ftr" idx="1"/>
           </p:nvPr>
         </p:nvSpPr>
         <p:spPr/>
@@ -148,14 +148,14 @@
             <a:spLocks noGrp="1"/>
           </p:cNvSpPr>
           <p:nvPr>
-            <p:ph type="sldNum" idx="3"/>
+            <p:ph type="sldNum" idx="2"/>
           </p:nvPr>
         </p:nvSpPr>
         <p:spPr/>
         <p:txBody>
           <a:bodyPr/>
           <a:p>
-            <a:fld id="{1A51C694-E10E-4BBF-8F12-9D6D6883DDE5}" type="slidenum">
+            <a:fld id="{66DC8DE3-03C5-4A3C-90A0-2BC7091E0961}" type="slidenum">
               <a:t>&lt;#&gt;</a:t>
             </a:fld>
           </a:p>
@@ -168,7 +168,7 @@
             <a:spLocks noGrp="1"/>
           </p:cNvSpPr>
           <p:nvPr>
-            <p:ph type="dt" idx="1"/>
+            <p:ph type="dt" idx="3"/>
           </p:nvPr>
         </p:nvSpPr>
         <p:spPr/>
@@ -211,7 +211,7 @@
             <a:spLocks noGrp="1"/>
           </p:cNvSpPr>
           <p:nvPr>
-            <p:ph type="ftr" idx="29"/>
+            <p:ph type="ftr" idx="28"/>
           </p:nvPr>
         </p:nvSpPr>
         <p:spPr/>
@@ -231,14 +231,14 @@
             <a:spLocks noGrp="1"/>
           </p:cNvSpPr>
           <p:nvPr>
-            <p:ph type="sldNum" idx="30"/>
+            <p:ph type="sldNum" idx="29"/>
           </p:nvPr>
         </p:nvSpPr>
         <p:spPr/>
         <p:txBody>
           <a:bodyPr/>
           <a:p>
-            <a:fld id="{ABDA9092-A21C-45FB-803D-20626E250352}" type="slidenum">
+            <a:fld id="{27089340-0BC0-4D40-A848-ACA7ABDB072F}" type="slidenum">
               <a:t>&lt;#&gt;</a:t>
             </a:fld>
           </a:p>
@@ -251,7 +251,7 @@
             <a:spLocks noGrp="1"/>
           </p:cNvSpPr>
           <p:nvPr>
-            <p:ph type="dt" idx="28"/>
+            <p:ph type="dt" idx="30"/>
           </p:nvPr>
         </p:nvSpPr>
         <p:spPr/>
@@ -294,7 +294,7 @@
             <a:spLocks noGrp="1"/>
           </p:cNvSpPr>
           <p:nvPr>
-            <p:ph type="ftr" idx="32"/>
+            <p:ph type="ftr" idx="31"/>
           </p:nvPr>
         </p:nvSpPr>
         <p:spPr/>
@@ -314,14 +314,14 @@
             <a:spLocks noGrp="1"/>
           </p:cNvSpPr>
           <p:nvPr>
-            <p:ph type="sldNum" idx="33"/>
+            <p:ph type="sldNum" idx="32"/>
           </p:nvPr>
         </p:nvSpPr>
         <p:spPr/>
         <p:txBody>
           <a:bodyPr/>
           <a:p>
-            <a:fld id="{937EDDCA-3128-401F-8DA9-3444B1628320}" type="slidenum">
+            <a:fld id="{F734312B-A772-420B-B813-1B06703595CB}" type="slidenum">
               <a:t>&lt;#&gt;</a:t>
             </a:fld>
           </a:p>
@@ -334,7 +334,7 @@
             <a:spLocks noGrp="1"/>
           </p:cNvSpPr>
           <p:nvPr>
-            <p:ph type="dt" idx="31"/>
+            <p:ph type="dt" idx="33"/>
           </p:nvPr>
         </p:nvSpPr>
         <p:spPr/>
@@ -377,7 +377,7 @@
             <a:spLocks noGrp="1"/>
           </p:cNvSpPr>
           <p:nvPr>
-            <p:ph type="ftr" idx="5"/>
+            <p:ph type="ftr" idx="4"/>
           </p:nvPr>
         </p:nvSpPr>
         <p:spPr/>
@@ -397,14 +397,14 @@
             <a:spLocks noGrp="1"/>
           </p:cNvSpPr>
           <p:nvPr>
-            <p:ph type="sldNum" idx="6"/>
+            <p:ph type="sldNum" idx="5"/>
           </p:nvPr>
         </p:nvSpPr>
         <p:spPr/>
         <p:txBody>
           <a:bodyPr/>
           <a:p>
-            <a:fld id="{74422D47-63EE-45D4-AC47-4487F00F2CAC}" type="slidenum">
+            <a:fld id="{542BC55E-F548-4166-9275-0CF408CCDF13}" type="slidenum">
               <a:t>&lt;#&gt;</a:t>
             </a:fld>
           </a:p>
@@ -417,7 +417,7 @@
             <a:spLocks noGrp="1"/>
           </p:cNvSpPr>
           <p:nvPr>
-            <p:ph type="dt" idx="4"/>
+            <p:ph type="dt" idx="6"/>
           </p:nvPr>
         </p:nvSpPr>
         <p:spPr/>
@@ -460,7 +460,7 @@
             <a:spLocks noGrp="1"/>
           </p:cNvSpPr>
           <p:nvPr>
-            <p:ph type="ftr" idx="8"/>
+            <p:ph type="ftr" idx="7"/>
           </p:nvPr>
         </p:nvSpPr>
         <p:spPr/>
@@ -480,14 +480,14 @@
             <a:spLocks noGrp="1"/>
           </p:cNvSpPr>
           <p:nvPr>
-            <p:ph type="sldNum" idx="9"/>
+            <p:ph type="sldNum" idx="8"/>
           </p:nvPr>
         </p:nvSpPr>
         <p:spPr/>
         <p:txBody>
           <a:bodyPr/>
           <a:p>
-            <a:fld id="{C7A4225C-0FB3-4200-B8DA-D31C4E0F61C6}" type="slidenum">
+            <a:fld id="{31722518-43EA-4C54-982D-23C9BE569CB4}" type="slidenum">
               <a:t>&lt;#&gt;</a:t>
             </a:fld>
           </a:p>
@@ -500,7 +500,7 @@
             <a:spLocks noGrp="1"/>
           </p:cNvSpPr>
           <p:nvPr>
-            <p:ph type="dt" idx="7"/>
+            <p:ph type="dt" idx="9"/>
           </p:nvPr>
         </p:nvSpPr>
         <p:spPr/>
@@ -538,7 +538,7 @@
       </p:grpSpPr>
       <p:sp>
         <p:nvSpPr>
-          <p:cNvPr id="22" name="PlaceHolder 1"/>
+          <p:cNvPr id="18" name="PlaceHolder 1"/>
           <p:cNvSpPr>
             <a:spLocks noGrp="1"/>
           </p:cNvSpPr>
@@ -549,7 +549,7 @@
         <p:spPr>
           <a:xfrm>
             <a:off x="685800" y="2130480"/>
-            <a:ext cx="7772040" cy="1469520"/>
+            <a:ext cx="7771680" cy="1469160"/>
           </a:xfrm>
           <a:prstGeom prst="rect">
             <a:avLst/>
@@ -564,21 +564,21 @@
             <a:noAutofit/>
           </a:bodyPr>
           <a:p>
-            <a:pPr indent="0">
+            <a:pPr indent="0" algn="ctr">
               <a:buNone/>
             </a:pPr>
-            <a:endParaRPr b="0" lang="pl-PL" sz="1800" spc="-1" strike="noStrike">
+            <a:endParaRPr b="0" lang="en-US" sz="4400" spc="-1" strike="noStrike">
               <a:solidFill>
-                <a:schemeClr val="dk1"/>
+                <a:srgbClr val="000000"/>
               </a:solidFill>
-              <a:latin typeface="Calibri"/>
+              <a:latin typeface="Arial"/>
             </a:endParaRPr>
           </a:p>
         </p:txBody>
       </p:sp>
       <p:sp>
         <p:nvSpPr>
-          <p:cNvPr id="23" name="PlaceHolder 2"/>
+          <p:cNvPr id="19" name="PlaceHolder 2"/>
           <p:cNvSpPr>
             <a:spLocks noGrp="1"/>
           </p:cNvSpPr>
@@ -610,11 +610,11 @@
               </a:spcBef>
               <a:buNone/>
             </a:pPr>
-            <a:endParaRPr b="0" lang="pl-PL" sz="3200" spc="-1" strike="noStrike">
+            <a:endParaRPr b="0" lang="en-US" sz="3200" spc="-1" strike="noStrike">
               <a:solidFill>
-                <a:schemeClr val="dk1"/>
+                <a:srgbClr val="000000"/>
               </a:solidFill>
-              <a:latin typeface="Calibri"/>
+              <a:latin typeface="Arial"/>
             </a:endParaRPr>
           </a:p>
         </p:txBody>
@@ -626,7 +626,7 @@
             <a:spLocks noGrp="1"/>
           </p:cNvSpPr>
           <p:nvPr>
-            <p:ph type="ftr" idx="11"/>
+            <p:ph type="ftr" idx="10"/>
           </p:nvPr>
         </p:nvSpPr>
         <p:spPr/>
@@ -646,14 +646,14 @@
             <a:spLocks noGrp="1"/>
           </p:cNvSpPr>
           <p:nvPr>
-            <p:ph type="sldNum" idx="12"/>
+            <p:ph type="sldNum" idx="11"/>
           </p:nvPr>
         </p:nvSpPr>
         <p:spPr/>
         <p:txBody>
           <a:bodyPr/>
           <a:p>
-            <a:fld id="{9714F6F5-0BA9-4D90-A386-36285F8CF15C}" type="slidenum">
+            <a:fld id="{C267E35E-D051-4AFA-BDCC-99A6984B45A8}" type="slidenum">
               <a:t>&lt;#&gt;</a:t>
             </a:fld>
           </a:p>
@@ -666,7 +666,7 @@
             <a:spLocks noGrp="1"/>
           </p:cNvSpPr>
           <p:nvPr>
-            <p:ph type="dt" idx="10"/>
+            <p:ph type="dt" idx="12"/>
           </p:nvPr>
         </p:nvSpPr>
         <p:spPr/>
@@ -709,7 +709,7 @@
             <a:spLocks noGrp="1"/>
           </p:cNvSpPr>
           <p:nvPr>
-            <p:ph type="ftr" idx="14"/>
+            <p:ph type="ftr" idx="13"/>
           </p:nvPr>
         </p:nvSpPr>
         <p:spPr/>
@@ -729,14 +729,14 @@
             <a:spLocks noGrp="1"/>
           </p:cNvSpPr>
           <p:nvPr>
-            <p:ph type="sldNum" idx="15"/>
+            <p:ph type="sldNum" idx="14"/>
           </p:nvPr>
         </p:nvSpPr>
         <p:spPr/>
         <p:txBody>
           <a:bodyPr/>
           <a:p>
-            <a:fld id="{18827FB1-0E59-4EF1-924E-05B976337AFC}" type="slidenum">
+            <a:fld id="{2453DD53-4D21-45B1-9325-3E96C7ECD6F0}" type="slidenum">
               <a:t>&lt;#&gt;</a:t>
             </a:fld>
           </a:p>
@@ -749,7 +749,7 @@
             <a:spLocks noGrp="1"/>
           </p:cNvSpPr>
           <p:nvPr>
-            <p:ph type="dt" idx="13"/>
+            <p:ph type="dt" idx="15"/>
           </p:nvPr>
         </p:nvSpPr>
         <p:spPr/>
@@ -787,7 +787,7 @@
       </p:grpSpPr>
       <p:sp>
         <p:nvSpPr>
-          <p:cNvPr id="35" name="PlaceHolder 1"/>
+          <p:cNvPr id="29" name="PlaceHolder 1"/>
           <p:cNvSpPr>
             <a:spLocks noGrp="1"/>
           </p:cNvSpPr>
@@ -798,7 +798,7 @@
         <p:spPr>
           <a:xfrm>
             <a:off x="685800" y="2130480"/>
-            <a:ext cx="7772040" cy="1469520"/>
+            <a:ext cx="7771680" cy="1469160"/>
           </a:xfrm>
           <a:prstGeom prst="rect">
             <a:avLst/>
@@ -813,21 +813,21 @@
             <a:noAutofit/>
           </a:bodyPr>
           <a:p>
-            <a:pPr indent="0">
+            <a:pPr indent="0" algn="ctr">
               <a:buNone/>
             </a:pPr>
-            <a:endParaRPr b="0" lang="pl-PL" sz="1800" spc="-1" strike="noStrike">
+            <a:endParaRPr b="0" lang="en-US" sz="4400" spc="-1" strike="noStrike">
               <a:solidFill>
-                <a:schemeClr val="dk1"/>
+                <a:srgbClr val="000000"/>
               </a:solidFill>
-              <a:latin typeface="Calibri"/>
+              <a:latin typeface="Arial"/>
             </a:endParaRPr>
           </a:p>
         </p:txBody>
       </p:sp>
       <p:sp>
         <p:nvSpPr>
-          <p:cNvPr id="36" name="PlaceHolder 2"/>
+          <p:cNvPr id="30" name="PlaceHolder 2"/>
           <p:cNvSpPr>
             <a:spLocks noGrp="1"/>
           </p:cNvSpPr>
@@ -859,18 +859,18 @@
               </a:spcBef>
               <a:buNone/>
             </a:pPr>
-            <a:endParaRPr b="0" lang="pl-PL" sz="3200" spc="-1" strike="noStrike">
+            <a:endParaRPr b="0" lang="en-US" sz="3200" spc="-1" strike="noStrike">
               <a:solidFill>
-                <a:schemeClr val="dk1"/>
+                <a:srgbClr val="000000"/>
               </a:solidFill>
-              <a:latin typeface="Calibri"/>
+              <a:latin typeface="Arial"/>
             </a:endParaRPr>
           </a:p>
         </p:txBody>
       </p:sp>
       <p:sp>
         <p:nvSpPr>
-          <p:cNvPr id="37" name="PlaceHolder 3"/>
+          <p:cNvPr id="31" name="PlaceHolder 3"/>
           <p:cNvSpPr>
             <a:spLocks noGrp="1"/>
           </p:cNvSpPr>
@@ -902,11 +902,11 @@
               </a:spcBef>
               <a:buNone/>
             </a:pPr>
-            <a:endParaRPr b="0" lang="pl-PL" sz="3200" spc="-1" strike="noStrike">
+            <a:endParaRPr b="0" lang="en-US" sz="3200" spc="-1" strike="noStrike">
               <a:solidFill>
-                <a:schemeClr val="dk1"/>
+                <a:srgbClr val="000000"/>
               </a:solidFill>
-              <a:latin typeface="Calibri"/>
+              <a:latin typeface="Arial"/>
             </a:endParaRPr>
           </a:p>
         </p:txBody>
@@ -918,7 +918,7 @@
             <a:spLocks noGrp="1"/>
           </p:cNvSpPr>
           <p:nvPr>
-            <p:ph type="ftr" idx="17"/>
+            <p:ph type="ftr" idx="16"/>
           </p:nvPr>
         </p:nvSpPr>
         <p:spPr/>
@@ -938,14 +938,14 @@
             <a:spLocks noGrp="1"/>
           </p:cNvSpPr>
           <p:nvPr>
-            <p:ph type="sldNum" idx="18"/>
+            <p:ph type="sldNum" idx="17"/>
           </p:nvPr>
         </p:nvSpPr>
         <p:spPr/>
         <p:txBody>
           <a:bodyPr/>
           <a:p>
-            <a:fld id="{361FD0AC-443C-4DE3-A026-200E0B353B71}" type="slidenum">
+            <a:fld id="{5406A2A7-9BC0-435F-BBF1-819AE9333E51}" type="slidenum">
               <a:t>&lt;#&gt;</a:t>
             </a:fld>
           </a:p>
@@ -958,7 +958,7 @@
             <a:spLocks noGrp="1"/>
           </p:cNvSpPr>
           <p:nvPr>
-            <p:ph type="dt" idx="16"/>
+            <p:ph type="dt" idx="18"/>
           </p:nvPr>
         </p:nvSpPr>
         <p:spPr/>
@@ -1001,7 +1001,7 @@
             <a:spLocks noGrp="1"/>
           </p:cNvSpPr>
           <p:nvPr>
-            <p:ph type="ftr" idx="20"/>
+            <p:ph type="ftr" idx="19"/>
           </p:nvPr>
         </p:nvSpPr>
         <p:spPr/>
@@ -1021,14 +1021,14 @@
             <a:spLocks noGrp="1"/>
           </p:cNvSpPr>
           <p:nvPr>
-            <p:ph type="sldNum" idx="21"/>
+            <p:ph type="sldNum" idx="20"/>
           </p:nvPr>
         </p:nvSpPr>
         <p:spPr/>
         <p:txBody>
           <a:bodyPr/>
           <a:p>
-            <a:fld id="{61AAF527-7AFC-4DA6-8B38-12D9A9C07379}" type="slidenum">
+            <a:fld id="{E6CDCD27-37F0-4221-ABFE-7E9CA5C69A42}" type="slidenum">
               <a:t>&lt;#&gt;</a:t>
             </a:fld>
           </a:p>
@@ -1041,7 +1041,7 @@
             <a:spLocks noGrp="1"/>
           </p:cNvSpPr>
           <p:nvPr>
-            <p:ph type="dt" idx="19"/>
+            <p:ph type="dt" idx="21"/>
           </p:nvPr>
         </p:nvSpPr>
         <p:spPr/>
@@ -1079,7 +1079,7 @@
       </p:grpSpPr>
       <p:sp>
         <p:nvSpPr>
-          <p:cNvPr id="50" name="PlaceHolder 1"/>
+          <p:cNvPr id="39" name="PlaceHolder 1"/>
           <p:cNvSpPr>
             <a:spLocks noGrp="1"/>
           </p:cNvSpPr>
@@ -1090,7 +1090,7 @@
         <p:spPr>
           <a:xfrm>
             <a:off x="685800" y="2130480"/>
-            <a:ext cx="7772040" cy="1469520"/>
+            <a:ext cx="7771680" cy="1469160"/>
           </a:xfrm>
           <a:prstGeom prst="rect">
             <a:avLst/>
@@ -1105,14 +1105,14 @@
             <a:noAutofit/>
           </a:bodyPr>
           <a:p>
-            <a:pPr indent="0">
+            <a:pPr indent="0" algn="ctr">
               <a:buNone/>
             </a:pPr>
-            <a:endParaRPr b="0" lang="pl-PL" sz="1800" spc="-1" strike="noStrike">
+            <a:endParaRPr b="0" lang="en-US" sz="4400" spc="-1" strike="noStrike">
               <a:solidFill>
-                <a:schemeClr val="dk1"/>
+                <a:srgbClr val="000000"/>
               </a:solidFill>
-              <a:latin typeface="Calibri"/>
+              <a:latin typeface="Arial"/>
             </a:endParaRPr>
           </a:p>
         </p:txBody>
@@ -1124,7 +1124,7 @@
             <a:spLocks noGrp="1"/>
           </p:cNvSpPr>
           <p:nvPr>
-            <p:ph type="ftr" idx="23"/>
+            <p:ph type="ftr" idx="22"/>
           </p:nvPr>
         </p:nvSpPr>
         <p:spPr/>
@@ -1144,14 +1144,14 @@
             <a:spLocks noGrp="1"/>
           </p:cNvSpPr>
           <p:nvPr>
-            <p:ph type="sldNum" idx="24"/>
+            <p:ph type="sldNum" idx="23"/>
           </p:nvPr>
         </p:nvSpPr>
         <p:spPr/>
         <p:txBody>
           <a:bodyPr/>
           <a:p>
-            <a:fld id="{540798FF-9AE8-4FAA-A7BE-81742FACADE9}" type="slidenum">
+            <a:fld id="{9D1C1A67-9BBD-42AE-8ECB-D4A978273570}" type="slidenum">
               <a:t>&lt;#&gt;</a:t>
             </a:fld>
           </a:p>
@@ -1164,7 +1164,7 @@
             <a:spLocks noGrp="1"/>
           </p:cNvSpPr>
           <p:nvPr>
-            <p:ph type="dt" idx="22"/>
+            <p:ph type="dt" idx="24"/>
           </p:nvPr>
         </p:nvSpPr>
         <p:spPr/>
@@ -1207,7 +1207,7 @@
             <a:spLocks noGrp="1"/>
           </p:cNvSpPr>
           <p:nvPr>
-            <p:ph type="ftr" idx="26"/>
+            <p:ph type="ftr" idx="25"/>
           </p:nvPr>
         </p:nvSpPr>
         <p:spPr/>
@@ -1227,14 +1227,14 @@
             <a:spLocks noGrp="1"/>
           </p:cNvSpPr>
           <p:nvPr>
-            <p:ph type="sldNum" idx="27"/>
+            <p:ph type="sldNum" idx="26"/>
           </p:nvPr>
         </p:nvSpPr>
         <p:spPr/>
         <p:txBody>
           <a:bodyPr/>
           <a:p>
-            <a:fld id="{366EB509-3B3F-4AAD-8750-63ACEFBD9665}" type="slidenum">
+            <a:fld id="{4D7DF3D1-5772-4684-A1C9-88E1079F507E}" type="slidenum">
               <a:t>&lt;#&gt;</a:t>
             </a:fld>
           </a:p>
@@ -1247,7 +1247,7 @@
             <a:spLocks noGrp="1"/>
           </p:cNvSpPr>
           <p:nvPr>
-            <p:ph type="dt" idx="25"/>
+            <p:ph type="dt" idx="27"/>
           </p:nvPr>
         </p:nvSpPr>
         <p:spPr/>
@@ -1303,7 +1303,7 @@
         <p:spPr>
           <a:xfrm>
             <a:off x="685800" y="2130480"/>
-            <a:ext cx="7772040" cy="1469520"/>
+            <a:ext cx="7771680" cy="1469160"/>
           </a:xfrm>
           <a:prstGeom prst="rect">
             <a:avLst/>
@@ -1314,30 +1314,27 @@
           </a:ln>
         </p:spPr>
         <p:txBody>
-          <a:bodyPr lIns="91440" rIns="91440" tIns="45720" bIns="45720" anchor="ctr">
+          <a:bodyPr lIns="0" rIns="0" tIns="0" bIns="0" anchor="ctr">
             <a:noAutofit/>
           </a:bodyPr>
           <a:p>
-            <a:pPr indent="0" algn="ctr" defTabSz="914400">
-              <a:lnSpc>
-                <a:spcPct val="100000"/>
-              </a:lnSpc>
+            <a:pPr indent="0">
               <a:buNone/>
             </a:pPr>
             <a:r>
-              <a:rPr b="0" lang="pl-PL" sz="4400" spc="-1" strike="noStrike">
-                <a:solidFill>
-                  <a:schemeClr val="dk1"/>
-                </a:solidFill>
-                <a:latin typeface="Calibri"/>
+              <a:rPr b="0" lang="en-US" sz="1800" spc="-1" strike="noStrike">
+                <a:solidFill>
+                  <a:srgbClr val="000000"/>
+                </a:solidFill>
+                <a:latin typeface="Arial"/>
               </a:rPr>
-              <a:t>Kliknij, aby edytować styl</a:t>
+              <a:t>Click to edit the title text format</a:t>
             </a:r>
-            <a:endParaRPr b="0" lang="pl-PL" sz="4400" spc="-1" strike="noStrike">
+            <a:endParaRPr b="0" lang="en-US" sz="1800" spc="-1" strike="noStrike">
               <a:solidFill>
-                <a:schemeClr val="dk1"/>
+                <a:srgbClr val="000000"/>
               </a:solidFill>
-              <a:latin typeface="Calibri"/>
+              <a:latin typeface="Arial"/>
             </a:endParaRPr>
           </a:p>
         </p:txBody>
@@ -1349,83 +1346,13 @@
             <a:spLocks noGrp="1"/>
           </p:cNvSpPr>
           <p:nvPr>
-            <p:ph type="dt" idx="1"/>
-          </p:nvPr>
-        </p:nvSpPr>
-        <p:spPr>
-          <a:xfrm>
-            <a:off x="457200" y="6356520"/>
-            <a:ext cx="2133360" cy="364680"/>
-          </a:xfrm>
-          <a:prstGeom prst="rect">
-            <a:avLst/>
-          </a:prstGeom>
-          <a:noFill/>
-          <a:ln w="0">
-            <a:noFill/>
-          </a:ln>
-        </p:spPr>
-        <p:txBody>
-          <a:bodyPr lIns="91440" rIns="91440" tIns="45720" bIns="45720" anchor="ctr">
-            <a:noAutofit/>
-          </a:bodyPr>
-          <a:lstStyle>
-            <a:lvl1pPr indent="0" defTabSz="914400">
-              <a:lnSpc>
-                <a:spcPct val="100000"/>
-              </a:lnSpc>
-              <a:buNone/>
-              <a:defRPr b="0" lang="pl-PL" sz="1200" spc="-1" strike="noStrike">
-                <a:solidFill>
-                  <a:schemeClr val="dk1">
-                    <a:tint val="75000"/>
-                  </a:schemeClr>
-                </a:solidFill>
-                <a:latin typeface="Calibri"/>
-              </a:defRPr>
-            </a:lvl1pPr>
-          </a:lstStyle>
-          <a:p>
-            <a:pPr indent="0" defTabSz="914400">
-              <a:lnSpc>
-                <a:spcPct val="100000"/>
-              </a:lnSpc>
-              <a:buNone/>
-            </a:pPr>
-            <a:r>
-              <a:rPr b="0" lang="pl-PL" sz="1200" spc="-1" strike="noStrike">
-                <a:solidFill>
-                  <a:schemeClr val="dk1">
-                    <a:tint val="75000"/>
-                  </a:schemeClr>
-                </a:solidFill>
-                <a:latin typeface="Calibri"/>
-              </a:rPr>
-              <a:t>&lt;date/time&gt;</a:t>
-            </a:r>
-            <a:endParaRPr b="0" lang="en-US" sz="1200" spc="-1" strike="noStrike">
-              <a:solidFill>
-                <a:srgbClr val="000000"/>
-              </a:solidFill>
-              <a:latin typeface="Times New Roman"/>
-            </a:endParaRPr>
-          </a:p>
-        </p:txBody>
-      </p:sp>
-      <p:sp>
-        <p:nvSpPr>
-          <p:cNvPr id="2" name="PlaceHolder 3"/>
-          <p:cNvSpPr>
-            <a:spLocks noGrp="1"/>
-          </p:cNvSpPr>
-          <p:nvPr>
-            <p:ph type="ftr" idx="2"/>
+            <p:ph type="ftr" idx="1"/>
           </p:nvPr>
         </p:nvSpPr>
         <p:spPr>
           <a:xfrm>
             <a:off x="3124080" y="6356520"/>
-            <a:ext cx="2895120" cy="364680"/>
+            <a:ext cx="2894760" cy="364320"/>
           </a:xfrm>
           <a:prstGeom prst="rect">
             <a:avLst/>
@@ -1441,7 +1368,13 @@
           </a:bodyPr>
           <a:lstStyle>
             <a:lvl1pPr indent="0" algn="ctr">
+              <a:lnSpc>
+                <a:spcPct val="100000"/>
+              </a:lnSpc>
               <a:buNone/>
+              <a:tabLst>
+                <a:tab algn="l" pos="0"/>
+              </a:tabLst>
               <a:defRPr b="0" lang="en-US" sz="1400" spc="-1" strike="noStrike">
                 <a:solidFill>
                   <a:srgbClr val="000000"/>
@@ -1452,7 +1385,13 @@
           </a:lstStyle>
           <a:p>
             <a:pPr indent="0" algn="ctr">
+              <a:lnSpc>
+                <a:spcPct val="100000"/>
+              </a:lnSpc>
               <a:buNone/>
+              <a:tabLst>
+                <a:tab algn="l" pos="0"/>
+              </a:tabLst>
             </a:pPr>
             <a:r>
               <a:rPr b="0" lang="en-US" sz="1400" spc="-1" strike="noStrike">
@@ -1474,18 +1413,18 @@
       </p:sp>
       <p:sp>
         <p:nvSpPr>
-          <p:cNvPr id="3" name="PlaceHolder 4"/>
+          <p:cNvPr id="2" name="PlaceHolder 3"/>
           <p:cNvSpPr>
             <a:spLocks noGrp="1"/>
           </p:cNvSpPr>
           <p:nvPr>
-            <p:ph type="sldNum" idx="3"/>
+            <p:ph type="sldNum" idx="2"/>
           </p:nvPr>
         </p:nvSpPr>
         <p:spPr>
           <a:xfrm>
             <a:off x="6553080" y="6356520"/>
-            <a:ext cx="2133360" cy="364680"/>
+            <a:ext cx="2133000" cy="364320"/>
           </a:xfrm>
           <a:prstGeom prst="rect">
             <a:avLst/>
@@ -1505,6 +1444,9 @@
                 <a:spcPct val="100000"/>
               </a:lnSpc>
               <a:buNone/>
+              <a:tabLst>
+                <a:tab algn="l" pos="0"/>
+              </a:tabLst>
               <a:defRPr b="0" lang="pl-PL" sz="1200" spc="-1" strike="noStrike">
                 <a:solidFill>
                   <a:schemeClr val="dk1">
@@ -1521,8 +1463,11 @@
                 <a:spcPct val="100000"/>
               </a:lnSpc>
               <a:buNone/>
+              <a:tabLst>
+                <a:tab algn="l" pos="0"/>
+              </a:tabLst>
             </a:pPr>
-            <a:fld id="{F483DFB5-7D08-4054-BD2B-B7CBF91061B5}" type="slidenum">
+            <a:fld id="{92CAD776-98F6-405D-A742-6691D0FD0211}" type="slidenum">
               <a:rPr b="0" lang="pl-PL" sz="1200" spc="-1" strike="noStrike">
                 <a:solidFill>
                   <a:schemeClr val="dk1">
@@ -1534,6 +1479,66 @@
               <a:t>&lt;number&gt;</a:t>
             </a:fld>
             <a:endParaRPr b="0" lang="en-US" sz="1200" spc="-1" strike="noStrike">
+              <a:solidFill>
+                <a:srgbClr val="000000"/>
+              </a:solidFill>
+              <a:latin typeface="Times New Roman"/>
+            </a:endParaRPr>
+          </a:p>
+        </p:txBody>
+      </p:sp>
+      <p:sp>
+        <p:nvSpPr>
+          <p:cNvPr id="3" name="PlaceHolder 4"/>
+          <p:cNvSpPr>
+            <a:spLocks noGrp="1"/>
+          </p:cNvSpPr>
+          <p:nvPr>
+            <p:ph type="dt" idx="3"/>
+          </p:nvPr>
+        </p:nvSpPr>
+        <p:spPr>
+          <a:xfrm>
+            <a:off x="457200" y="6356520"/>
+            <a:ext cx="2133000" cy="364320"/>
+          </a:xfrm>
+          <a:prstGeom prst="rect">
+            <a:avLst/>
+          </a:prstGeom>
+          <a:noFill/>
+          <a:ln w="0">
+            <a:noFill/>
+          </a:ln>
+        </p:spPr>
+        <p:txBody>
+          <a:bodyPr lIns="91440" rIns="91440" tIns="45720" bIns="45720" anchor="ctr">
+            <a:noAutofit/>
+          </a:bodyPr>
+          <a:lstStyle>
+            <a:lvl1pPr indent="0">
+              <a:buNone/>
+              <a:defRPr b="0" lang="en-US" sz="1400" spc="-1" strike="noStrike">
+                <a:solidFill>
+                  <a:srgbClr val="000000"/>
+                </a:solidFill>
+                <a:latin typeface="Times New Roman"/>
+              </a:defRPr>
+            </a:lvl1pPr>
+          </a:lstStyle>
+          <a:p>
+            <a:pPr indent="0">
+              <a:buNone/>
+            </a:pPr>
+            <a:r>
+              <a:rPr b="0" lang="en-US" sz="1400" spc="-1" strike="noStrike">
+                <a:solidFill>
+                  <a:srgbClr val="000000"/>
+                </a:solidFill>
+                <a:latin typeface="Times New Roman"/>
+              </a:rPr>
+              <a:t>&lt;date/time&gt;</a:t>
+            </a:r>
+            <a:endParaRPr b="0" lang="en-US" sz="1400" spc="-1" strike="noStrike">
               <a:solidFill>
                 <a:srgbClr val="000000"/>
               </a:solidFill>
@@ -1582,19 +1587,19 @@
               <a:buChar char=""/>
             </a:pPr>
             <a:r>
-              <a:rPr b="0" lang="pl-PL" sz="3200" spc="-1" strike="noStrike">
-                <a:solidFill>
-                  <a:schemeClr val="dk1"/>
-                </a:solidFill>
-                <a:latin typeface="Calibri"/>
+              <a:rPr b="0" lang="en-US" sz="3200" spc="-1" strike="noStrike">
+                <a:solidFill>
+                  <a:srgbClr val="000000"/>
+                </a:solidFill>
+                <a:latin typeface="Arial"/>
               </a:rPr>
               <a:t>Click to edit the outline text format</a:t>
             </a:r>
-            <a:endParaRPr b="0" lang="pl-PL" sz="3200" spc="-1" strike="noStrike">
+            <a:endParaRPr b="0" lang="en-US" sz="3200" spc="-1" strike="noStrike">
               <a:solidFill>
-                <a:schemeClr val="dk1"/>
+                <a:srgbClr val="000000"/>
               </a:solidFill>
-              <a:latin typeface="Calibri"/>
+              <a:latin typeface="Arial"/>
             </a:endParaRPr>
           </a:p>
           <a:p>
@@ -1610,19 +1615,19 @@
               <a:buChar char=""/>
             </a:pPr>
             <a:r>
-              <a:rPr b="0" lang="pl-PL" sz="2400" spc="-1" strike="noStrike">
-                <a:solidFill>
-                  <a:schemeClr val="dk1"/>
-                </a:solidFill>
-                <a:latin typeface="Calibri"/>
+              <a:rPr b="0" lang="en-US" sz="2800" spc="-1" strike="noStrike">
+                <a:solidFill>
+                  <a:srgbClr val="000000"/>
+                </a:solidFill>
+                <a:latin typeface="Arial"/>
               </a:rPr>
               <a:t>Second Outline Level</a:t>
             </a:r>
-            <a:endParaRPr b="0" lang="pl-PL" sz="2400" spc="-1" strike="noStrike">
+            <a:endParaRPr b="0" lang="en-US" sz="2800" spc="-1" strike="noStrike">
               <a:solidFill>
-                <a:schemeClr val="dk1"/>
+                <a:srgbClr val="000000"/>
               </a:solidFill>
-              <a:latin typeface="Calibri"/>
+              <a:latin typeface="Arial"/>
             </a:endParaRPr>
           </a:p>
           <a:p>
@@ -1638,19 +1643,19 @@
               <a:buChar char=""/>
             </a:pPr>
             <a:r>
-              <a:rPr b="0" lang="pl-PL" sz="2000" spc="-1" strike="noStrike">
-                <a:solidFill>
-                  <a:schemeClr val="dk1"/>
-                </a:solidFill>
-                <a:latin typeface="Calibri"/>
+              <a:rPr b="0" lang="en-US" sz="2400" spc="-1" strike="noStrike">
+                <a:solidFill>
+                  <a:srgbClr val="000000"/>
+                </a:solidFill>
+                <a:latin typeface="Arial"/>
               </a:rPr>
               <a:t>Third Outline Level</a:t>
             </a:r>
-            <a:endParaRPr b="0" lang="pl-PL" sz="2000" spc="-1" strike="noStrike">
+            <a:endParaRPr b="0" lang="en-US" sz="2400" spc="-1" strike="noStrike">
               <a:solidFill>
-                <a:schemeClr val="dk1"/>
+                <a:srgbClr val="000000"/>
               </a:solidFill>
-              <a:latin typeface="Calibri"/>
+              <a:latin typeface="Arial"/>
             </a:endParaRPr>
           </a:p>
           <a:p>
@@ -1666,19 +1671,19 @@
               <a:buChar char=""/>
             </a:pPr>
             <a:r>
-              <a:rPr b="0" lang="pl-PL" sz="2000" spc="-1" strike="noStrike">
-                <a:solidFill>
-                  <a:schemeClr val="dk1"/>
-                </a:solidFill>
-                <a:latin typeface="Calibri"/>
+              <a:rPr b="0" lang="en-US" sz="2000" spc="-1" strike="noStrike">
+                <a:solidFill>
+                  <a:srgbClr val="000000"/>
+                </a:solidFill>
+                <a:latin typeface="Arial"/>
               </a:rPr>
               <a:t>Fourth Outline Level</a:t>
             </a:r>
-            <a:endParaRPr b="0" lang="pl-PL" sz="2000" spc="-1" strike="noStrike">
+            <a:endParaRPr b="0" lang="en-US" sz="2000" spc="-1" strike="noStrike">
               <a:solidFill>
-                <a:schemeClr val="dk1"/>
+                <a:srgbClr val="000000"/>
               </a:solidFill>
-              <a:latin typeface="Calibri"/>
+              <a:latin typeface="Arial"/>
             </a:endParaRPr>
           </a:p>
           <a:p>
@@ -1694,19 +1699,19 @@
               <a:buChar char=""/>
             </a:pPr>
             <a:r>
-              <a:rPr b="0" lang="pl-PL" sz="2000" spc="-1" strike="noStrike">
-                <a:solidFill>
-                  <a:schemeClr val="dk1"/>
-                </a:solidFill>
-                <a:latin typeface="Calibri"/>
+              <a:rPr b="0" lang="en-US" sz="2000" spc="-1" strike="noStrike">
+                <a:solidFill>
+                  <a:srgbClr val="000000"/>
+                </a:solidFill>
+                <a:latin typeface="Arial"/>
               </a:rPr>
               <a:t>Fifth Outline Level</a:t>
             </a:r>
-            <a:endParaRPr b="0" lang="pl-PL" sz="2000" spc="-1" strike="noStrike">
+            <a:endParaRPr b="0" lang="en-US" sz="2000" spc="-1" strike="noStrike">
               <a:solidFill>
-                <a:schemeClr val="dk1"/>
+                <a:srgbClr val="000000"/>
               </a:solidFill>
-              <a:latin typeface="Calibri"/>
+              <a:latin typeface="Arial"/>
             </a:endParaRPr>
           </a:p>
           <a:p>
@@ -1722,19 +1727,19 @@
               <a:buChar char=""/>
             </a:pPr>
             <a:r>
-              <a:rPr b="0" lang="pl-PL" sz="2000" spc="-1" strike="noStrike">
-                <a:solidFill>
-                  <a:schemeClr val="dk1"/>
-                </a:solidFill>
-                <a:latin typeface="Calibri"/>
+              <a:rPr b="0" lang="en-US" sz="2000" spc="-1" strike="noStrike">
+                <a:solidFill>
+                  <a:srgbClr val="000000"/>
+                </a:solidFill>
+                <a:latin typeface="Arial"/>
               </a:rPr>
               <a:t>Sixth Outline Level</a:t>
             </a:r>
-            <a:endParaRPr b="0" lang="pl-PL" sz="2000" spc="-1" strike="noStrike">
+            <a:endParaRPr b="0" lang="en-US" sz="2000" spc="-1" strike="noStrike">
               <a:solidFill>
-                <a:schemeClr val="dk1"/>
+                <a:srgbClr val="000000"/>
               </a:solidFill>
-              <a:latin typeface="Calibri"/>
+              <a:latin typeface="Arial"/>
             </a:endParaRPr>
           </a:p>
           <a:p>
@@ -1750,19 +1755,19 @@
               <a:buChar char=""/>
             </a:pPr>
             <a:r>
-              <a:rPr b="0" lang="pl-PL" sz="2000" spc="-1" strike="noStrike">
-                <a:solidFill>
-                  <a:schemeClr val="dk1"/>
-                </a:solidFill>
-                <a:latin typeface="Calibri"/>
+              <a:rPr b="0" lang="en-US" sz="2000" spc="-1" strike="noStrike">
+                <a:solidFill>
+                  <a:srgbClr val="000000"/>
+                </a:solidFill>
+                <a:latin typeface="Arial"/>
               </a:rPr>
               <a:t>Seventh Outline Level</a:t>
             </a:r>
-            <a:endParaRPr b="0" lang="pl-PL" sz="2000" spc="-1" strike="noStrike">
+            <a:endParaRPr b="0" lang="en-US" sz="2000" spc="-1" strike="noStrike">
               <a:solidFill>
-                <a:schemeClr val="dk1"/>
+                <a:srgbClr val="000000"/>
               </a:solidFill>
-              <a:latin typeface="Calibri"/>
+              <a:latin typeface="Arial"/>
             </a:endParaRPr>
           </a:p>
         </p:txBody>
@@ -1802,377 +1807,18 @@
       </p:grpSpPr>
       <p:sp>
         <p:nvSpPr>
-          <p:cNvPr id="54" name="PlaceHolder 1"/>
+          <p:cNvPr id="43" name="PlaceHolder 1"/>
           <p:cNvSpPr>
             <a:spLocks noGrp="1"/>
           </p:cNvSpPr>
           <p:nvPr>
-            <p:ph type="title"/>
-          </p:nvPr>
-        </p:nvSpPr>
-        <p:spPr>
-          <a:xfrm>
-            <a:off x="457200" y="272880"/>
-            <a:ext cx="3007800" cy="1161720"/>
-          </a:xfrm>
-          <a:prstGeom prst="rect">
-            <a:avLst/>
-          </a:prstGeom>
-          <a:noFill/>
-          <a:ln w="0">
-            <a:noFill/>
-          </a:ln>
-        </p:spPr>
-        <p:txBody>
-          <a:bodyPr lIns="91440" rIns="91440" tIns="45720" bIns="45720" anchor="b">
-            <a:noAutofit/>
-          </a:bodyPr>
-          <a:p>
-            <a:pPr indent="0" defTabSz="914400">
-              <a:lnSpc>
-                <a:spcPct val="100000"/>
-              </a:lnSpc>
-              <a:buNone/>
-            </a:pPr>
-            <a:r>
-              <a:rPr b="1" lang="pl-PL" sz="2000" spc="-1" strike="noStrike">
-                <a:solidFill>
-                  <a:schemeClr val="dk1"/>
-                </a:solidFill>
-                <a:latin typeface="Calibri"/>
-              </a:rPr>
-              <a:t>Kliknij, aby edytować styl</a:t>
-            </a:r>
-            <a:endParaRPr b="0" lang="pl-PL" sz="2000" spc="-1" strike="noStrike">
-              <a:solidFill>
-                <a:schemeClr val="dk1"/>
-              </a:solidFill>
-              <a:latin typeface="Calibri"/>
-            </a:endParaRPr>
-          </a:p>
-        </p:txBody>
-      </p:sp>
-      <p:sp>
-        <p:nvSpPr>
-          <p:cNvPr id="55" name="PlaceHolder 2"/>
-          <p:cNvSpPr>
-            <a:spLocks noGrp="1"/>
-          </p:cNvSpPr>
-          <p:nvPr>
-            <p:ph type="body"/>
-          </p:nvPr>
-        </p:nvSpPr>
-        <p:spPr>
-          <a:xfrm>
-            <a:off x="3575160" y="272880"/>
-            <a:ext cx="5111280" cy="5852880"/>
-          </a:xfrm>
-          <a:prstGeom prst="rect">
-            <a:avLst/>
-          </a:prstGeom>
-          <a:noFill/>
-          <a:ln w="0">
-            <a:noFill/>
-          </a:ln>
-        </p:spPr>
-        <p:txBody>
-          <a:bodyPr lIns="91440" rIns="91440" tIns="45720" bIns="45720" anchor="t">
-            <a:noAutofit/>
-          </a:bodyPr>
-          <a:p>
-            <a:pPr marL="343080" indent="-343080" defTabSz="914400">
-              <a:lnSpc>
-                <a:spcPct val="100000"/>
-              </a:lnSpc>
-              <a:spcBef>
-                <a:spcPts val="641"/>
-              </a:spcBef>
-              <a:buClr>
-                <a:srgbClr val="000000"/>
-              </a:buClr>
-              <a:buFont typeface="Arial"/>
-              <a:buChar char="•"/>
-            </a:pPr>
-            <a:r>
-              <a:rPr b="0" lang="pl-PL" sz="3200" spc="-1" strike="noStrike">
-                <a:solidFill>
-                  <a:schemeClr val="dk1"/>
-                </a:solidFill>
-                <a:latin typeface="Calibri"/>
-              </a:rPr>
-              <a:t>Kliknij, aby edytować style wzorca tekstu</a:t>
-            </a:r>
-            <a:endParaRPr b="0" lang="pl-PL" sz="3200" spc="-1" strike="noStrike">
-              <a:solidFill>
-                <a:schemeClr val="dk1"/>
-              </a:solidFill>
-              <a:latin typeface="Calibri"/>
-            </a:endParaRPr>
-          </a:p>
-          <a:p>
-            <a:pPr lvl="1" marL="743040" indent="-285840" defTabSz="914400">
-              <a:lnSpc>
-                <a:spcPct val="100000"/>
-              </a:lnSpc>
-              <a:spcBef>
-                <a:spcPts val="561"/>
-              </a:spcBef>
-              <a:buClr>
-                <a:srgbClr val="000000"/>
-              </a:buClr>
-              <a:buFont typeface="Arial"/>
-              <a:buChar char="–"/>
-            </a:pPr>
-            <a:r>
-              <a:rPr b="0" lang="pl-PL" sz="2800" spc="-1" strike="noStrike">
-                <a:solidFill>
-                  <a:schemeClr val="dk1"/>
-                </a:solidFill>
-                <a:latin typeface="Calibri"/>
-              </a:rPr>
-              <a:t>Drugi poziom</a:t>
-            </a:r>
-            <a:endParaRPr b="0" lang="pl-PL" sz="2800" spc="-1" strike="noStrike">
-              <a:solidFill>
-                <a:schemeClr val="dk1"/>
-              </a:solidFill>
-              <a:latin typeface="Calibri"/>
-            </a:endParaRPr>
-          </a:p>
-          <a:p>
-            <a:pPr lvl="2" marL="1143000" indent="-228600" defTabSz="914400">
-              <a:lnSpc>
-                <a:spcPct val="100000"/>
-              </a:lnSpc>
-              <a:spcBef>
-                <a:spcPts val="479"/>
-              </a:spcBef>
-              <a:buClr>
-                <a:srgbClr val="000000"/>
-              </a:buClr>
-              <a:buFont typeface="Arial"/>
-              <a:buChar char="•"/>
-            </a:pPr>
-            <a:r>
-              <a:rPr b="0" lang="pl-PL" sz="2400" spc="-1" strike="noStrike">
-                <a:solidFill>
-                  <a:schemeClr val="dk1"/>
-                </a:solidFill>
-                <a:latin typeface="Calibri"/>
-              </a:rPr>
-              <a:t>Trzeci poziom</a:t>
-            </a:r>
-            <a:endParaRPr b="0" lang="pl-PL" sz="2400" spc="-1" strike="noStrike">
-              <a:solidFill>
-                <a:schemeClr val="dk1"/>
-              </a:solidFill>
-              <a:latin typeface="Calibri"/>
-            </a:endParaRPr>
-          </a:p>
-          <a:p>
-            <a:pPr lvl="3" marL="1600200" indent="-228600" defTabSz="914400">
-              <a:lnSpc>
-                <a:spcPct val="100000"/>
-              </a:lnSpc>
-              <a:spcBef>
-                <a:spcPts val="400"/>
-              </a:spcBef>
-              <a:buClr>
-                <a:srgbClr val="000000"/>
-              </a:buClr>
-              <a:buFont typeface="Arial"/>
-              <a:buChar char="–"/>
-            </a:pPr>
-            <a:r>
-              <a:rPr b="0" lang="pl-PL" sz="2000" spc="-1" strike="noStrike">
-                <a:solidFill>
-                  <a:schemeClr val="dk1"/>
-                </a:solidFill>
-                <a:latin typeface="Calibri"/>
-              </a:rPr>
-              <a:t>Czwarty poziom</a:t>
-            </a:r>
-            <a:endParaRPr b="0" lang="pl-PL" sz="2000" spc="-1" strike="noStrike">
-              <a:solidFill>
-                <a:schemeClr val="dk1"/>
-              </a:solidFill>
-              <a:latin typeface="Calibri"/>
-            </a:endParaRPr>
-          </a:p>
-          <a:p>
-            <a:pPr lvl="4" marL="2057400" indent="-228600" defTabSz="914400">
-              <a:lnSpc>
-                <a:spcPct val="100000"/>
-              </a:lnSpc>
-              <a:spcBef>
-                <a:spcPts val="400"/>
-              </a:spcBef>
-              <a:buClr>
-                <a:srgbClr val="000000"/>
-              </a:buClr>
-              <a:buFont typeface="Arial"/>
-              <a:buChar char="»"/>
-            </a:pPr>
-            <a:r>
-              <a:rPr b="0" lang="pl-PL" sz="2000" spc="-1" strike="noStrike">
-                <a:solidFill>
-                  <a:schemeClr val="dk1"/>
-                </a:solidFill>
-                <a:latin typeface="Calibri"/>
-              </a:rPr>
-              <a:t>Piąty poziom</a:t>
-            </a:r>
-            <a:endParaRPr b="0" lang="pl-PL" sz="2000" spc="-1" strike="noStrike">
-              <a:solidFill>
-                <a:schemeClr val="dk1"/>
-              </a:solidFill>
-              <a:latin typeface="Calibri"/>
-            </a:endParaRPr>
-          </a:p>
-        </p:txBody>
-      </p:sp>
-      <p:sp>
-        <p:nvSpPr>
-          <p:cNvPr id="56" name="PlaceHolder 3"/>
-          <p:cNvSpPr>
-            <a:spLocks noGrp="1"/>
-          </p:cNvSpPr>
-          <p:nvPr>
-            <p:ph type="body"/>
-          </p:nvPr>
-        </p:nvSpPr>
-        <p:spPr>
-          <a:xfrm>
-            <a:off x="457200" y="1434960"/>
-            <a:ext cx="3007800" cy="4690800"/>
-          </a:xfrm>
-          <a:prstGeom prst="rect">
-            <a:avLst/>
-          </a:prstGeom>
-          <a:noFill/>
-          <a:ln w="0">
-            <a:noFill/>
-          </a:ln>
-        </p:spPr>
-        <p:txBody>
-          <a:bodyPr lIns="91440" rIns="91440" tIns="45720" bIns="45720" anchor="t">
-            <a:noAutofit/>
-          </a:bodyPr>
-          <a:p>
-            <a:pPr indent="0" defTabSz="914400">
-              <a:lnSpc>
-                <a:spcPct val="100000"/>
-              </a:lnSpc>
-              <a:spcBef>
-                <a:spcPts val="281"/>
-              </a:spcBef>
-              <a:buNone/>
-              <a:tabLst>
-                <a:tab algn="l" pos="0"/>
-              </a:tabLst>
-            </a:pPr>
-            <a:r>
-              <a:rPr b="0" lang="pl-PL" sz="1400" spc="-1" strike="noStrike">
-                <a:solidFill>
-                  <a:schemeClr val="dk1"/>
-                </a:solidFill>
-                <a:latin typeface="Calibri"/>
-              </a:rPr>
-              <a:t>Kliknij, aby edytować style wzorca tekstu</a:t>
-            </a:r>
-            <a:endParaRPr b="0" lang="pl-PL" sz="1400" spc="-1" strike="noStrike">
-              <a:solidFill>
-                <a:schemeClr val="dk1"/>
-              </a:solidFill>
-              <a:latin typeface="Calibri"/>
-            </a:endParaRPr>
-          </a:p>
-        </p:txBody>
-      </p:sp>
-      <p:sp>
-        <p:nvSpPr>
-          <p:cNvPr id="57" name="PlaceHolder 4"/>
-          <p:cNvSpPr>
-            <a:spLocks noGrp="1"/>
-          </p:cNvSpPr>
-          <p:nvPr>
-            <p:ph type="dt" idx="28"/>
-          </p:nvPr>
-        </p:nvSpPr>
-        <p:spPr>
-          <a:xfrm>
-            <a:off x="457200" y="6356520"/>
-            <a:ext cx="2133360" cy="364680"/>
-          </a:xfrm>
-          <a:prstGeom prst="rect">
-            <a:avLst/>
-          </a:prstGeom>
-          <a:noFill/>
-          <a:ln w="0">
-            <a:noFill/>
-          </a:ln>
-        </p:spPr>
-        <p:txBody>
-          <a:bodyPr lIns="91440" rIns="91440" tIns="45720" bIns="45720" anchor="ctr">
-            <a:noAutofit/>
-          </a:bodyPr>
-          <a:lstStyle>
-            <a:lvl1pPr indent="0" defTabSz="914400">
-              <a:lnSpc>
-                <a:spcPct val="100000"/>
-              </a:lnSpc>
-              <a:buNone/>
-              <a:defRPr b="0" lang="pl-PL" sz="1200" spc="-1" strike="noStrike">
-                <a:solidFill>
-                  <a:schemeClr val="dk1">
-                    <a:tint val="75000"/>
-                  </a:schemeClr>
-                </a:solidFill>
-                <a:latin typeface="Calibri"/>
-              </a:defRPr>
-            </a:lvl1pPr>
-          </a:lstStyle>
-          <a:p>
-            <a:pPr indent="0" defTabSz="914400">
-              <a:lnSpc>
-                <a:spcPct val="100000"/>
-              </a:lnSpc>
-              <a:buNone/>
-            </a:pPr>
-            <a:r>
-              <a:rPr b="0" lang="pl-PL" sz="1200" spc="-1" strike="noStrike">
-                <a:solidFill>
-                  <a:schemeClr val="dk1">
-                    <a:tint val="75000"/>
-                  </a:schemeClr>
-                </a:solidFill>
-                <a:latin typeface="Calibri"/>
-              </a:rPr>
-              <a:t>&lt;date/time&gt;</a:t>
-            </a:r>
-            <a:endParaRPr b="0" lang="en-US" sz="1200" spc="-1" strike="noStrike">
-              <a:solidFill>
-                <a:srgbClr val="000000"/>
-              </a:solidFill>
-              <a:latin typeface="Times New Roman"/>
-            </a:endParaRPr>
-          </a:p>
-        </p:txBody>
-      </p:sp>
-      <p:sp>
-        <p:nvSpPr>
-          <p:cNvPr id="58" name="PlaceHolder 5"/>
-          <p:cNvSpPr>
-            <a:spLocks noGrp="1"/>
-          </p:cNvSpPr>
-          <p:nvPr>
-            <p:ph type="ftr" idx="29"/>
+            <p:ph type="ftr" idx="28"/>
           </p:nvPr>
         </p:nvSpPr>
         <p:spPr>
           <a:xfrm>
             <a:off x="3124080" y="6356520"/>
-            <a:ext cx="2895120" cy="364680"/>
+            <a:ext cx="2894760" cy="364320"/>
           </a:xfrm>
           <a:prstGeom prst="rect">
             <a:avLst/>
@@ -2188,7 +1834,13 @@
           </a:bodyPr>
           <a:lstStyle>
             <a:lvl1pPr indent="0" algn="ctr">
+              <a:lnSpc>
+                <a:spcPct val="100000"/>
+              </a:lnSpc>
               <a:buNone/>
+              <a:tabLst>
+                <a:tab algn="l" pos="0"/>
+              </a:tabLst>
               <a:defRPr b="0" lang="en-US" sz="1400" spc="-1" strike="noStrike">
                 <a:solidFill>
                   <a:srgbClr val="000000"/>
@@ -2199,7 +1851,13 @@
           </a:lstStyle>
           <a:p>
             <a:pPr indent="0" algn="ctr">
+              <a:lnSpc>
+                <a:spcPct val="100000"/>
+              </a:lnSpc>
               <a:buNone/>
+              <a:tabLst>
+                <a:tab algn="l" pos="0"/>
+              </a:tabLst>
             </a:pPr>
             <a:r>
               <a:rPr b="0" lang="en-US" sz="1400" spc="-1" strike="noStrike">
@@ -2221,18 +1879,18 @@
       </p:sp>
       <p:sp>
         <p:nvSpPr>
-          <p:cNvPr id="59" name="PlaceHolder 6"/>
+          <p:cNvPr id="44" name="PlaceHolder 2"/>
           <p:cNvSpPr>
             <a:spLocks noGrp="1"/>
           </p:cNvSpPr>
           <p:nvPr>
-            <p:ph type="sldNum" idx="30"/>
+            <p:ph type="sldNum" idx="29"/>
           </p:nvPr>
         </p:nvSpPr>
         <p:spPr>
           <a:xfrm>
             <a:off x="6553080" y="6356520"/>
-            <a:ext cx="2133360" cy="364680"/>
+            <a:ext cx="2133000" cy="364320"/>
           </a:xfrm>
           <a:prstGeom prst="rect">
             <a:avLst/>
@@ -2252,6 +1910,9 @@
                 <a:spcPct val="100000"/>
               </a:lnSpc>
               <a:buNone/>
+              <a:tabLst>
+                <a:tab algn="l" pos="0"/>
+              </a:tabLst>
               <a:defRPr b="0" lang="pl-PL" sz="1200" spc="-1" strike="noStrike">
                 <a:solidFill>
                   <a:schemeClr val="dk1">
@@ -2268,8 +1929,11 @@
                 <a:spcPct val="100000"/>
               </a:lnSpc>
               <a:buNone/>
+              <a:tabLst>
+                <a:tab algn="l" pos="0"/>
+              </a:tabLst>
             </a:pPr>
-            <a:fld id="{5187930E-324D-4359-A554-B946189D89A4}" type="slidenum">
+            <a:fld id="{0B5D04A8-D003-4097-811B-3A7583FDC73E}" type="slidenum">
               <a:rPr b="0" lang="pl-PL" sz="1200" spc="-1" strike="noStrike">
                 <a:solidFill>
                   <a:schemeClr val="dk1">
@@ -2281,6 +1945,66 @@
               <a:t>&lt;number&gt;</a:t>
             </a:fld>
             <a:endParaRPr b="0" lang="en-US" sz="1200" spc="-1" strike="noStrike">
+              <a:solidFill>
+                <a:srgbClr val="000000"/>
+              </a:solidFill>
+              <a:latin typeface="Times New Roman"/>
+            </a:endParaRPr>
+          </a:p>
+        </p:txBody>
+      </p:sp>
+      <p:sp>
+        <p:nvSpPr>
+          <p:cNvPr id="45" name="PlaceHolder 3"/>
+          <p:cNvSpPr>
+            <a:spLocks noGrp="1"/>
+          </p:cNvSpPr>
+          <p:nvPr>
+            <p:ph type="dt" idx="30"/>
+          </p:nvPr>
+        </p:nvSpPr>
+        <p:spPr>
+          <a:xfrm>
+            <a:off x="457200" y="6356520"/>
+            <a:ext cx="2133000" cy="364320"/>
+          </a:xfrm>
+          <a:prstGeom prst="rect">
+            <a:avLst/>
+          </a:prstGeom>
+          <a:noFill/>
+          <a:ln w="0">
+            <a:noFill/>
+          </a:ln>
+        </p:spPr>
+        <p:txBody>
+          <a:bodyPr lIns="91440" rIns="91440" tIns="45720" bIns="45720" anchor="ctr">
+            <a:noAutofit/>
+          </a:bodyPr>
+          <a:lstStyle>
+            <a:lvl1pPr indent="0">
+              <a:buNone/>
+              <a:defRPr b="0" lang="en-US" sz="1400" spc="-1" strike="noStrike">
+                <a:solidFill>
+                  <a:srgbClr val="000000"/>
+                </a:solidFill>
+                <a:latin typeface="Times New Roman"/>
+              </a:defRPr>
+            </a:lvl1pPr>
+          </a:lstStyle>
+          <a:p>
+            <a:pPr indent="0">
+              <a:buNone/>
+            </a:pPr>
+            <a:r>
+              <a:rPr b="0" lang="en-US" sz="1400" spc="-1" strike="noStrike">
+                <a:solidFill>
+                  <a:srgbClr val="000000"/>
+                </a:solidFill>
+                <a:latin typeface="Times New Roman"/>
+              </a:rPr>
+              <a:t>&lt;date/time&gt;</a:t>
+            </a:r>
+            <a:endParaRPr b="0" lang="en-US" sz="1400" spc="-1" strike="noStrike">
               <a:solidFill>
                 <a:srgbClr val="000000"/>
               </a:solidFill>
@@ -2324,423 +2048,18 @@
       </p:grpSpPr>
       <p:sp>
         <p:nvSpPr>
-          <p:cNvPr id="60" name="PlaceHolder 1"/>
+          <p:cNvPr id="46" name="PlaceHolder 1"/>
           <p:cNvSpPr>
             <a:spLocks noGrp="1"/>
           </p:cNvSpPr>
           <p:nvPr>
-            <p:ph type="title"/>
-          </p:nvPr>
-        </p:nvSpPr>
-        <p:spPr>
-          <a:xfrm>
-            <a:off x="1792440" y="4800600"/>
-            <a:ext cx="5486040" cy="566280"/>
-          </a:xfrm>
-          <a:prstGeom prst="rect">
-            <a:avLst/>
-          </a:prstGeom>
-          <a:noFill/>
-          <a:ln w="0">
-            <a:noFill/>
-          </a:ln>
-        </p:spPr>
-        <p:txBody>
-          <a:bodyPr lIns="91440" rIns="91440" tIns="45720" bIns="45720" anchor="b">
-            <a:noAutofit/>
-          </a:bodyPr>
-          <a:p>
-            <a:pPr indent="0" defTabSz="914400">
-              <a:lnSpc>
-                <a:spcPct val="100000"/>
-              </a:lnSpc>
-              <a:buNone/>
-            </a:pPr>
-            <a:r>
-              <a:rPr b="1" lang="pl-PL" sz="2000" spc="-1" strike="noStrike">
-                <a:solidFill>
-                  <a:schemeClr val="dk1"/>
-                </a:solidFill>
-                <a:latin typeface="Calibri"/>
-              </a:rPr>
-              <a:t>Kliknij, aby edytować styl</a:t>
-            </a:r>
-            <a:endParaRPr b="0" lang="pl-PL" sz="2000" spc="-1" strike="noStrike">
-              <a:solidFill>
-                <a:schemeClr val="dk1"/>
-              </a:solidFill>
-              <a:latin typeface="Calibri"/>
-            </a:endParaRPr>
-          </a:p>
-        </p:txBody>
-      </p:sp>
-      <p:sp>
-        <p:nvSpPr>
-          <p:cNvPr id="61" name="PlaceHolder 2"/>
-          <p:cNvSpPr>
-            <a:spLocks noGrp="1"/>
-          </p:cNvSpPr>
-          <p:nvPr>
-            <p:ph type="body"/>
-          </p:nvPr>
-        </p:nvSpPr>
-        <p:spPr>
-          <a:xfrm>
-            <a:off x="1792440" y="612720"/>
-            <a:ext cx="5486040" cy="4114440"/>
-          </a:xfrm>
-          <a:prstGeom prst="rect">
-            <a:avLst/>
-          </a:prstGeom>
-          <a:noFill/>
-          <a:ln w="0">
-            <a:noFill/>
-          </a:ln>
-        </p:spPr>
-        <p:txBody>
-          <a:bodyPr lIns="90000" rIns="90000" tIns="45000" bIns="45000" anchor="t">
-            <a:noAutofit/>
-          </a:bodyPr>
-          <a:p>
-            <a:pPr marL="432000" indent="-324000">
-              <a:spcBef>
-                <a:spcPts val="1417"/>
-              </a:spcBef>
-              <a:buClr>
-                <a:srgbClr val="000000"/>
-              </a:buClr>
-              <a:buSzPct val="45000"/>
-              <a:buFont typeface="Wingdings" charset="2"/>
-              <a:buChar char=""/>
-            </a:pPr>
-            <a:r>
-              <a:rPr b="0" lang="pl-PL" sz="3200" spc="-1" strike="noStrike">
-                <a:solidFill>
-                  <a:schemeClr val="dk1"/>
-                </a:solidFill>
-                <a:latin typeface="Calibri"/>
-              </a:rPr>
-              <a:t>Click to edit the outline text format</a:t>
-            </a:r>
-            <a:endParaRPr b="0" lang="pl-PL" sz="3200" spc="-1" strike="noStrike">
-              <a:solidFill>
-                <a:schemeClr val="dk1"/>
-              </a:solidFill>
-              <a:latin typeface="Calibri"/>
-            </a:endParaRPr>
-          </a:p>
-          <a:p>
-            <a:pPr lvl="1" marL="864000" indent="-324000">
-              <a:spcBef>
-                <a:spcPts val="1134"/>
-              </a:spcBef>
-              <a:buClr>
-                <a:srgbClr val="000000"/>
-              </a:buClr>
-              <a:buSzPct val="75000"/>
-              <a:buFont typeface="Symbol" charset="2"/>
-              <a:buChar char=""/>
-            </a:pPr>
-            <a:r>
-              <a:rPr b="0" lang="pl-PL" sz="3200" spc="-1" strike="noStrike">
-                <a:solidFill>
-                  <a:schemeClr val="dk1"/>
-                </a:solidFill>
-                <a:latin typeface="Calibri"/>
-              </a:rPr>
-              <a:t>Second Outline Level</a:t>
-            </a:r>
-            <a:endParaRPr b="0" lang="pl-PL" sz="3200" spc="-1" strike="noStrike">
-              <a:solidFill>
-                <a:schemeClr val="dk1"/>
-              </a:solidFill>
-              <a:latin typeface="Calibri"/>
-            </a:endParaRPr>
-          </a:p>
-          <a:p>
-            <a:pPr lvl="2" marL="1296000" indent="-288000">
-              <a:spcBef>
-                <a:spcPts val="850"/>
-              </a:spcBef>
-              <a:buClr>
-                <a:srgbClr val="000000"/>
-              </a:buClr>
-              <a:buSzPct val="45000"/>
-              <a:buFont typeface="Wingdings" charset="2"/>
-              <a:buChar char=""/>
-            </a:pPr>
-            <a:r>
-              <a:rPr b="0" lang="pl-PL" sz="3200" spc="-1" strike="noStrike">
-                <a:solidFill>
-                  <a:schemeClr val="dk1"/>
-                </a:solidFill>
-                <a:latin typeface="Calibri"/>
-              </a:rPr>
-              <a:t>Third Outline Level</a:t>
-            </a:r>
-            <a:endParaRPr b="0" lang="pl-PL" sz="3200" spc="-1" strike="noStrike">
-              <a:solidFill>
-                <a:schemeClr val="dk1"/>
-              </a:solidFill>
-              <a:latin typeface="Calibri"/>
-            </a:endParaRPr>
-          </a:p>
-          <a:p>
-            <a:pPr lvl="3" marL="1728000" indent="-216000">
-              <a:spcBef>
-                <a:spcPts val="567"/>
-              </a:spcBef>
-              <a:buClr>
-                <a:srgbClr val="000000"/>
-              </a:buClr>
-              <a:buSzPct val="75000"/>
-              <a:buFont typeface="Symbol" charset="2"/>
-              <a:buChar char=""/>
-            </a:pPr>
-            <a:r>
-              <a:rPr b="0" lang="pl-PL" sz="3200" spc="-1" strike="noStrike">
-                <a:solidFill>
-                  <a:schemeClr val="dk1"/>
-                </a:solidFill>
-                <a:latin typeface="Calibri"/>
-              </a:rPr>
-              <a:t>Fourth Outline Level</a:t>
-            </a:r>
-            <a:endParaRPr b="0" lang="pl-PL" sz="3200" spc="-1" strike="noStrike">
-              <a:solidFill>
-                <a:schemeClr val="dk1"/>
-              </a:solidFill>
-              <a:latin typeface="Calibri"/>
-            </a:endParaRPr>
-          </a:p>
-          <a:p>
-            <a:pPr lvl="4" marL="2160000" indent="-216000">
-              <a:spcBef>
-                <a:spcPts val="283"/>
-              </a:spcBef>
-              <a:buClr>
-                <a:srgbClr val="000000"/>
-              </a:buClr>
-              <a:buSzPct val="45000"/>
-              <a:buFont typeface="Wingdings" charset="2"/>
-              <a:buChar char=""/>
-            </a:pPr>
-            <a:r>
-              <a:rPr b="0" lang="pl-PL" sz="3200" spc="-1" strike="noStrike">
-                <a:solidFill>
-                  <a:schemeClr val="dk1"/>
-                </a:solidFill>
-                <a:latin typeface="Calibri"/>
-              </a:rPr>
-              <a:t>Fifth Outline Level</a:t>
-            </a:r>
-            <a:endParaRPr b="0" lang="pl-PL" sz="3200" spc="-1" strike="noStrike">
-              <a:solidFill>
-                <a:schemeClr val="dk1"/>
-              </a:solidFill>
-              <a:latin typeface="Calibri"/>
-            </a:endParaRPr>
-          </a:p>
-          <a:p>
-            <a:pPr lvl="5" marL="2592000" indent="-216000">
-              <a:spcBef>
-                <a:spcPts val="283"/>
-              </a:spcBef>
-              <a:buClr>
-                <a:srgbClr val="000000"/>
-              </a:buClr>
-              <a:buSzPct val="45000"/>
-              <a:buFont typeface="Wingdings" charset="2"/>
-              <a:buChar char=""/>
-            </a:pPr>
-            <a:r>
-              <a:rPr b="0" lang="pl-PL" sz="3200" spc="-1" strike="noStrike">
-                <a:solidFill>
-                  <a:schemeClr val="dk1"/>
-                </a:solidFill>
-                <a:latin typeface="Calibri"/>
-              </a:rPr>
-              <a:t>Sixth Outline Level</a:t>
-            </a:r>
-            <a:endParaRPr b="0" lang="pl-PL" sz="3200" spc="-1" strike="noStrike">
-              <a:solidFill>
-                <a:schemeClr val="dk1"/>
-              </a:solidFill>
-              <a:latin typeface="Calibri"/>
-            </a:endParaRPr>
-          </a:p>
-          <a:p>
-            <a:pPr lvl="6" marL="3024000" indent="-216000">
-              <a:spcBef>
-                <a:spcPts val="283"/>
-              </a:spcBef>
-              <a:buClr>
-                <a:srgbClr val="000000"/>
-              </a:buClr>
-              <a:buSzPct val="45000"/>
-              <a:buFont typeface="Wingdings" charset="2"/>
-              <a:buChar char=""/>
-            </a:pPr>
-            <a:r>
-              <a:rPr b="0" lang="pl-PL" sz="3200" spc="-1" strike="noStrike">
-                <a:solidFill>
-                  <a:schemeClr val="dk1"/>
-                </a:solidFill>
-                <a:latin typeface="Calibri"/>
-              </a:rPr>
-              <a:t>Seventh Outline Level</a:t>
-            </a:r>
-            <a:endParaRPr b="0" lang="pl-PL" sz="3200" spc="-1" strike="noStrike">
-              <a:solidFill>
-                <a:schemeClr val="dk1"/>
-              </a:solidFill>
-              <a:latin typeface="Calibri"/>
-            </a:endParaRPr>
-          </a:p>
-        </p:txBody>
-      </p:sp>
-      <p:sp>
-        <p:nvSpPr>
-          <p:cNvPr id="62" name="PlaceHolder 3"/>
-          <p:cNvSpPr>
-            <a:spLocks noGrp="1"/>
-          </p:cNvSpPr>
-          <p:nvPr>
-            <p:ph type="body"/>
-          </p:nvPr>
-        </p:nvSpPr>
-        <p:spPr>
-          <a:xfrm>
-            <a:off x="1792440" y="5367240"/>
-            <a:ext cx="5486040" cy="804600"/>
-          </a:xfrm>
-          <a:prstGeom prst="rect">
-            <a:avLst/>
-          </a:prstGeom>
-          <a:noFill/>
-          <a:ln w="0">
-            <a:noFill/>
-          </a:ln>
-        </p:spPr>
-        <p:txBody>
-          <a:bodyPr lIns="91440" rIns="91440" tIns="45720" bIns="45720" anchor="t">
-            <a:noAutofit/>
-          </a:bodyPr>
-          <a:p>
-            <a:pPr indent="0" defTabSz="914400">
-              <a:lnSpc>
-                <a:spcPct val="100000"/>
-              </a:lnSpc>
-              <a:spcBef>
-                <a:spcPts val="281"/>
-              </a:spcBef>
-              <a:buNone/>
-              <a:tabLst>
-                <a:tab algn="l" pos="0"/>
-              </a:tabLst>
-            </a:pPr>
-            <a:r>
-              <a:rPr b="0" lang="pl-PL" sz="1400" spc="-1" strike="noStrike">
-                <a:solidFill>
-                  <a:schemeClr val="dk1"/>
-                </a:solidFill>
-                <a:latin typeface="Calibri"/>
-              </a:rPr>
-              <a:t>Kliknij, aby edytować style wzorca tekstu</a:t>
-            </a:r>
-            <a:endParaRPr b="0" lang="pl-PL" sz="1400" spc="-1" strike="noStrike">
-              <a:solidFill>
-                <a:schemeClr val="dk1"/>
-              </a:solidFill>
-              <a:latin typeface="Calibri"/>
-            </a:endParaRPr>
-          </a:p>
-        </p:txBody>
-      </p:sp>
-      <p:sp>
-        <p:nvSpPr>
-          <p:cNvPr id="63" name="PlaceHolder 4"/>
-          <p:cNvSpPr>
-            <a:spLocks noGrp="1"/>
-          </p:cNvSpPr>
-          <p:nvPr>
-            <p:ph type="dt" idx="31"/>
-          </p:nvPr>
-        </p:nvSpPr>
-        <p:spPr>
-          <a:xfrm>
-            <a:off x="457200" y="6356520"/>
-            <a:ext cx="2133360" cy="364680"/>
-          </a:xfrm>
-          <a:prstGeom prst="rect">
-            <a:avLst/>
-          </a:prstGeom>
-          <a:noFill/>
-          <a:ln w="0">
-            <a:noFill/>
-          </a:ln>
-        </p:spPr>
-        <p:txBody>
-          <a:bodyPr lIns="91440" rIns="91440" tIns="45720" bIns="45720" anchor="ctr">
-            <a:noAutofit/>
-          </a:bodyPr>
-          <a:lstStyle>
-            <a:lvl1pPr indent="0" defTabSz="914400">
-              <a:lnSpc>
-                <a:spcPct val="100000"/>
-              </a:lnSpc>
-              <a:buNone/>
-              <a:defRPr b="0" lang="pl-PL" sz="1200" spc="-1" strike="noStrike">
-                <a:solidFill>
-                  <a:schemeClr val="dk1">
-                    <a:tint val="75000"/>
-                  </a:schemeClr>
-                </a:solidFill>
-                <a:latin typeface="Calibri"/>
-              </a:defRPr>
-            </a:lvl1pPr>
-          </a:lstStyle>
-          <a:p>
-            <a:pPr indent="0" defTabSz="914400">
-              <a:lnSpc>
-                <a:spcPct val="100000"/>
-              </a:lnSpc>
-              <a:buNone/>
-            </a:pPr>
-            <a:r>
-              <a:rPr b="0" lang="pl-PL" sz="1200" spc="-1" strike="noStrike">
-                <a:solidFill>
-                  <a:schemeClr val="dk1">
-                    <a:tint val="75000"/>
-                  </a:schemeClr>
-                </a:solidFill>
-                <a:latin typeface="Calibri"/>
-              </a:rPr>
-              <a:t>&lt;date/time&gt;</a:t>
-            </a:r>
-            <a:endParaRPr b="0" lang="en-US" sz="1200" spc="-1" strike="noStrike">
-              <a:solidFill>
-                <a:srgbClr val="000000"/>
-              </a:solidFill>
-              <a:latin typeface="Times New Roman"/>
-            </a:endParaRPr>
-          </a:p>
-        </p:txBody>
-      </p:sp>
-      <p:sp>
-        <p:nvSpPr>
-          <p:cNvPr id="64" name="PlaceHolder 5"/>
-          <p:cNvSpPr>
-            <a:spLocks noGrp="1"/>
-          </p:cNvSpPr>
-          <p:nvPr>
-            <p:ph type="ftr" idx="32"/>
+            <p:ph type="ftr" idx="31"/>
           </p:nvPr>
         </p:nvSpPr>
         <p:spPr>
           <a:xfrm>
             <a:off x="3124080" y="6356520"/>
-            <a:ext cx="2895120" cy="364680"/>
+            <a:ext cx="2894760" cy="364320"/>
           </a:xfrm>
           <a:prstGeom prst="rect">
             <a:avLst/>
@@ -2756,7 +2075,13 @@
           </a:bodyPr>
           <a:lstStyle>
             <a:lvl1pPr indent="0" algn="ctr">
+              <a:lnSpc>
+                <a:spcPct val="100000"/>
+              </a:lnSpc>
               <a:buNone/>
+              <a:tabLst>
+                <a:tab algn="l" pos="0"/>
+              </a:tabLst>
               <a:defRPr b="0" lang="en-US" sz="1400" spc="-1" strike="noStrike">
                 <a:solidFill>
                   <a:srgbClr val="000000"/>
@@ -2767,7 +2092,13 @@
           </a:lstStyle>
           <a:p>
             <a:pPr indent="0" algn="ctr">
+              <a:lnSpc>
+                <a:spcPct val="100000"/>
+              </a:lnSpc>
               <a:buNone/>
+              <a:tabLst>
+                <a:tab algn="l" pos="0"/>
+              </a:tabLst>
             </a:pPr>
             <a:r>
               <a:rPr b="0" lang="en-US" sz="1400" spc="-1" strike="noStrike">
@@ -2789,18 +2120,18 @@
       </p:sp>
       <p:sp>
         <p:nvSpPr>
-          <p:cNvPr id="65" name="PlaceHolder 6"/>
+          <p:cNvPr id="47" name="PlaceHolder 2"/>
           <p:cNvSpPr>
             <a:spLocks noGrp="1"/>
           </p:cNvSpPr>
           <p:nvPr>
-            <p:ph type="sldNum" idx="33"/>
+            <p:ph type="sldNum" idx="32"/>
           </p:nvPr>
         </p:nvSpPr>
         <p:spPr>
           <a:xfrm>
             <a:off x="6553080" y="6356520"/>
-            <a:ext cx="2133360" cy="364680"/>
+            <a:ext cx="2133000" cy="364320"/>
           </a:xfrm>
           <a:prstGeom prst="rect">
             <a:avLst/>
@@ -2820,6 +2151,9 @@
                 <a:spcPct val="100000"/>
               </a:lnSpc>
               <a:buNone/>
+              <a:tabLst>
+                <a:tab algn="l" pos="0"/>
+              </a:tabLst>
               <a:defRPr b="0" lang="pl-PL" sz="1200" spc="-1" strike="noStrike">
                 <a:solidFill>
                   <a:schemeClr val="dk1">
@@ -2836,8 +2170,11 @@
                 <a:spcPct val="100000"/>
               </a:lnSpc>
               <a:buNone/>
+              <a:tabLst>
+                <a:tab algn="l" pos="0"/>
+              </a:tabLst>
             </a:pPr>
-            <a:fld id="{291FCAD0-82E9-4D27-8D98-10A05B79FBB7}" type="slidenum">
+            <a:fld id="{9BF2EFBE-5EEC-4A71-B306-AEAB2AADDF48}" type="slidenum">
               <a:rPr b="0" lang="pl-PL" sz="1200" spc="-1" strike="noStrike">
                 <a:solidFill>
                   <a:schemeClr val="dk1">
@@ -2849,6 +2186,66 @@
               <a:t>&lt;number&gt;</a:t>
             </a:fld>
             <a:endParaRPr b="0" lang="en-US" sz="1200" spc="-1" strike="noStrike">
+              <a:solidFill>
+                <a:srgbClr val="000000"/>
+              </a:solidFill>
+              <a:latin typeface="Times New Roman"/>
+            </a:endParaRPr>
+          </a:p>
+        </p:txBody>
+      </p:sp>
+      <p:sp>
+        <p:nvSpPr>
+          <p:cNvPr id="48" name="PlaceHolder 3"/>
+          <p:cNvSpPr>
+            <a:spLocks noGrp="1"/>
+          </p:cNvSpPr>
+          <p:nvPr>
+            <p:ph type="dt" idx="33"/>
+          </p:nvPr>
+        </p:nvSpPr>
+        <p:spPr>
+          <a:xfrm>
+            <a:off x="457200" y="6356520"/>
+            <a:ext cx="2133000" cy="364320"/>
+          </a:xfrm>
+          <a:prstGeom prst="rect">
+            <a:avLst/>
+          </a:prstGeom>
+          <a:noFill/>
+          <a:ln w="0">
+            <a:noFill/>
+          </a:ln>
+        </p:spPr>
+        <p:txBody>
+          <a:bodyPr lIns="91440" rIns="91440" tIns="45720" bIns="45720" anchor="ctr">
+            <a:noAutofit/>
+          </a:bodyPr>
+          <a:lstStyle>
+            <a:lvl1pPr indent="0">
+              <a:buNone/>
+              <a:defRPr b="0" lang="en-US" sz="1400" spc="-1" strike="noStrike">
+                <a:solidFill>
+                  <a:srgbClr val="000000"/>
+                </a:solidFill>
+                <a:latin typeface="Times New Roman"/>
+              </a:defRPr>
+            </a:lvl1pPr>
+          </a:lstStyle>
+          <a:p>
+            <a:pPr indent="0">
+              <a:buNone/>
+            </a:pPr>
+            <a:r>
+              <a:rPr b="0" lang="en-US" sz="1400" spc="-1" strike="noStrike">
+                <a:solidFill>
+                  <a:srgbClr val="000000"/>
+                </a:solidFill>
+                <a:latin typeface="Times New Roman"/>
+              </a:rPr>
+              <a:t>&lt;date/time&gt;</a:t>
+            </a:r>
+            <a:endParaRPr b="0" lang="en-US" sz="1400" spc="-1" strike="noStrike">
               <a:solidFill>
                 <a:srgbClr val="000000"/>
               </a:solidFill>
@@ -2897,314 +2294,13 @@
             <a:spLocks noGrp="1"/>
           </p:cNvSpPr>
           <p:nvPr>
-            <p:ph type="title"/>
-          </p:nvPr>
-        </p:nvSpPr>
-        <p:spPr>
-          <a:xfrm>
-            <a:off x="457200" y="274680"/>
-            <a:ext cx="8229240" cy="1142640"/>
-          </a:xfrm>
-          <a:prstGeom prst="rect">
-            <a:avLst/>
-          </a:prstGeom>
-          <a:noFill/>
-          <a:ln w="0">
-            <a:noFill/>
-          </a:ln>
-        </p:spPr>
-        <p:txBody>
-          <a:bodyPr lIns="91440" rIns="91440" tIns="45720" bIns="45720" anchor="ctr">
-            <a:noAutofit/>
-          </a:bodyPr>
-          <a:p>
-            <a:pPr indent="0" algn="ctr" defTabSz="914400">
-              <a:lnSpc>
-                <a:spcPct val="100000"/>
-              </a:lnSpc>
-              <a:buNone/>
-            </a:pPr>
-            <a:r>
-              <a:rPr b="0" lang="pl-PL" sz="4400" spc="-1" strike="noStrike">
-                <a:solidFill>
-                  <a:schemeClr val="dk1"/>
-                </a:solidFill>
-                <a:latin typeface="Calibri"/>
-              </a:rPr>
-              <a:t>Kliknij, aby edytować styl</a:t>
-            </a:r>
-            <a:endParaRPr b="0" lang="pl-PL" sz="4400" spc="-1" strike="noStrike">
-              <a:solidFill>
-                <a:schemeClr val="dk1"/>
-              </a:solidFill>
-              <a:latin typeface="Calibri"/>
-            </a:endParaRPr>
-          </a:p>
-        </p:txBody>
-      </p:sp>
-      <p:sp>
-        <p:nvSpPr>
-          <p:cNvPr id="8" name="PlaceHolder 2"/>
-          <p:cNvSpPr>
-            <a:spLocks noGrp="1"/>
-          </p:cNvSpPr>
-          <p:nvPr>
-            <p:ph type="body"/>
-          </p:nvPr>
-        </p:nvSpPr>
-        <p:spPr>
-          <a:xfrm>
-            <a:off x="457200" y="1600200"/>
-            <a:ext cx="8229240" cy="4525560"/>
-          </a:xfrm>
-          <a:prstGeom prst="rect">
-            <a:avLst/>
-          </a:prstGeom>
-          <a:noFill/>
-          <a:ln w="0">
-            <a:noFill/>
-          </a:ln>
-        </p:spPr>
-        <p:txBody>
-          <a:bodyPr lIns="91440" rIns="91440" tIns="45720" bIns="45720" anchor="t" vert="eaVert">
-            <a:noAutofit/>
-          </a:bodyPr>
-          <a:p>
-            <a:pPr marL="343080" indent="-343080" defTabSz="914400">
-              <a:lnSpc>
-                <a:spcPct val="100000"/>
-              </a:lnSpc>
-              <a:spcBef>
-                <a:spcPts val="641"/>
-              </a:spcBef>
-              <a:buClr>
-                <a:srgbClr val="000000"/>
-              </a:buClr>
-              <a:buFont typeface="Arial"/>
-              <a:buChar char="•"/>
-            </a:pPr>
-            <a:r>
-              <a:rPr b="0" lang="pl-PL" sz="3200" spc="-1" strike="noStrike">
-                <a:solidFill>
-                  <a:schemeClr val="dk1"/>
-                </a:solidFill>
-                <a:latin typeface="Calibri"/>
-              </a:rPr>
-              <a:t>Kliknij, aby edytować style wzorca tekstu</a:t>
-            </a:r>
-            <a:endParaRPr b="0" lang="pl-PL" sz="3200" spc="-1" strike="noStrike">
-              <a:solidFill>
-                <a:schemeClr val="dk1"/>
-              </a:solidFill>
-              <a:latin typeface="Calibri"/>
-            </a:endParaRPr>
-          </a:p>
-          <a:p>
-            <a:pPr lvl="1" marL="743040" indent="-285840" defTabSz="914400">
-              <a:lnSpc>
-                <a:spcPct val="100000"/>
-              </a:lnSpc>
-              <a:spcBef>
-                <a:spcPts val="561"/>
-              </a:spcBef>
-              <a:buClr>
-                <a:srgbClr val="000000"/>
-              </a:buClr>
-              <a:buFont typeface="Arial"/>
-              <a:buChar char="–"/>
-            </a:pPr>
-            <a:r>
-              <a:rPr b="0" lang="pl-PL" sz="2800" spc="-1" strike="noStrike">
-                <a:solidFill>
-                  <a:schemeClr val="dk1"/>
-                </a:solidFill>
-                <a:latin typeface="Calibri"/>
-              </a:rPr>
-              <a:t>Drugi poziom</a:t>
-            </a:r>
-            <a:endParaRPr b="0" lang="pl-PL" sz="2800" spc="-1" strike="noStrike">
-              <a:solidFill>
-                <a:schemeClr val="dk1"/>
-              </a:solidFill>
-              <a:latin typeface="Calibri"/>
-            </a:endParaRPr>
-          </a:p>
-          <a:p>
-            <a:pPr lvl="2" marL="1143000" indent="-228600" defTabSz="914400">
-              <a:lnSpc>
-                <a:spcPct val="100000"/>
-              </a:lnSpc>
-              <a:spcBef>
-                <a:spcPts val="479"/>
-              </a:spcBef>
-              <a:buClr>
-                <a:srgbClr val="000000"/>
-              </a:buClr>
-              <a:buFont typeface="Arial"/>
-              <a:buChar char="•"/>
-            </a:pPr>
-            <a:r>
-              <a:rPr b="0" lang="pl-PL" sz="2400" spc="-1" strike="noStrike">
-                <a:solidFill>
-                  <a:schemeClr val="dk1"/>
-                </a:solidFill>
-                <a:latin typeface="Calibri"/>
-              </a:rPr>
-              <a:t>Trzeci poziom</a:t>
-            </a:r>
-            <a:endParaRPr b="0" lang="pl-PL" sz="2400" spc="-1" strike="noStrike">
-              <a:solidFill>
-                <a:schemeClr val="dk1"/>
-              </a:solidFill>
-              <a:latin typeface="Calibri"/>
-            </a:endParaRPr>
-          </a:p>
-          <a:p>
-            <a:pPr lvl="3" marL="1600200" indent="-228600" defTabSz="914400">
-              <a:lnSpc>
-                <a:spcPct val="100000"/>
-              </a:lnSpc>
-              <a:spcBef>
-                <a:spcPts val="400"/>
-              </a:spcBef>
-              <a:buClr>
-                <a:srgbClr val="000000"/>
-              </a:buClr>
-              <a:buFont typeface="Arial"/>
-              <a:buChar char="–"/>
-            </a:pPr>
-            <a:r>
-              <a:rPr b="0" lang="pl-PL" sz="2000" spc="-1" strike="noStrike">
-                <a:solidFill>
-                  <a:schemeClr val="dk1"/>
-                </a:solidFill>
-                <a:latin typeface="Calibri"/>
-              </a:rPr>
-              <a:t>Czwarty poziom</a:t>
-            </a:r>
-            <a:endParaRPr b="0" lang="pl-PL" sz="2000" spc="-1" strike="noStrike">
-              <a:solidFill>
-                <a:schemeClr val="dk1"/>
-              </a:solidFill>
-              <a:latin typeface="Calibri"/>
-            </a:endParaRPr>
-          </a:p>
-          <a:p>
-            <a:pPr lvl="4" marL="2057400" indent="-228600" defTabSz="914400">
-              <a:lnSpc>
-                <a:spcPct val="100000"/>
-              </a:lnSpc>
-              <a:spcBef>
-                <a:spcPts val="400"/>
-              </a:spcBef>
-              <a:buClr>
-                <a:srgbClr val="000000"/>
-              </a:buClr>
-              <a:buFont typeface="Arial"/>
-              <a:buChar char="»"/>
-            </a:pPr>
-            <a:r>
-              <a:rPr b="0" lang="pl-PL" sz="2000" spc="-1" strike="noStrike">
-                <a:solidFill>
-                  <a:schemeClr val="dk1"/>
-                </a:solidFill>
-                <a:latin typeface="Calibri"/>
-              </a:rPr>
-              <a:t>Piąty poziom</a:t>
-            </a:r>
-            <a:endParaRPr b="0" lang="pl-PL" sz="2000" spc="-1" strike="noStrike">
-              <a:solidFill>
-                <a:schemeClr val="dk1"/>
-              </a:solidFill>
-              <a:latin typeface="Calibri"/>
-            </a:endParaRPr>
-          </a:p>
-        </p:txBody>
-      </p:sp>
-      <p:sp>
-        <p:nvSpPr>
-          <p:cNvPr id="9" name="PlaceHolder 3"/>
-          <p:cNvSpPr>
-            <a:spLocks noGrp="1"/>
-          </p:cNvSpPr>
-          <p:nvPr>
-            <p:ph type="dt" idx="4"/>
-          </p:nvPr>
-        </p:nvSpPr>
-        <p:spPr>
-          <a:xfrm>
-            <a:off x="457200" y="6356520"/>
-            <a:ext cx="2133360" cy="364680"/>
-          </a:xfrm>
-          <a:prstGeom prst="rect">
-            <a:avLst/>
-          </a:prstGeom>
-          <a:noFill/>
-          <a:ln w="0">
-            <a:noFill/>
-          </a:ln>
-        </p:spPr>
-        <p:txBody>
-          <a:bodyPr lIns="91440" rIns="91440" tIns="45720" bIns="45720" anchor="ctr">
-            <a:noAutofit/>
-          </a:bodyPr>
-          <a:lstStyle>
-            <a:lvl1pPr indent="0" defTabSz="914400">
-              <a:lnSpc>
-                <a:spcPct val="100000"/>
-              </a:lnSpc>
-              <a:buNone/>
-              <a:defRPr b="0" lang="pl-PL" sz="1200" spc="-1" strike="noStrike">
-                <a:solidFill>
-                  <a:schemeClr val="dk1">
-                    <a:tint val="75000"/>
-                  </a:schemeClr>
-                </a:solidFill>
-                <a:latin typeface="Calibri"/>
-              </a:defRPr>
-            </a:lvl1pPr>
-          </a:lstStyle>
-          <a:p>
-            <a:pPr indent="0" defTabSz="914400">
-              <a:lnSpc>
-                <a:spcPct val="100000"/>
-              </a:lnSpc>
-              <a:buNone/>
-            </a:pPr>
-            <a:r>
-              <a:rPr b="0" lang="pl-PL" sz="1200" spc="-1" strike="noStrike">
-                <a:solidFill>
-                  <a:schemeClr val="dk1">
-                    <a:tint val="75000"/>
-                  </a:schemeClr>
-                </a:solidFill>
-                <a:latin typeface="Calibri"/>
-              </a:rPr>
-              <a:t>&lt;date/time&gt;</a:t>
-            </a:r>
-            <a:endParaRPr b="0" lang="en-US" sz="1200" spc="-1" strike="noStrike">
-              <a:solidFill>
-                <a:srgbClr val="000000"/>
-              </a:solidFill>
-              <a:latin typeface="Times New Roman"/>
-            </a:endParaRPr>
-          </a:p>
-        </p:txBody>
-      </p:sp>
-      <p:sp>
-        <p:nvSpPr>
-          <p:cNvPr id="10" name="PlaceHolder 4"/>
-          <p:cNvSpPr>
-            <a:spLocks noGrp="1"/>
-          </p:cNvSpPr>
-          <p:nvPr>
-            <p:ph type="ftr" idx="5"/>
+            <p:ph type="ftr" idx="4"/>
           </p:nvPr>
         </p:nvSpPr>
         <p:spPr>
           <a:xfrm>
             <a:off x="3124080" y="6356520"/>
-            <a:ext cx="2895120" cy="364680"/>
+            <a:ext cx="2894760" cy="364320"/>
           </a:xfrm>
           <a:prstGeom prst="rect">
             <a:avLst/>
@@ -3220,7 +2316,13 @@
           </a:bodyPr>
           <a:lstStyle>
             <a:lvl1pPr indent="0" algn="ctr">
+              <a:lnSpc>
+                <a:spcPct val="100000"/>
+              </a:lnSpc>
               <a:buNone/>
+              <a:tabLst>
+                <a:tab algn="l" pos="0"/>
+              </a:tabLst>
               <a:defRPr b="0" lang="en-US" sz="1400" spc="-1" strike="noStrike">
                 <a:solidFill>
                   <a:srgbClr val="000000"/>
@@ -3231,7 +2333,13 @@
           </a:lstStyle>
           <a:p>
             <a:pPr indent="0" algn="ctr">
+              <a:lnSpc>
+                <a:spcPct val="100000"/>
+              </a:lnSpc>
               <a:buNone/>
+              <a:tabLst>
+                <a:tab algn="l" pos="0"/>
+              </a:tabLst>
             </a:pPr>
             <a:r>
               <a:rPr b="0" lang="en-US" sz="1400" spc="-1" strike="noStrike">
@@ -3253,18 +2361,18 @@
       </p:sp>
       <p:sp>
         <p:nvSpPr>
-          <p:cNvPr id="11" name="PlaceHolder 5"/>
+          <p:cNvPr id="8" name="PlaceHolder 2"/>
           <p:cNvSpPr>
             <a:spLocks noGrp="1"/>
           </p:cNvSpPr>
           <p:nvPr>
-            <p:ph type="sldNum" idx="6"/>
+            <p:ph type="sldNum" idx="5"/>
           </p:nvPr>
         </p:nvSpPr>
         <p:spPr>
           <a:xfrm>
             <a:off x="6553080" y="6356520"/>
-            <a:ext cx="2133360" cy="364680"/>
+            <a:ext cx="2133000" cy="364320"/>
           </a:xfrm>
           <a:prstGeom prst="rect">
             <a:avLst/>
@@ -3284,6 +2392,9 @@
                 <a:spcPct val="100000"/>
               </a:lnSpc>
               <a:buNone/>
+              <a:tabLst>
+                <a:tab algn="l" pos="0"/>
+              </a:tabLst>
               <a:defRPr b="0" lang="pl-PL" sz="1200" spc="-1" strike="noStrike">
                 <a:solidFill>
                   <a:schemeClr val="dk1">
@@ -3300,8 +2411,11 @@
                 <a:spcPct val="100000"/>
               </a:lnSpc>
               <a:buNone/>
+              <a:tabLst>
+                <a:tab algn="l" pos="0"/>
+              </a:tabLst>
             </a:pPr>
-            <a:fld id="{7072F44D-8D66-438F-9B9F-19844EF3FA75}" type="slidenum">
+            <a:fld id="{985F2971-B000-433D-BA7F-DD7D932048B5}" type="slidenum">
               <a:rPr b="0" lang="pl-PL" sz="1200" spc="-1" strike="noStrike">
                 <a:solidFill>
                   <a:schemeClr val="dk1">
@@ -3313,6 +2427,66 @@
               <a:t>&lt;number&gt;</a:t>
             </a:fld>
             <a:endParaRPr b="0" lang="en-US" sz="1200" spc="-1" strike="noStrike">
+              <a:solidFill>
+                <a:srgbClr val="000000"/>
+              </a:solidFill>
+              <a:latin typeface="Times New Roman"/>
+            </a:endParaRPr>
+          </a:p>
+        </p:txBody>
+      </p:sp>
+      <p:sp>
+        <p:nvSpPr>
+          <p:cNvPr id="9" name="PlaceHolder 3"/>
+          <p:cNvSpPr>
+            <a:spLocks noGrp="1"/>
+          </p:cNvSpPr>
+          <p:nvPr>
+            <p:ph type="dt" idx="6"/>
+          </p:nvPr>
+        </p:nvSpPr>
+        <p:spPr>
+          <a:xfrm>
+            <a:off x="457200" y="6356520"/>
+            <a:ext cx="2133000" cy="364320"/>
+          </a:xfrm>
+          <a:prstGeom prst="rect">
+            <a:avLst/>
+          </a:prstGeom>
+          <a:noFill/>
+          <a:ln w="0">
+            <a:noFill/>
+          </a:ln>
+        </p:spPr>
+        <p:txBody>
+          <a:bodyPr lIns="91440" rIns="91440" tIns="45720" bIns="45720" anchor="ctr">
+            <a:noAutofit/>
+          </a:bodyPr>
+          <a:lstStyle>
+            <a:lvl1pPr indent="0">
+              <a:buNone/>
+              <a:defRPr b="0" lang="en-US" sz="1400" spc="-1" strike="noStrike">
+                <a:solidFill>
+                  <a:srgbClr val="000000"/>
+                </a:solidFill>
+                <a:latin typeface="Times New Roman"/>
+              </a:defRPr>
+            </a:lvl1pPr>
+          </a:lstStyle>
+          <a:p>
+            <a:pPr indent="0">
+              <a:buNone/>
+            </a:pPr>
+            <a:r>
+              <a:rPr b="0" lang="en-US" sz="1400" spc="-1" strike="noStrike">
+                <a:solidFill>
+                  <a:srgbClr val="000000"/>
+                </a:solidFill>
+                <a:latin typeface="Times New Roman"/>
+              </a:rPr>
+              <a:t>&lt;date/time&gt;</a:t>
+            </a:r>
+            <a:endParaRPr b="0" lang="en-US" sz="1400" spc="-1" strike="noStrike">
               <a:solidFill>
                 <a:srgbClr val="000000"/>
               </a:solidFill>
@@ -3356,319 +2530,18 @@
       </p:grpSpPr>
       <p:sp>
         <p:nvSpPr>
-          <p:cNvPr id="12" name="PlaceHolder 1"/>
+          <p:cNvPr id="10" name="PlaceHolder 1"/>
           <p:cNvSpPr>
             <a:spLocks noGrp="1"/>
           </p:cNvSpPr>
           <p:nvPr>
-            <p:ph type="title"/>
-          </p:nvPr>
-        </p:nvSpPr>
-        <p:spPr>
-          <a:xfrm>
-            <a:off x="6629400" y="274680"/>
-            <a:ext cx="2057040" cy="5851080"/>
-          </a:xfrm>
-          <a:prstGeom prst="rect">
-            <a:avLst/>
-          </a:prstGeom>
-          <a:noFill/>
-          <a:ln w="0">
-            <a:noFill/>
-          </a:ln>
-        </p:spPr>
-        <p:txBody>
-          <a:bodyPr lIns="91440" rIns="91440" tIns="45720" bIns="45720" anchor="ctr" vert="eaVert">
-            <a:noAutofit/>
-          </a:bodyPr>
-          <a:p>
-            <a:pPr indent="0" algn="ctr" defTabSz="914400">
-              <a:lnSpc>
-                <a:spcPct val="100000"/>
-              </a:lnSpc>
-              <a:buNone/>
-            </a:pPr>
-            <a:r>
-              <a:rPr b="0" lang="pl-PL" sz="4400" spc="-1" strike="noStrike">
-                <a:solidFill>
-                  <a:schemeClr val="dk1"/>
-                </a:solidFill>
-                <a:latin typeface="Calibri"/>
-              </a:rPr>
-              <a:t>Kliknij, aby edytować styl</a:t>
-            </a:r>
-            <a:endParaRPr b="0" lang="pl-PL" sz="4400" spc="-1" strike="noStrike">
-              <a:solidFill>
-                <a:schemeClr val="dk1"/>
-              </a:solidFill>
-              <a:latin typeface="Calibri"/>
-            </a:endParaRPr>
-          </a:p>
-        </p:txBody>
-      </p:sp>
-      <p:sp>
-        <p:nvSpPr>
-          <p:cNvPr id="13" name="PlaceHolder 2"/>
-          <p:cNvSpPr>
-            <a:spLocks noGrp="1"/>
-          </p:cNvSpPr>
-          <p:nvPr>
-            <p:ph type="body"/>
-          </p:nvPr>
-        </p:nvSpPr>
-        <p:spPr>
-          <a:xfrm>
-            <a:off x="457200" y="274680"/>
-            <a:ext cx="6019560" cy="5851080"/>
-          </a:xfrm>
-          <a:prstGeom prst="rect">
-            <a:avLst/>
-          </a:prstGeom>
-          <a:noFill/>
-          <a:ln w="0">
-            <a:noFill/>
-          </a:ln>
-        </p:spPr>
-        <p:txBody>
-          <a:bodyPr lIns="91440" rIns="91440" tIns="45720" bIns="45720" anchor="t" vert="eaVert">
-            <a:noAutofit/>
-          </a:bodyPr>
-          <a:p>
-            <a:pPr marL="343080" indent="-343080" defTabSz="914400">
-              <a:lnSpc>
-                <a:spcPct val="100000"/>
-              </a:lnSpc>
-              <a:spcBef>
-                <a:spcPts val="641"/>
-              </a:spcBef>
-              <a:buClr>
-                <a:srgbClr val="000000"/>
-              </a:buClr>
-              <a:buFont typeface="Arial"/>
-              <a:buChar char="•"/>
-            </a:pPr>
-            <a:r>
-              <a:rPr b="0" lang="pl-PL" sz="3200" spc="-1" strike="noStrike">
-                <a:solidFill>
-                  <a:schemeClr val="dk1"/>
-                </a:solidFill>
-                <a:latin typeface="Calibri"/>
-              </a:rPr>
-              <a:t>Kliknij, aby edytować style wzorca tekstu</a:t>
-            </a:r>
-            <a:endParaRPr b="0" lang="pl-PL" sz="3200" spc="-1" strike="noStrike">
-              <a:solidFill>
-                <a:schemeClr val="dk1"/>
-              </a:solidFill>
-              <a:latin typeface="Calibri"/>
-            </a:endParaRPr>
-          </a:p>
-          <a:p>
-            <a:pPr lvl="1" marL="743040" indent="-285840" defTabSz="914400">
-              <a:lnSpc>
-                <a:spcPct val="100000"/>
-              </a:lnSpc>
-              <a:spcBef>
-                <a:spcPts val="561"/>
-              </a:spcBef>
-              <a:buClr>
-                <a:srgbClr val="000000"/>
-              </a:buClr>
-              <a:buFont typeface="Arial"/>
-              <a:buChar char="–"/>
-            </a:pPr>
-            <a:r>
-              <a:rPr b="0" lang="pl-PL" sz="2800" spc="-1" strike="noStrike">
-                <a:solidFill>
-                  <a:schemeClr val="dk1"/>
-                </a:solidFill>
-                <a:latin typeface="Calibri"/>
-              </a:rPr>
-              <a:t>Drugi poziom</a:t>
-            </a:r>
-            <a:endParaRPr b="0" lang="pl-PL" sz="2800" spc="-1" strike="noStrike">
-              <a:solidFill>
-                <a:schemeClr val="dk1"/>
-              </a:solidFill>
-              <a:latin typeface="Calibri"/>
-            </a:endParaRPr>
-          </a:p>
-          <a:p>
-            <a:pPr lvl="2" marL="1143000" indent="-228600" defTabSz="914400">
-              <a:lnSpc>
-                <a:spcPct val="100000"/>
-              </a:lnSpc>
-              <a:spcBef>
-                <a:spcPts val="479"/>
-              </a:spcBef>
-              <a:buClr>
-                <a:srgbClr val="000000"/>
-              </a:buClr>
-              <a:buFont typeface="Arial"/>
-              <a:buChar char="•"/>
-            </a:pPr>
-            <a:r>
-              <a:rPr b="0" lang="pl-PL" sz="2400" spc="-1" strike="noStrike">
-                <a:solidFill>
-                  <a:schemeClr val="dk1"/>
-                </a:solidFill>
-                <a:latin typeface="Calibri"/>
-              </a:rPr>
-              <a:t>Trzeci poziom</a:t>
-            </a:r>
-            <a:endParaRPr b="0" lang="pl-PL" sz="2400" spc="-1" strike="noStrike">
-              <a:solidFill>
-                <a:schemeClr val="dk1"/>
-              </a:solidFill>
-              <a:latin typeface="Calibri"/>
-            </a:endParaRPr>
-          </a:p>
-          <a:p>
-            <a:pPr lvl="3" marL="1600200" indent="-228600" defTabSz="914400">
-              <a:lnSpc>
-                <a:spcPct val="100000"/>
-              </a:lnSpc>
-              <a:spcBef>
-                <a:spcPts val="400"/>
-              </a:spcBef>
-              <a:buClr>
-                <a:srgbClr val="000000"/>
-              </a:buClr>
-              <a:buFont typeface="Arial"/>
-              <a:buChar char="–"/>
-            </a:pPr>
-            <a:r>
-              <a:rPr b="0" lang="pl-PL" sz="2000" spc="-1" strike="noStrike">
-                <a:solidFill>
-                  <a:schemeClr val="dk1"/>
-                </a:solidFill>
-                <a:latin typeface="Calibri"/>
-              </a:rPr>
-              <a:t>Czwarty poziom</a:t>
-            </a:r>
-            <a:endParaRPr b="0" lang="pl-PL" sz="2000" spc="-1" strike="noStrike">
-              <a:solidFill>
-                <a:schemeClr val="dk1"/>
-              </a:solidFill>
-              <a:latin typeface="Calibri"/>
-            </a:endParaRPr>
-          </a:p>
-          <a:p>
-            <a:pPr lvl="4" marL="2057400" indent="-228600" defTabSz="914400">
-              <a:lnSpc>
-                <a:spcPct val="100000"/>
-              </a:lnSpc>
-              <a:spcBef>
-                <a:spcPts val="400"/>
-              </a:spcBef>
-              <a:buClr>
-                <a:srgbClr val="000000"/>
-              </a:buClr>
-              <a:buFont typeface="Arial"/>
-              <a:buChar char="»"/>
-            </a:pPr>
-            <a:r>
-              <a:rPr b="0" lang="pl-PL" sz="2000" spc="-1" strike="noStrike">
-                <a:solidFill>
-                  <a:schemeClr val="dk1"/>
-                </a:solidFill>
-                <a:latin typeface="Calibri"/>
-              </a:rPr>
-              <a:t>Piąty poziom</a:t>
-            </a:r>
-            <a:endParaRPr b="0" lang="pl-PL" sz="2000" spc="-1" strike="noStrike">
-              <a:solidFill>
-                <a:schemeClr val="dk1"/>
-              </a:solidFill>
-              <a:latin typeface="Calibri"/>
-            </a:endParaRPr>
-          </a:p>
-        </p:txBody>
-      </p:sp>
-      <p:sp>
-        <p:nvSpPr>
-          <p:cNvPr id="14" name="PlaceHolder 3"/>
-          <p:cNvSpPr>
-            <a:spLocks noGrp="1"/>
-          </p:cNvSpPr>
-          <p:nvPr>
-            <p:ph type="dt" idx="7"/>
-          </p:nvPr>
-        </p:nvSpPr>
-        <p:spPr>
-          <a:xfrm>
-            <a:off x="457200" y="6356520"/>
-            <a:ext cx="2133360" cy="364680"/>
-          </a:xfrm>
-          <a:prstGeom prst="rect">
-            <a:avLst/>
-          </a:prstGeom>
-          <a:noFill/>
-          <a:ln w="0">
-            <a:noFill/>
-          </a:ln>
-        </p:spPr>
-        <p:txBody>
-          <a:bodyPr lIns="91440" rIns="91440" tIns="45720" bIns="45720" anchor="ctr">
-            <a:noAutofit/>
-          </a:bodyPr>
-          <a:lstStyle>
-            <a:lvl1pPr indent="0" defTabSz="914400">
-              <a:lnSpc>
-                <a:spcPct val="100000"/>
-              </a:lnSpc>
-              <a:buNone/>
-              <a:defRPr b="0" lang="pl-PL" sz="1200" spc="-1" strike="noStrike">
-                <a:solidFill>
-                  <a:schemeClr val="dk1">
-                    <a:tint val="75000"/>
-                  </a:schemeClr>
-                </a:solidFill>
-                <a:latin typeface="Calibri"/>
-              </a:defRPr>
-            </a:lvl1pPr>
-          </a:lstStyle>
-          <a:p>
-            <a:pPr indent="0" defTabSz="914400">
-              <a:lnSpc>
-                <a:spcPct val="100000"/>
-              </a:lnSpc>
-              <a:buNone/>
-            </a:pPr>
-            <a:r>
-              <a:rPr b="0" lang="pl-PL" sz="1200" spc="-1" strike="noStrike">
-                <a:solidFill>
-                  <a:schemeClr val="dk1">
-                    <a:tint val="75000"/>
-                  </a:schemeClr>
-                </a:solidFill>
-                <a:latin typeface="Calibri"/>
-              </a:rPr>
-              <a:t>&lt;date/time&gt;</a:t>
-            </a:r>
-            <a:endParaRPr b="0" lang="en-US" sz="1200" spc="-1" strike="noStrike">
-              <a:solidFill>
-                <a:srgbClr val="000000"/>
-              </a:solidFill>
-              <a:latin typeface="Times New Roman"/>
-            </a:endParaRPr>
-          </a:p>
-        </p:txBody>
-      </p:sp>
-      <p:sp>
-        <p:nvSpPr>
-          <p:cNvPr id="15" name="PlaceHolder 4"/>
-          <p:cNvSpPr>
-            <a:spLocks noGrp="1"/>
-          </p:cNvSpPr>
-          <p:nvPr>
-            <p:ph type="ftr" idx="8"/>
+            <p:ph type="ftr" idx="7"/>
           </p:nvPr>
         </p:nvSpPr>
         <p:spPr>
           <a:xfrm>
             <a:off x="3124080" y="6356520"/>
-            <a:ext cx="2895120" cy="364680"/>
+            <a:ext cx="2894760" cy="364320"/>
           </a:xfrm>
           <a:prstGeom prst="rect">
             <a:avLst/>
@@ -3684,7 +2557,13 @@
           </a:bodyPr>
           <a:lstStyle>
             <a:lvl1pPr indent="0" algn="ctr">
+              <a:lnSpc>
+                <a:spcPct val="100000"/>
+              </a:lnSpc>
               <a:buNone/>
+              <a:tabLst>
+                <a:tab algn="l" pos="0"/>
+              </a:tabLst>
               <a:defRPr b="0" lang="en-US" sz="1400" spc="-1" strike="noStrike">
                 <a:solidFill>
                   <a:srgbClr val="000000"/>
@@ -3695,7 +2574,13 @@
           </a:lstStyle>
           <a:p>
             <a:pPr indent="0" algn="ctr">
+              <a:lnSpc>
+                <a:spcPct val="100000"/>
+              </a:lnSpc>
               <a:buNone/>
+              <a:tabLst>
+                <a:tab algn="l" pos="0"/>
+              </a:tabLst>
             </a:pPr>
             <a:r>
               <a:rPr b="0" lang="en-US" sz="1400" spc="-1" strike="noStrike">
@@ -3717,18 +2602,18 @@
       </p:sp>
       <p:sp>
         <p:nvSpPr>
-          <p:cNvPr id="16" name="PlaceHolder 5"/>
+          <p:cNvPr id="11" name="PlaceHolder 2"/>
           <p:cNvSpPr>
             <a:spLocks noGrp="1"/>
           </p:cNvSpPr>
           <p:nvPr>
-            <p:ph type="sldNum" idx="9"/>
+            <p:ph type="sldNum" idx="8"/>
           </p:nvPr>
         </p:nvSpPr>
         <p:spPr>
           <a:xfrm>
             <a:off x="6553080" y="6356520"/>
-            <a:ext cx="2133360" cy="364680"/>
+            <a:ext cx="2133000" cy="364320"/>
           </a:xfrm>
           <a:prstGeom prst="rect">
             <a:avLst/>
@@ -3748,6 +2633,9 @@
                 <a:spcPct val="100000"/>
               </a:lnSpc>
               <a:buNone/>
+              <a:tabLst>
+                <a:tab algn="l" pos="0"/>
+              </a:tabLst>
               <a:defRPr b="0" lang="pl-PL" sz="1200" spc="-1" strike="noStrike">
                 <a:solidFill>
                   <a:schemeClr val="dk1">
@@ -3764,8 +2652,11 @@
                 <a:spcPct val="100000"/>
               </a:lnSpc>
               <a:buNone/>
+              <a:tabLst>
+                <a:tab algn="l" pos="0"/>
+              </a:tabLst>
             </a:pPr>
-            <a:fld id="{33D6AE90-BF76-404D-B0C4-F4E6DD8E2768}" type="slidenum">
+            <a:fld id="{9E4B5A9D-0047-4043-BFF0-5E18A64D27CA}" type="slidenum">
               <a:rPr b="0" lang="pl-PL" sz="1200" spc="-1" strike="noStrike">
                 <a:solidFill>
                   <a:schemeClr val="dk1">
@@ -3777,6 +2668,66 @@
               <a:t>&lt;number&gt;</a:t>
             </a:fld>
             <a:endParaRPr b="0" lang="en-US" sz="1200" spc="-1" strike="noStrike">
+              <a:solidFill>
+                <a:srgbClr val="000000"/>
+              </a:solidFill>
+              <a:latin typeface="Times New Roman"/>
+            </a:endParaRPr>
+          </a:p>
+        </p:txBody>
+      </p:sp>
+      <p:sp>
+        <p:nvSpPr>
+          <p:cNvPr id="12" name="PlaceHolder 3"/>
+          <p:cNvSpPr>
+            <a:spLocks noGrp="1"/>
+          </p:cNvSpPr>
+          <p:nvPr>
+            <p:ph type="dt" idx="9"/>
+          </p:nvPr>
+        </p:nvSpPr>
+        <p:spPr>
+          <a:xfrm>
+            <a:off x="457200" y="6356520"/>
+            <a:ext cx="2133000" cy="364320"/>
+          </a:xfrm>
+          <a:prstGeom prst="rect">
+            <a:avLst/>
+          </a:prstGeom>
+          <a:noFill/>
+          <a:ln w="0">
+            <a:noFill/>
+          </a:ln>
+        </p:spPr>
+        <p:txBody>
+          <a:bodyPr lIns="91440" rIns="91440" tIns="45720" bIns="45720" anchor="ctr">
+            <a:noAutofit/>
+          </a:bodyPr>
+          <a:lstStyle>
+            <a:lvl1pPr indent="0">
+              <a:buNone/>
+              <a:defRPr b="0" lang="en-US" sz="1400" spc="-1" strike="noStrike">
+                <a:solidFill>
+                  <a:srgbClr val="000000"/>
+                </a:solidFill>
+                <a:latin typeface="Times New Roman"/>
+              </a:defRPr>
+            </a:lvl1pPr>
+          </a:lstStyle>
+          <a:p>
+            <a:pPr indent="0">
+              <a:buNone/>
+            </a:pPr>
+            <a:r>
+              <a:rPr b="0" lang="en-US" sz="1400" spc="-1" strike="noStrike">
+                <a:solidFill>
+                  <a:srgbClr val="000000"/>
+                </a:solidFill>
+                <a:latin typeface="Times New Roman"/>
+              </a:rPr>
+              <a:t>&lt;date/time&gt;</a:t>
+            </a:r>
+            <a:endParaRPr b="0" lang="en-US" sz="1400" spc="-1" strike="noStrike">
               <a:solidFill>
                 <a:srgbClr val="000000"/>
               </a:solidFill>
@@ -3820,7 +2771,7 @@
       </p:grpSpPr>
       <p:sp>
         <p:nvSpPr>
-          <p:cNvPr id="17" name="PlaceHolder 1"/>
+          <p:cNvPr id="13" name="PlaceHolder 1"/>
           <p:cNvSpPr>
             <a:spLocks noGrp="1"/>
           </p:cNvSpPr>
@@ -3830,8 +2781,8 @@
         </p:nvSpPr>
         <p:spPr>
           <a:xfrm>
-            <a:off x="457200" y="274680"/>
-            <a:ext cx="8229240" cy="1142640"/>
+            <a:off x="685800" y="2130480"/>
+            <a:ext cx="7771680" cy="1469160"/>
           </a:xfrm>
           <a:prstGeom prst="rect">
             <a:avLst/>
@@ -3842,37 +2793,34 @@
           </a:ln>
         </p:spPr>
         <p:txBody>
-          <a:bodyPr lIns="91440" rIns="91440" tIns="45720" bIns="45720" anchor="ctr">
+          <a:bodyPr lIns="0" rIns="0" tIns="0" bIns="0" anchor="ctr">
             <a:noAutofit/>
           </a:bodyPr>
           <a:p>
-            <a:pPr indent="0" algn="ctr" defTabSz="914400">
-              <a:lnSpc>
-                <a:spcPct val="100000"/>
-              </a:lnSpc>
+            <a:pPr indent="0">
               <a:buNone/>
             </a:pPr>
             <a:r>
-              <a:rPr b="0" lang="pl-PL" sz="4400" spc="-1" strike="noStrike">
-                <a:solidFill>
-                  <a:schemeClr val="dk1"/>
-                </a:solidFill>
-                <a:latin typeface="Calibri"/>
+              <a:rPr b="0" lang="en-US" sz="1800" spc="-1" strike="noStrike">
+                <a:solidFill>
+                  <a:srgbClr val="000000"/>
+                </a:solidFill>
+                <a:latin typeface="Arial"/>
               </a:rPr>
-              <a:t>Kliknij, aby edytować styl</a:t>
+              <a:t>Click to edit the title text format</a:t>
             </a:r>
-            <a:endParaRPr b="0" lang="pl-PL" sz="4400" spc="-1" strike="noStrike">
+            <a:endParaRPr b="0" lang="en-US" sz="1800" spc="-1" strike="noStrike">
               <a:solidFill>
-                <a:schemeClr val="dk1"/>
+                <a:srgbClr val="000000"/>
               </a:solidFill>
-              <a:latin typeface="Calibri"/>
+              <a:latin typeface="Arial"/>
             </a:endParaRPr>
           </a:p>
         </p:txBody>
       </p:sp>
       <p:sp>
         <p:nvSpPr>
-          <p:cNvPr id="18" name="PlaceHolder 2"/>
+          <p:cNvPr id="14" name="PlaceHolder 2"/>
           <p:cNvSpPr>
             <a:spLocks noGrp="1"/>
           </p:cNvSpPr>
@@ -3882,8 +2830,8 @@
         </p:nvSpPr>
         <p:spPr>
           <a:xfrm>
-            <a:off x="457200" y="1600200"/>
-            <a:ext cx="8229240" cy="4525560"/>
+            <a:off x="457200" y="1604520"/>
+            <a:ext cx="8228880" cy="3976920"/>
           </a:xfrm>
           <a:prstGeom prst="rect">
             <a:avLst/>
@@ -3894,245 +2842,221 @@
           </a:ln>
         </p:spPr>
         <p:txBody>
-          <a:bodyPr lIns="91440" rIns="91440" tIns="45720" bIns="45720" anchor="t">
-            <a:noAutofit/>
+          <a:bodyPr lIns="0" rIns="0" tIns="0" bIns="0" anchor="t">
+            <a:normAutofit/>
           </a:bodyPr>
           <a:p>
-            <a:pPr marL="343080" indent="-343080" defTabSz="914400">
-              <a:lnSpc>
-                <a:spcPct val="100000"/>
-              </a:lnSpc>
+            <a:pPr marL="432000" indent="-324000">
               <a:spcBef>
-                <a:spcPts val="641"/>
+                <a:spcPts val="1417"/>
               </a:spcBef>
               <a:buClr>
                 <a:srgbClr val="000000"/>
               </a:buClr>
-              <a:buFont typeface="Arial"/>
-              <a:buChar char="•"/>
+              <a:buSzPct val="45000"/>
+              <a:buFont typeface="Wingdings" charset="2"/>
+              <a:buChar char=""/>
             </a:pPr>
             <a:r>
-              <a:rPr b="0" lang="pl-PL" sz="3200" spc="-1" strike="noStrike">
-                <a:solidFill>
-                  <a:schemeClr val="dk1"/>
-                </a:solidFill>
-                <a:latin typeface="Calibri"/>
+              <a:rPr b="0" lang="en-US" sz="1800" spc="-1" strike="noStrike">
+                <a:solidFill>
+                  <a:srgbClr val="000000"/>
+                </a:solidFill>
+                <a:latin typeface="Arial"/>
               </a:rPr>
-              <a:t>Kliknij, aby edytować style wzorca tekstu</a:t>
+              <a:t>Click to edit the outline text format</a:t>
             </a:r>
-            <a:endParaRPr b="0" lang="pl-PL" sz="3200" spc="-1" strike="noStrike">
+            <a:endParaRPr b="0" lang="en-US" sz="1800" spc="-1" strike="noStrike">
               <a:solidFill>
-                <a:schemeClr val="dk1"/>
+                <a:srgbClr val="000000"/>
               </a:solidFill>
-              <a:latin typeface="Calibri"/>
+              <a:latin typeface="Arial"/>
             </a:endParaRPr>
           </a:p>
           <a:p>
-            <a:pPr lvl="1" marL="743040" indent="-285840" defTabSz="914400">
-              <a:lnSpc>
-                <a:spcPct val="100000"/>
-              </a:lnSpc>
+            <a:pPr lvl="1" marL="864000" indent="-324000">
               <a:spcBef>
-                <a:spcPts val="561"/>
+                <a:spcPts val="1134"/>
               </a:spcBef>
               <a:buClr>
                 <a:srgbClr val="000000"/>
               </a:buClr>
-              <a:buFont typeface="Arial"/>
-              <a:buChar char="–"/>
+              <a:buSzPct val="75000"/>
+              <a:buFont typeface="Symbol" charset="2"/>
+              <a:buChar char=""/>
             </a:pPr>
             <a:r>
-              <a:rPr b="0" lang="pl-PL" sz="2800" spc="-1" strike="noStrike">
-                <a:solidFill>
-                  <a:schemeClr val="dk1"/>
-                </a:solidFill>
-                <a:latin typeface="Calibri"/>
+              <a:rPr b="0" lang="en-US" sz="1800" spc="-1" strike="noStrike">
+                <a:solidFill>
+                  <a:srgbClr val="000000"/>
+                </a:solidFill>
+                <a:latin typeface="Arial"/>
               </a:rPr>
-              <a:t>Drugi poziom</a:t>
+              <a:t>Second Outline Level</a:t>
             </a:r>
-            <a:endParaRPr b="0" lang="pl-PL" sz="2800" spc="-1" strike="noStrike">
+            <a:endParaRPr b="0" lang="en-US" sz="1800" spc="-1" strike="noStrike">
               <a:solidFill>
-                <a:schemeClr val="dk1"/>
+                <a:srgbClr val="000000"/>
               </a:solidFill>
-              <a:latin typeface="Calibri"/>
+              <a:latin typeface="Arial"/>
             </a:endParaRPr>
           </a:p>
           <a:p>
-            <a:pPr lvl="2" marL="1143000" indent="-228600" defTabSz="914400">
-              <a:lnSpc>
-                <a:spcPct val="100000"/>
-              </a:lnSpc>
+            <a:pPr lvl="2" marL="1296000" indent="-288000">
               <a:spcBef>
-                <a:spcPts val="479"/>
+                <a:spcPts val="850"/>
               </a:spcBef>
               <a:buClr>
                 <a:srgbClr val="000000"/>
               </a:buClr>
-              <a:buFont typeface="Arial"/>
-              <a:buChar char="•"/>
+              <a:buSzPct val="45000"/>
+              <a:buFont typeface="Wingdings" charset="2"/>
+              <a:buChar char=""/>
             </a:pPr>
             <a:r>
-              <a:rPr b="0" lang="pl-PL" sz="2400" spc="-1" strike="noStrike">
-                <a:solidFill>
-                  <a:schemeClr val="dk1"/>
-                </a:solidFill>
-                <a:latin typeface="Calibri"/>
+              <a:rPr b="0" lang="en-US" sz="1800" spc="-1" strike="noStrike">
+                <a:solidFill>
+                  <a:srgbClr val="000000"/>
+                </a:solidFill>
+                <a:latin typeface="Arial"/>
               </a:rPr>
-              <a:t>Trzeci poziom</a:t>
+              <a:t>Third Outline Level</a:t>
             </a:r>
-            <a:endParaRPr b="0" lang="pl-PL" sz="2400" spc="-1" strike="noStrike">
+            <a:endParaRPr b="0" lang="en-US" sz="1800" spc="-1" strike="noStrike">
               <a:solidFill>
-                <a:schemeClr val="dk1"/>
+                <a:srgbClr val="000000"/>
               </a:solidFill>
-              <a:latin typeface="Calibri"/>
+              <a:latin typeface="Arial"/>
             </a:endParaRPr>
           </a:p>
           <a:p>
-            <a:pPr lvl="3" marL="1600200" indent="-228600" defTabSz="914400">
-              <a:lnSpc>
-                <a:spcPct val="100000"/>
-              </a:lnSpc>
+            <a:pPr lvl="3" marL="1728000" indent="-216000">
               <a:spcBef>
-                <a:spcPts val="400"/>
+                <a:spcPts val="567"/>
               </a:spcBef>
               <a:buClr>
                 <a:srgbClr val="000000"/>
               </a:buClr>
-              <a:buFont typeface="Arial"/>
-              <a:buChar char="–"/>
+              <a:buSzPct val="75000"/>
+              <a:buFont typeface="Symbol" charset="2"/>
+              <a:buChar char=""/>
             </a:pPr>
             <a:r>
-              <a:rPr b="0" lang="pl-PL" sz="2000" spc="-1" strike="noStrike">
-                <a:solidFill>
-                  <a:schemeClr val="dk1"/>
-                </a:solidFill>
-                <a:latin typeface="Calibri"/>
+              <a:rPr b="0" lang="en-US" sz="1800" spc="-1" strike="noStrike">
+                <a:solidFill>
+                  <a:srgbClr val="000000"/>
+                </a:solidFill>
+                <a:latin typeface="Arial"/>
               </a:rPr>
-              <a:t>Czwarty poziom</a:t>
+              <a:t>Fourth Outline Level</a:t>
             </a:r>
-            <a:endParaRPr b="0" lang="pl-PL" sz="2000" spc="-1" strike="noStrike">
+            <a:endParaRPr b="0" lang="en-US" sz="1800" spc="-1" strike="noStrike">
               <a:solidFill>
-                <a:schemeClr val="dk1"/>
+                <a:srgbClr val="000000"/>
               </a:solidFill>
-              <a:latin typeface="Calibri"/>
+              <a:latin typeface="Arial"/>
             </a:endParaRPr>
           </a:p>
           <a:p>
-            <a:pPr lvl="4" marL="2057400" indent="-228600" defTabSz="914400">
-              <a:lnSpc>
-                <a:spcPct val="100000"/>
-              </a:lnSpc>
+            <a:pPr lvl="4" marL="2160000" indent="-216000">
               <a:spcBef>
-                <a:spcPts val="400"/>
+                <a:spcPts val="283"/>
               </a:spcBef>
               <a:buClr>
                 <a:srgbClr val="000000"/>
               </a:buClr>
-              <a:buFont typeface="Arial"/>
-              <a:buChar char="»"/>
+              <a:buSzPct val="45000"/>
+              <a:buFont typeface="Wingdings" charset="2"/>
+              <a:buChar char=""/>
             </a:pPr>
             <a:r>
-              <a:rPr b="0" lang="pl-PL" sz="2000" spc="-1" strike="noStrike">
-                <a:solidFill>
-                  <a:schemeClr val="dk1"/>
-                </a:solidFill>
-                <a:latin typeface="Calibri"/>
+              <a:rPr b="0" lang="en-US" sz="1800" spc="-1" strike="noStrike">
+                <a:solidFill>
+                  <a:srgbClr val="000000"/>
+                </a:solidFill>
+                <a:latin typeface="Arial"/>
               </a:rPr>
-              <a:t>Piąty poziom</a:t>
+              <a:t>Fifth Outline Level</a:t>
             </a:r>
-            <a:endParaRPr b="0" lang="pl-PL" sz="2000" spc="-1" strike="noStrike">
+            <a:endParaRPr b="0" lang="en-US" sz="1800" spc="-1" strike="noStrike">
               <a:solidFill>
-                <a:schemeClr val="dk1"/>
+                <a:srgbClr val="000000"/>
               </a:solidFill>
-              <a:latin typeface="Calibri"/>
+              <a:latin typeface="Arial"/>
+            </a:endParaRPr>
+          </a:p>
+          <a:p>
+            <a:pPr lvl="5" marL="2592000" indent="-216000">
+              <a:spcBef>
+                <a:spcPts val="283"/>
+              </a:spcBef>
+              <a:buClr>
+                <a:srgbClr val="000000"/>
+              </a:buClr>
+              <a:buSzPct val="45000"/>
+              <a:buFont typeface="Wingdings" charset="2"/>
+              <a:buChar char=""/>
+            </a:pPr>
+            <a:r>
+              <a:rPr b="0" lang="en-US" sz="1800" spc="-1" strike="noStrike">
+                <a:solidFill>
+                  <a:srgbClr val="000000"/>
+                </a:solidFill>
+                <a:latin typeface="Arial"/>
+              </a:rPr>
+              <a:t>Sixth Outline Level</a:t>
+            </a:r>
+            <a:endParaRPr b="0" lang="en-US" sz="1800" spc="-1" strike="noStrike">
+              <a:solidFill>
+                <a:srgbClr val="000000"/>
+              </a:solidFill>
+              <a:latin typeface="Arial"/>
+            </a:endParaRPr>
+          </a:p>
+          <a:p>
+            <a:pPr lvl="6" marL="3024000" indent="-216000">
+              <a:spcBef>
+                <a:spcPts val="283"/>
+              </a:spcBef>
+              <a:buClr>
+                <a:srgbClr val="000000"/>
+              </a:buClr>
+              <a:buSzPct val="45000"/>
+              <a:buFont typeface="Wingdings" charset="2"/>
+              <a:buChar char=""/>
+            </a:pPr>
+            <a:r>
+              <a:rPr b="0" lang="en-US" sz="1800" spc="-1" strike="noStrike">
+                <a:solidFill>
+                  <a:srgbClr val="000000"/>
+                </a:solidFill>
+                <a:latin typeface="Arial"/>
+              </a:rPr>
+              <a:t>Seventh Outline Level</a:t>
+            </a:r>
+            <a:endParaRPr b="0" lang="en-US" sz="1800" spc="-1" strike="noStrike">
+              <a:solidFill>
+                <a:srgbClr val="000000"/>
+              </a:solidFill>
+              <a:latin typeface="Arial"/>
             </a:endParaRPr>
           </a:p>
         </p:txBody>
       </p:sp>
       <p:sp>
         <p:nvSpPr>
-          <p:cNvPr id="19" name="PlaceHolder 3"/>
+          <p:cNvPr id="15" name="PlaceHolder 3"/>
           <p:cNvSpPr>
             <a:spLocks noGrp="1"/>
           </p:cNvSpPr>
           <p:nvPr>
-            <p:ph type="dt" idx="10"/>
-          </p:nvPr>
-        </p:nvSpPr>
-        <p:spPr>
-          <a:xfrm>
-            <a:off x="457200" y="6356520"/>
-            <a:ext cx="2133360" cy="364680"/>
-          </a:xfrm>
-          <a:prstGeom prst="rect">
-            <a:avLst/>
-          </a:prstGeom>
-          <a:noFill/>
-          <a:ln w="0">
-            <a:noFill/>
-          </a:ln>
-        </p:spPr>
-        <p:txBody>
-          <a:bodyPr lIns="91440" rIns="91440" tIns="45720" bIns="45720" anchor="ctr">
-            <a:noAutofit/>
-          </a:bodyPr>
-          <a:lstStyle>
-            <a:lvl1pPr indent="0" defTabSz="914400">
-              <a:lnSpc>
-                <a:spcPct val="100000"/>
-              </a:lnSpc>
-              <a:buNone/>
-              <a:defRPr b="0" lang="pl-PL" sz="1200" spc="-1" strike="noStrike">
-                <a:solidFill>
-                  <a:schemeClr val="dk1">
-                    <a:tint val="75000"/>
-                  </a:schemeClr>
-                </a:solidFill>
-                <a:latin typeface="Calibri"/>
-              </a:defRPr>
-            </a:lvl1pPr>
-          </a:lstStyle>
-          <a:p>
-            <a:pPr indent="0" defTabSz="914400">
-              <a:lnSpc>
-                <a:spcPct val="100000"/>
-              </a:lnSpc>
-              <a:buNone/>
-            </a:pPr>
-            <a:r>
-              <a:rPr b="0" lang="pl-PL" sz="1200" spc="-1" strike="noStrike">
-                <a:solidFill>
-                  <a:schemeClr val="dk1">
-                    <a:tint val="75000"/>
-                  </a:schemeClr>
-                </a:solidFill>
-                <a:latin typeface="Calibri"/>
-              </a:rPr>
-              <a:t>&lt;date/time&gt;</a:t>
-            </a:r>
-            <a:endParaRPr b="0" lang="en-US" sz="1200" spc="-1" strike="noStrike">
-              <a:solidFill>
-                <a:srgbClr val="000000"/>
-              </a:solidFill>
-              <a:latin typeface="Times New Roman"/>
-            </a:endParaRPr>
-          </a:p>
-        </p:txBody>
-      </p:sp>
-      <p:sp>
-        <p:nvSpPr>
-          <p:cNvPr id="20" name="PlaceHolder 4"/>
-          <p:cNvSpPr>
-            <a:spLocks noGrp="1"/>
-          </p:cNvSpPr>
-          <p:nvPr>
-            <p:ph type="ftr" idx="11"/>
+            <p:ph type="ftr" idx="10"/>
           </p:nvPr>
         </p:nvSpPr>
         <p:spPr>
           <a:xfrm>
             <a:off x="3124080" y="6356520"/>
-            <a:ext cx="2895120" cy="364680"/>
+            <a:ext cx="2894760" cy="364320"/>
           </a:xfrm>
           <a:prstGeom prst="rect">
             <a:avLst/>
@@ -4148,7 +3072,13 @@
           </a:bodyPr>
           <a:lstStyle>
             <a:lvl1pPr indent="0" algn="ctr">
+              <a:lnSpc>
+                <a:spcPct val="100000"/>
+              </a:lnSpc>
               <a:buNone/>
+              <a:tabLst>
+                <a:tab algn="l" pos="0"/>
+              </a:tabLst>
               <a:defRPr b="0" lang="en-US" sz="1400" spc="-1" strike="noStrike">
                 <a:solidFill>
                   <a:srgbClr val="000000"/>
@@ -4159,7 +3089,13 @@
           </a:lstStyle>
           <a:p>
             <a:pPr indent="0" algn="ctr">
+              <a:lnSpc>
+                <a:spcPct val="100000"/>
+              </a:lnSpc>
               <a:buNone/>
+              <a:tabLst>
+                <a:tab algn="l" pos="0"/>
+              </a:tabLst>
             </a:pPr>
             <a:r>
               <a:rPr b="0" lang="en-US" sz="1400" spc="-1" strike="noStrike">
@@ -4181,18 +3117,18 @@
       </p:sp>
       <p:sp>
         <p:nvSpPr>
-          <p:cNvPr id="21" name="PlaceHolder 5"/>
+          <p:cNvPr id="16" name="PlaceHolder 4"/>
           <p:cNvSpPr>
             <a:spLocks noGrp="1"/>
           </p:cNvSpPr>
           <p:nvPr>
-            <p:ph type="sldNum" idx="12"/>
+            <p:ph type="sldNum" idx="11"/>
           </p:nvPr>
         </p:nvSpPr>
         <p:spPr>
           <a:xfrm>
             <a:off x="6553080" y="6356520"/>
-            <a:ext cx="2133360" cy="364680"/>
+            <a:ext cx="2133000" cy="364320"/>
           </a:xfrm>
           <a:prstGeom prst="rect">
             <a:avLst/>
@@ -4212,6 +3148,9 @@
                 <a:spcPct val="100000"/>
               </a:lnSpc>
               <a:buNone/>
+              <a:tabLst>
+                <a:tab algn="l" pos="0"/>
+              </a:tabLst>
               <a:defRPr b="0" lang="pl-PL" sz="1200" spc="-1" strike="noStrike">
                 <a:solidFill>
                   <a:schemeClr val="dk1">
@@ -4228,8 +3167,11 @@
                 <a:spcPct val="100000"/>
               </a:lnSpc>
               <a:buNone/>
+              <a:tabLst>
+                <a:tab algn="l" pos="0"/>
+              </a:tabLst>
             </a:pPr>
-            <a:fld id="{FFBFF54B-B9C9-4950-AF04-EEFE120C7455}" type="slidenum">
+            <a:fld id="{E6100E58-3437-452A-BAC6-F60DB6B9DFD7}" type="slidenum">
               <a:rPr b="0" lang="pl-PL" sz="1200" spc="-1" strike="noStrike">
                 <a:solidFill>
                   <a:schemeClr val="dk1">
@@ -4241,6 +3183,66 @@
               <a:t>&lt;number&gt;</a:t>
             </a:fld>
             <a:endParaRPr b="0" lang="en-US" sz="1200" spc="-1" strike="noStrike">
+              <a:solidFill>
+                <a:srgbClr val="000000"/>
+              </a:solidFill>
+              <a:latin typeface="Times New Roman"/>
+            </a:endParaRPr>
+          </a:p>
+        </p:txBody>
+      </p:sp>
+      <p:sp>
+        <p:nvSpPr>
+          <p:cNvPr id="17" name="PlaceHolder 5"/>
+          <p:cNvSpPr>
+            <a:spLocks noGrp="1"/>
+          </p:cNvSpPr>
+          <p:nvPr>
+            <p:ph type="dt" idx="12"/>
+          </p:nvPr>
+        </p:nvSpPr>
+        <p:spPr>
+          <a:xfrm>
+            <a:off x="457200" y="6356520"/>
+            <a:ext cx="2133000" cy="364320"/>
+          </a:xfrm>
+          <a:prstGeom prst="rect">
+            <a:avLst/>
+          </a:prstGeom>
+          <a:noFill/>
+          <a:ln w="0">
+            <a:noFill/>
+          </a:ln>
+        </p:spPr>
+        <p:txBody>
+          <a:bodyPr lIns="91440" rIns="91440" tIns="45720" bIns="45720" anchor="ctr">
+            <a:noAutofit/>
+          </a:bodyPr>
+          <a:lstStyle>
+            <a:lvl1pPr indent="0">
+              <a:buNone/>
+              <a:defRPr b="0" lang="en-US" sz="1400" spc="-1" strike="noStrike">
+                <a:solidFill>
+                  <a:srgbClr val="000000"/>
+                </a:solidFill>
+                <a:latin typeface="Times New Roman"/>
+              </a:defRPr>
+            </a:lvl1pPr>
+          </a:lstStyle>
+          <a:p>
+            <a:pPr indent="0">
+              <a:buNone/>
+            </a:pPr>
+            <a:r>
+              <a:rPr b="0" lang="en-US" sz="1400" spc="-1" strike="noStrike">
+                <a:solidFill>
+                  <a:srgbClr val="000000"/>
+                </a:solidFill>
+                <a:latin typeface="Times New Roman"/>
+              </a:rPr>
+              <a:t>&lt;date/time&gt;</a:t>
+            </a:r>
+            <a:endParaRPr b="0" lang="en-US" sz="1400" spc="-1" strike="noStrike">
               <a:solidFill>
                 <a:srgbClr val="000000"/>
               </a:solidFill>
@@ -4284,200 +3286,18 @@
       </p:grpSpPr>
       <p:sp>
         <p:nvSpPr>
-          <p:cNvPr id="24" name="PlaceHolder 1"/>
+          <p:cNvPr id="20" name="PlaceHolder 1"/>
           <p:cNvSpPr>
             <a:spLocks noGrp="1"/>
           </p:cNvSpPr>
           <p:nvPr>
-            <p:ph type="title"/>
-          </p:nvPr>
-        </p:nvSpPr>
-        <p:spPr>
-          <a:xfrm>
-            <a:off x="722160" y="4406760"/>
-            <a:ext cx="7772040" cy="1361880"/>
-          </a:xfrm>
-          <a:prstGeom prst="rect">
-            <a:avLst/>
-          </a:prstGeom>
-          <a:noFill/>
-          <a:ln w="0">
-            <a:noFill/>
-          </a:ln>
-        </p:spPr>
-        <p:txBody>
-          <a:bodyPr lIns="91440" rIns="91440" tIns="45720" bIns="45720" anchor="t">
-            <a:noAutofit/>
-          </a:bodyPr>
-          <a:p>
-            <a:pPr indent="0" defTabSz="914400">
-              <a:lnSpc>
-                <a:spcPct val="100000"/>
-              </a:lnSpc>
-              <a:buNone/>
-            </a:pPr>
-            <a:r>
-              <a:rPr b="1" lang="pl-PL" sz="4000" spc="-1" strike="noStrike" cap="all">
-                <a:solidFill>
-                  <a:schemeClr val="dk1"/>
-                </a:solidFill>
-                <a:latin typeface="Calibri"/>
-              </a:rPr>
-              <a:t>Kliknij, aby edytować styl</a:t>
-            </a:r>
-            <a:endParaRPr b="0" lang="pl-PL" sz="4000" spc="-1" strike="noStrike">
-              <a:solidFill>
-                <a:schemeClr val="dk1"/>
-              </a:solidFill>
-              <a:latin typeface="Calibri"/>
-            </a:endParaRPr>
-          </a:p>
-        </p:txBody>
-      </p:sp>
-      <p:sp>
-        <p:nvSpPr>
-          <p:cNvPr id="25" name="PlaceHolder 2"/>
-          <p:cNvSpPr>
-            <a:spLocks noGrp="1"/>
-          </p:cNvSpPr>
-          <p:nvPr>
-            <p:ph type="body"/>
-          </p:nvPr>
-        </p:nvSpPr>
-        <p:spPr>
-          <a:xfrm>
-            <a:off x="722160" y="2906640"/>
-            <a:ext cx="7772040" cy="1499760"/>
-          </a:xfrm>
-          <a:prstGeom prst="rect">
-            <a:avLst/>
-          </a:prstGeom>
-          <a:noFill/>
-          <a:ln w="0">
-            <a:noFill/>
-          </a:ln>
-        </p:spPr>
-        <p:txBody>
-          <a:bodyPr lIns="91440" rIns="91440" tIns="45720" bIns="45720" anchor="b">
-            <a:noAutofit/>
-          </a:bodyPr>
-          <a:p>
-            <a:pPr indent="0" defTabSz="914400">
-              <a:lnSpc>
-                <a:spcPct val="100000"/>
-              </a:lnSpc>
-              <a:spcBef>
-                <a:spcPts val="400"/>
-              </a:spcBef>
-              <a:buNone/>
-              <a:tabLst>
-                <a:tab algn="l" pos="0"/>
-              </a:tabLst>
-            </a:pPr>
-            <a:r>
-              <a:rPr b="0" lang="pl-PL" sz="2000" spc="-1" strike="noStrike">
-                <a:solidFill>
-                  <a:schemeClr val="dk1">
-                    <a:tint val="75000"/>
-                  </a:schemeClr>
-                </a:solidFill>
-                <a:latin typeface="Calibri"/>
-              </a:rPr>
-              <a:t>Kliknij, aby edytować style wzorca tekstu</a:t>
-            </a:r>
-            <a:endParaRPr b="0" lang="pl-PL" sz="2000" spc="-1" strike="noStrike">
-              <a:solidFill>
-                <a:schemeClr val="dk1"/>
-              </a:solidFill>
-              <a:latin typeface="Calibri"/>
-            </a:endParaRPr>
-          </a:p>
-        </p:txBody>
-      </p:sp>
-      <p:sp>
-        <p:nvSpPr>
-          <p:cNvPr id="26" name="PlaceHolder 3"/>
-          <p:cNvSpPr>
-            <a:spLocks noGrp="1"/>
-          </p:cNvSpPr>
-          <p:nvPr>
-            <p:ph type="dt" idx="13"/>
-          </p:nvPr>
-        </p:nvSpPr>
-        <p:spPr>
-          <a:xfrm>
-            <a:off x="457200" y="6356520"/>
-            <a:ext cx="2133360" cy="364680"/>
-          </a:xfrm>
-          <a:prstGeom prst="rect">
-            <a:avLst/>
-          </a:prstGeom>
-          <a:noFill/>
-          <a:ln w="0">
-            <a:noFill/>
-          </a:ln>
-        </p:spPr>
-        <p:txBody>
-          <a:bodyPr lIns="91440" rIns="91440" tIns="45720" bIns="45720" anchor="ctr">
-            <a:noAutofit/>
-          </a:bodyPr>
-          <a:lstStyle>
-            <a:lvl1pPr indent="0" defTabSz="914400">
-              <a:lnSpc>
-                <a:spcPct val="100000"/>
-              </a:lnSpc>
-              <a:buNone/>
-              <a:defRPr b="0" lang="pl-PL" sz="1200" spc="-1" strike="noStrike">
-                <a:solidFill>
-                  <a:schemeClr val="dk1">
-                    <a:tint val="75000"/>
-                  </a:schemeClr>
-                </a:solidFill>
-                <a:latin typeface="Calibri"/>
-              </a:defRPr>
-            </a:lvl1pPr>
-          </a:lstStyle>
-          <a:p>
-            <a:pPr indent="0" defTabSz="914400">
-              <a:lnSpc>
-                <a:spcPct val="100000"/>
-              </a:lnSpc>
-              <a:buNone/>
-            </a:pPr>
-            <a:r>
-              <a:rPr b="0" lang="pl-PL" sz="1200" spc="-1" strike="noStrike">
-                <a:solidFill>
-                  <a:schemeClr val="dk1">
-                    <a:tint val="75000"/>
-                  </a:schemeClr>
-                </a:solidFill>
-                <a:latin typeface="Calibri"/>
-              </a:rPr>
-              <a:t>&lt;date/time&gt;</a:t>
-            </a:r>
-            <a:endParaRPr b="0" lang="en-US" sz="1200" spc="-1" strike="noStrike">
-              <a:solidFill>
-                <a:srgbClr val="000000"/>
-              </a:solidFill>
-              <a:latin typeface="Times New Roman"/>
-            </a:endParaRPr>
-          </a:p>
-        </p:txBody>
-      </p:sp>
-      <p:sp>
-        <p:nvSpPr>
-          <p:cNvPr id="27" name="PlaceHolder 4"/>
-          <p:cNvSpPr>
-            <a:spLocks noGrp="1"/>
-          </p:cNvSpPr>
-          <p:nvPr>
-            <p:ph type="ftr" idx="14"/>
+            <p:ph type="ftr" idx="13"/>
           </p:nvPr>
         </p:nvSpPr>
         <p:spPr>
           <a:xfrm>
             <a:off x="3124080" y="6356520"/>
-            <a:ext cx="2895120" cy="364680"/>
+            <a:ext cx="2894760" cy="364320"/>
           </a:xfrm>
           <a:prstGeom prst="rect">
             <a:avLst/>
@@ -4493,7 +3313,13 @@
           </a:bodyPr>
           <a:lstStyle>
             <a:lvl1pPr indent="0" algn="ctr">
+              <a:lnSpc>
+                <a:spcPct val="100000"/>
+              </a:lnSpc>
               <a:buNone/>
+              <a:tabLst>
+                <a:tab algn="l" pos="0"/>
+              </a:tabLst>
               <a:defRPr b="0" lang="en-US" sz="1400" spc="-1" strike="noStrike">
                 <a:solidFill>
                   <a:srgbClr val="000000"/>
@@ -4504,7 +3330,13 @@
           </a:lstStyle>
           <a:p>
             <a:pPr indent="0" algn="ctr">
+              <a:lnSpc>
+                <a:spcPct val="100000"/>
+              </a:lnSpc>
               <a:buNone/>
+              <a:tabLst>
+                <a:tab algn="l" pos="0"/>
+              </a:tabLst>
             </a:pPr>
             <a:r>
               <a:rPr b="0" lang="en-US" sz="1400" spc="-1" strike="noStrike">
@@ -4526,18 +3358,18 @@
       </p:sp>
       <p:sp>
         <p:nvSpPr>
-          <p:cNvPr id="28" name="PlaceHolder 5"/>
+          <p:cNvPr id="21" name="PlaceHolder 2"/>
           <p:cNvSpPr>
             <a:spLocks noGrp="1"/>
           </p:cNvSpPr>
           <p:nvPr>
-            <p:ph type="sldNum" idx="15"/>
+            <p:ph type="sldNum" idx="14"/>
           </p:nvPr>
         </p:nvSpPr>
         <p:spPr>
           <a:xfrm>
             <a:off x="6553080" y="6356520"/>
-            <a:ext cx="2133360" cy="364680"/>
+            <a:ext cx="2133000" cy="364320"/>
           </a:xfrm>
           <a:prstGeom prst="rect">
             <a:avLst/>
@@ -4557,6 +3389,9 @@
                 <a:spcPct val="100000"/>
               </a:lnSpc>
               <a:buNone/>
+              <a:tabLst>
+                <a:tab algn="l" pos="0"/>
+              </a:tabLst>
               <a:defRPr b="0" lang="pl-PL" sz="1200" spc="-1" strike="noStrike">
                 <a:solidFill>
                   <a:schemeClr val="dk1">
@@ -4573,8 +3408,11 @@
                 <a:spcPct val="100000"/>
               </a:lnSpc>
               <a:buNone/>
+              <a:tabLst>
+                <a:tab algn="l" pos="0"/>
+              </a:tabLst>
             </a:pPr>
-            <a:fld id="{A99ACE60-37AE-4719-9D71-93B725B43E38}" type="slidenum">
+            <a:fld id="{C4FE364E-9E0A-4EBB-874A-243C3DC5FD93}" type="slidenum">
               <a:rPr b="0" lang="pl-PL" sz="1200" spc="-1" strike="noStrike">
                 <a:solidFill>
                   <a:schemeClr val="dk1">
@@ -4586,6 +3424,66 @@
               <a:t>&lt;number&gt;</a:t>
             </a:fld>
             <a:endParaRPr b="0" lang="en-US" sz="1200" spc="-1" strike="noStrike">
+              <a:solidFill>
+                <a:srgbClr val="000000"/>
+              </a:solidFill>
+              <a:latin typeface="Times New Roman"/>
+            </a:endParaRPr>
+          </a:p>
+        </p:txBody>
+      </p:sp>
+      <p:sp>
+        <p:nvSpPr>
+          <p:cNvPr id="22" name="PlaceHolder 3"/>
+          <p:cNvSpPr>
+            <a:spLocks noGrp="1"/>
+          </p:cNvSpPr>
+          <p:nvPr>
+            <p:ph type="dt" idx="15"/>
+          </p:nvPr>
+        </p:nvSpPr>
+        <p:spPr>
+          <a:xfrm>
+            <a:off x="457200" y="6356520"/>
+            <a:ext cx="2133000" cy="364320"/>
+          </a:xfrm>
+          <a:prstGeom prst="rect">
+            <a:avLst/>
+          </a:prstGeom>
+          <a:noFill/>
+          <a:ln w="0">
+            <a:noFill/>
+          </a:ln>
+        </p:spPr>
+        <p:txBody>
+          <a:bodyPr lIns="91440" rIns="91440" tIns="45720" bIns="45720" anchor="ctr">
+            <a:noAutofit/>
+          </a:bodyPr>
+          <a:lstStyle>
+            <a:lvl1pPr indent="0">
+              <a:buNone/>
+              <a:defRPr b="0" lang="en-US" sz="1400" spc="-1" strike="noStrike">
+                <a:solidFill>
+                  <a:srgbClr val="000000"/>
+                </a:solidFill>
+                <a:latin typeface="Times New Roman"/>
+              </a:defRPr>
+            </a:lvl1pPr>
+          </a:lstStyle>
+          <a:p>
+            <a:pPr indent="0">
+              <a:buNone/>
+            </a:pPr>
+            <a:r>
+              <a:rPr b="0" lang="en-US" sz="1400" spc="-1" strike="noStrike">
+                <a:solidFill>
+                  <a:srgbClr val="000000"/>
+                </a:solidFill>
+                <a:latin typeface="Times New Roman"/>
+              </a:rPr>
+              <a:t>&lt;date/time&gt;</a:t>
+            </a:r>
+            <a:endParaRPr b="0" lang="en-US" sz="1400" spc="-1" strike="noStrike">
               <a:solidFill>
                 <a:srgbClr val="000000"/>
               </a:solidFill>
@@ -4629,7 +3527,7 @@
       </p:grpSpPr>
       <p:sp>
         <p:nvSpPr>
-          <p:cNvPr id="29" name="PlaceHolder 1"/>
+          <p:cNvPr id="23" name="PlaceHolder 1"/>
           <p:cNvSpPr>
             <a:spLocks noGrp="1"/>
           </p:cNvSpPr>
@@ -4639,8 +3537,8 @@
         </p:nvSpPr>
         <p:spPr>
           <a:xfrm>
-            <a:off x="457200" y="274680"/>
-            <a:ext cx="8229240" cy="1142640"/>
+            <a:off x="685800" y="2130480"/>
+            <a:ext cx="7771680" cy="1469160"/>
           </a:xfrm>
           <a:prstGeom prst="rect">
             <a:avLst/>
@@ -4651,37 +3549,34 @@
           </a:ln>
         </p:spPr>
         <p:txBody>
-          <a:bodyPr lIns="91440" rIns="91440" tIns="45720" bIns="45720" anchor="ctr">
+          <a:bodyPr lIns="0" rIns="0" tIns="0" bIns="0" anchor="ctr">
             <a:noAutofit/>
           </a:bodyPr>
           <a:p>
-            <a:pPr indent="0" algn="ctr" defTabSz="914400">
-              <a:lnSpc>
-                <a:spcPct val="100000"/>
-              </a:lnSpc>
+            <a:pPr indent="0">
               <a:buNone/>
             </a:pPr>
             <a:r>
-              <a:rPr b="0" lang="pl-PL" sz="4400" spc="-1" strike="noStrike">
-                <a:solidFill>
-                  <a:schemeClr val="dk1"/>
-                </a:solidFill>
-                <a:latin typeface="Calibri"/>
+              <a:rPr b="0" lang="en-US" sz="1800" spc="-1" strike="noStrike">
+                <a:solidFill>
+                  <a:srgbClr val="000000"/>
+                </a:solidFill>
+                <a:latin typeface="Arial"/>
               </a:rPr>
-              <a:t>Kliknij, aby edytować styl</a:t>
+              <a:t>Click to edit the title text format</a:t>
             </a:r>
-            <a:endParaRPr b="0" lang="pl-PL" sz="4400" spc="-1" strike="noStrike">
+            <a:endParaRPr b="0" lang="en-US" sz="1800" spc="-1" strike="noStrike">
               <a:solidFill>
-                <a:schemeClr val="dk1"/>
+                <a:srgbClr val="000000"/>
               </a:solidFill>
-              <a:latin typeface="Calibri"/>
+              <a:latin typeface="Arial"/>
             </a:endParaRPr>
           </a:p>
         </p:txBody>
       </p:sp>
       <p:sp>
         <p:nvSpPr>
-          <p:cNvPr id="30" name="PlaceHolder 2"/>
+          <p:cNvPr id="24" name="PlaceHolder 2"/>
           <p:cNvSpPr>
             <a:spLocks noGrp="1"/>
           </p:cNvSpPr>
@@ -4691,8 +3586,8 @@
         </p:nvSpPr>
         <p:spPr>
           <a:xfrm>
-            <a:off x="457200" y="1600200"/>
-            <a:ext cx="4038120" cy="4525560"/>
+            <a:off x="457200" y="1604520"/>
+            <a:ext cx="4015440" cy="3976920"/>
           </a:xfrm>
           <a:prstGeom prst="rect">
             <a:avLst/>
@@ -4703,164 +3598,210 @@
           </a:ln>
         </p:spPr>
         <p:txBody>
-          <a:bodyPr lIns="91440" rIns="91440" tIns="45720" bIns="45720" anchor="t">
-            <a:noAutofit/>
+          <a:bodyPr lIns="0" rIns="0" tIns="0" bIns="0" anchor="t">
+            <a:normAutofit/>
           </a:bodyPr>
           <a:p>
-            <a:pPr marL="343080" indent="-343080" defTabSz="914400">
-              <a:lnSpc>
-                <a:spcPct val="100000"/>
-              </a:lnSpc>
+            <a:pPr marL="432000" indent="-324000">
               <a:spcBef>
-                <a:spcPts val="561"/>
+                <a:spcPts val="1417"/>
               </a:spcBef>
               <a:buClr>
                 <a:srgbClr val="000000"/>
               </a:buClr>
-              <a:buFont typeface="Arial"/>
-              <a:buChar char="•"/>
+              <a:buSzPct val="45000"/>
+              <a:buFont typeface="Wingdings" charset="2"/>
+              <a:buChar char=""/>
             </a:pPr>
             <a:r>
-              <a:rPr b="0" lang="pl-PL" sz="2800" spc="-1" strike="noStrike">
-                <a:solidFill>
-                  <a:schemeClr val="dk1"/>
-                </a:solidFill>
-                <a:latin typeface="Calibri"/>
+              <a:rPr b="0" lang="en-US" sz="1800" spc="-1" strike="noStrike">
+                <a:solidFill>
+                  <a:srgbClr val="000000"/>
+                </a:solidFill>
+                <a:latin typeface="Arial"/>
               </a:rPr>
-              <a:t>Kliknij, aby edytować style wzorca tekstu</a:t>
+              <a:t>Click to edit the outline text format</a:t>
             </a:r>
-            <a:endParaRPr b="0" lang="pl-PL" sz="2800" spc="-1" strike="noStrike">
+            <a:endParaRPr b="0" lang="en-US" sz="1800" spc="-1" strike="noStrike">
               <a:solidFill>
-                <a:schemeClr val="dk1"/>
+                <a:srgbClr val="000000"/>
               </a:solidFill>
-              <a:latin typeface="Calibri"/>
+              <a:latin typeface="Arial"/>
             </a:endParaRPr>
           </a:p>
           <a:p>
-            <a:pPr lvl="1" marL="743040" indent="-285840" defTabSz="914400">
-              <a:lnSpc>
-                <a:spcPct val="100000"/>
-              </a:lnSpc>
+            <a:pPr lvl="1" marL="864000" indent="-324000">
               <a:spcBef>
-                <a:spcPts val="479"/>
+                <a:spcPts val="1134"/>
               </a:spcBef>
               <a:buClr>
                 <a:srgbClr val="000000"/>
               </a:buClr>
-              <a:buFont typeface="Arial"/>
-              <a:buChar char="–"/>
+              <a:buSzPct val="75000"/>
+              <a:buFont typeface="Symbol" charset="2"/>
+              <a:buChar char=""/>
             </a:pPr>
             <a:r>
-              <a:rPr b="0" lang="pl-PL" sz="2400" spc="-1" strike="noStrike">
-                <a:solidFill>
-                  <a:schemeClr val="dk1"/>
-                </a:solidFill>
-                <a:latin typeface="Calibri"/>
+              <a:rPr b="0" lang="en-US" sz="1800" spc="-1" strike="noStrike">
+                <a:solidFill>
+                  <a:srgbClr val="000000"/>
+                </a:solidFill>
+                <a:latin typeface="Arial"/>
               </a:rPr>
-              <a:t>Drugi poziom</a:t>
+              <a:t>Second Outline Level</a:t>
             </a:r>
-            <a:endParaRPr b="0" lang="pl-PL" sz="2400" spc="-1" strike="noStrike">
+            <a:endParaRPr b="0" lang="en-US" sz="1800" spc="-1" strike="noStrike">
               <a:solidFill>
-                <a:schemeClr val="dk1"/>
+                <a:srgbClr val="000000"/>
               </a:solidFill>
-              <a:latin typeface="Calibri"/>
+              <a:latin typeface="Arial"/>
             </a:endParaRPr>
           </a:p>
           <a:p>
-            <a:pPr lvl="2" marL="1143000" indent="-228600" defTabSz="914400">
-              <a:lnSpc>
-                <a:spcPct val="100000"/>
-              </a:lnSpc>
+            <a:pPr lvl="2" marL="1296000" indent="-288000">
               <a:spcBef>
-                <a:spcPts val="400"/>
+                <a:spcPts val="850"/>
               </a:spcBef>
               <a:buClr>
                 <a:srgbClr val="000000"/>
               </a:buClr>
-              <a:buFont typeface="Arial"/>
-              <a:buChar char="•"/>
+              <a:buSzPct val="45000"/>
+              <a:buFont typeface="Wingdings" charset="2"/>
+              <a:buChar char=""/>
             </a:pPr>
             <a:r>
-              <a:rPr b="0" lang="pl-PL" sz="2000" spc="-1" strike="noStrike">
-                <a:solidFill>
-                  <a:schemeClr val="dk1"/>
-                </a:solidFill>
-                <a:latin typeface="Calibri"/>
+              <a:rPr b="0" lang="en-US" sz="1800" spc="-1" strike="noStrike">
+                <a:solidFill>
+                  <a:srgbClr val="000000"/>
+                </a:solidFill>
+                <a:latin typeface="Arial"/>
               </a:rPr>
-              <a:t>Trzeci poziom</a:t>
+              <a:t>Third Outline Level</a:t>
             </a:r>
-            <a:endParaRPr b="0" lang="pl-PL" sz="2000" spc="-1" strike="noStrike">
+            <a:endParaRPr b="0" lang="en-US" sz="1800" spc="-1" strike="noStrike">
               <a:solidFill>
-                <a:schemeClr val="dk1"/>
+                <a:srgbClr val="000000"/>
               </a:solidFill>
-              <a:latin typeface="Calibri"/>
+              <a:latin typeface="Arial"/>
             </a:endParaRPr>
           </a:p>
           <a:p>
-            <a:pPr lvl="3" marL="1600200" indent="-228600" defTabSz="914400">
-              <a:lnSpc>
-                <a:spcPct val="100000"/>
-              </a:lnSpc>
+            <a:pPr lvl="3" marL="1728000" indent="-216000">
               <a:spcBef>
-                <a:spcPts val="360"/>
+                <a:spcPts val="567"/>
               </a:spcBef>
               <a:buClr>
                 <a:srgbClr val="000000"/>
               </a:buClr>
-              <a:buFont typeface="Arial"/>
-              <a:buChar char="–"/>
+              <a:buSzPct val="75000"/>
+              <a:buFont typeface="Symbol" charset="2"/>
+              <a:buChar char=""/>
             </a:pPr>
             <a:r>
-              <a:rPr b="0" lang="pl-PL" sz="1800" spc="-1" strike="noStrike">
-                <a:solidFill>
-                  <a:schemeClr val="dk1"/>
-                </a:solidFill>
-                <a:latin typeface="Calibri"/>
+              <a:rPr b="0" lang="en-US" sz="1800" spc="-1" strike="noStrike">
+                <a:solidFill>
+                  <a:srgbClr val="000000"/>
+                </a:solidFill>
+                <a:latin typeface="Arial"/>
               </a:rPr>
-              <a:t>Czwarty poziom</a:t>
+              <a:t>Fourth Outline Level</a:t>
             </a:r>
-            <a:endParaRPr b="0" lang="pl-PL" sz="1800" spc="-1" strike="noStrike">
+            <a:endParaRPr b="0" lang="en-US" sz="1800" spc="-1" strike="noStrike">
               <a:solidFill>
-                <a:schemeClr val="dk1"/>
+                <a:srgbClr val="000000"/>
               </a:solidFill>
-              <a:latin typeface="Calibri"/>
+              <a:latin typeface="Arial"/>
             </a:endParaRPr>
           </a:p>
           <a:p>
-            <a:pPr lvl="4" marL="2057400" indent="-228600" defTabSz="914400">
-              <a:lnSpc>
-                <a:spcPct val="100000"/>
-              </a:lnSpc>
+            <a:pPr lvl="4" marL="2160000" indent="-216000">
               <a:spcBef>
-                <a:spcPts val="360"/>
+                <a:spcPts val="283"/>
               </a:spcBef>
               <a:buClr>
                 <a:srgbClr val="000000"/>
               </a:buClr>
-              <a:buFont typeface="Arial"/>
-              <a:buChar char="»"/>
+              <a:buSzPct val="45000"/>
+              <a:buFont typeface="Wingdings" charset="2"/>
+              <a:buChar char=""/>
             </a:pPr>
             <a:r>
-              <a:rPr b="0" lang="pl-PL" sz="1800" spc="-1" strike="noStrike">
-                <a:solidFill>
-                  <a:schemeClr val="dk1"/>
-                </a:solidFill>
-                <a:latin typeface="Calibri"/>
+              <a:rPr b="0" lang="en-US" sz="1800" spc="-1" strike="noStrike">
+                <a:solidFill>
+                  <a:srgbClr val="000000"/>
+                </a:solidFill>
+                <a:latin typeface="Arial"/>
               </a:rPr>
-              <a:t>Piąty poziom</a:t>
+              <a:t>Fifth Outline Level</a:t>
             </a:r>
-            <a:endParaRPr b="0" lang="pl-PL" sz="1800" spc="-1" strike="noStrike">
+            <a:endParaRPr b="0" lang="en-US" sz="1800" spc="-1" strike="noStrike">
               <a:solidFill>
-                <a:schemeClr val="dk1"/>
+                <a:srgbClr val="000000"/>
               </a:solidFill>
-              <a:latin typeface="Calibri"/>
+              <a:latin typeface="Arial"/>
+            </a:endParaRPr>
+          </a:p>
+          <a:p>
+            <a:pPr lvl="5" marL="2592000" indent="-216000">
+              <a:spcBef>
+                <a:spcPts val="283"/>
+              </a:spcBef>
+              <a:buClr>
+                <a:srgbClr val="000000"/>
+              </a:buClr>
+              <a:buSzPct val="45000"/>
+              <a:buFont typeface="Wingdings" charset="2"/>
+              <a:buChar char=""/>
+            </a:pPr>
+            <a:r>
+              <a:rPr b="0" lang="en-US" sz="1800" spc="-1" strike="noStrike">
+                <a:solidFill>
+                  <a:srgbClr val="000000"/>
+                </a:solidFill>
+                <a:latin typeface="Arial"/>
+              </a:rPr>
+              <a:t>Sixth Outline Level</a:t>
+            </a:r>
+            <a:endParaRPr b="0" lang="en-US" sz="1800" spc="-1" strike="noStrike">
+              <a:solidFill>
+                <a:srgbClr val="000000"/>
+              </a:solidFill>
+              <a:latin typeface="Arial"/>
+            </a:endParaRPr>
+          </a:p>
+          <a:p>
+            <a:pPr lvl="6" marL="3024000" indent="-216000">
+              <a:spcBef>
+                <a:spcPts val="283"/>
+              </a:spcBef>
+              <a:buClr>
+                <a:srgbClr val="000000"/>
+              </a:buClr>
+              <a:buSzPct val="45000"/>
+              <a:buFont typeface="Wingdings" charset="2"/>
+              <a:buChar char=""/>
+            </a:pPr>
+            <a:r>
+              <a:rPr b="0" lang="en-US" sz="1800" spc="-1" strike="noStrike">
+                <a:solidFill>
+                  <a:srgbClr val="000000"/>
+                </a:solidFill>
+                <a:latin typeface="Arial"/>
+              </a:rPr>
+              <a:t>Seventh Outline Level</a:t>
+            </a:r>
+            <a:endParaRPr b="0" lang="en-US" sz="1800" spc="-1" strike="noStrike">
+              <a:solidFill>
+                <a:srgbClr val="000000"/>
+              </a:solidFill>
+              <a:latin typeface="Arial"/>
             </a:endParaRPr>
           </a:p>
         </p:txBody>
       </p:sp>
       <p:sp>
         <p:nvSpPr>
-          <p:cNvPr id="31" name="PlaceHolder 3"/>
+          <p:cNvPr id="25" name="PlaceHolder 3"/>
           <p:cNvSpPr>
             <a:spLocks noGrp="1"/>
           </p:cNvSpPr>
@@ -4870,8 +3811,8 @@
         </p:nvSpPr>
         <p:spPr>
           <a:xfrm>
-            <a:off x="4648320" y="1600200"/>
-            <a:ext cx="4038120" cy="4525560"/>
+            <a:off x="4674240" y="1604520"/>
+            <a:ext cx="4015440" cy="3976920"/>
           </a:xfrm>
           <a:prstGeom prst="rect">
             <a:avLst/>
@@ -4882,245 +3823,221 @@
           </a:ln>
         </p:spPr>
         <p:txBody>
-          <a:bodyPr lIns="91440" rIns="91440" tIns="45720" bIns="45720" anchor="t">
-            <a:noAutofit/>
+          <a:bodyPr lIns="0" rIns="0" tIns="0" bIns="0" anchor="t">
+            <a:normAutofit/>
           </a:bodyPr>
           <a:p>
-            <a:pPr marL="343080" indent="-343080" defTabSz="914400">
-              <a:lnSpc>
-                <a:spcPct val="100000"/>
-              </a:lnSpc>
+            <a:pPr marL="432000" indent="-324000">
               <a:spcBef>
-                <a:spcPts val="561"/>
+                <a:spcPts val="1417"/>
               </a:spcBef>
               <a:buClr>
                 <a:srgbClr val="000000"/>
               </a:buClr>
-              <a:buFont typeface="Arial"/>
-              <a:buChar char="•"/>
+              <a:buSzPct val="45000"/>
+              <a:buFont typeface="Wingdings" charset="2"/>
+              <a:buChar char=""/>
             </a:pPr>
             <a:r>
-              <a:rPr b="0" lang="pl-PL" sz="2800" spc="-1" strike="noStrike">
-                <a:solidFill>
-                  <a:schemeClr val="dk1"/>
-                </a:solidFill>
-                <a:latin typeface="Calibri"/>
+              <a:rPr b="0" lang="en-US" sz="1800" spc="-1" strike="noStrike">
+                <a:solidFill>
+                  <a:srgbClr val="000000"/>
+                </a:solidFill>
+                <a:latin typeface="Arial"/>
               </a:rPr>
-              <a:t>Kliknij, aby edytować style wzorca tekstu</a:t>
+              <a:t>Click to edit the outline text format</a:t>
             </a:r>
-            <a:endParaRPr b="0" lang="pl-PL" sz="2800" spc="-1" strike="noStrike">
+            <a:endParaRPr b="0" lang="en-US" sz="1800" spc="-1" strike="noStrike">
               <a:solidFill>
-                <a:schemeClr val="dk1"/>
+                <a:srgbClr val="000000"/>
               </a:solidFill>
-              <a:latin typeface="Calibri"/>
+              <a:latin typeface="Arial"/>
             </a:endParaRPr>
           </a:p>
           <a:p>
-            <a:pPr lvl="1" marL="743040" indent="-285840" defTabSz="914400">
-              <a:lnSpc>
-                <a:spcPct val="100000"/>
-              </a:lnSpc>
+            <a:pPr lvl="1" marL="864000" indent="-324000">
               <a:spcBef>
-                <a:spcPts val="479"/>
+                <a:spcPts val="1134"/>
               </a:spcBef>
               <a:buClr>
                 <a:srgbClr val="000000"/>
               </a:buClr>
-              <a:buFont typeface="Arial"/>
-              <a:buChar char="–"/>
+              <a:buSzPct val="75000"/>
+              <a:buFont typeface="Symbol" charset="2"/>
+              <a:buChar char=""/>
             </a:pPr>
             <a:r>
-              <a:rPr b="0" lang="pl-PL" sz="2400" spc="-1" strike="noStrike">
-                <a:solidFill>
-                  <a:schemeClr val="dk1"/>
-                </a:solidFill>
-                <a:latin typeface="Calibri"/>
+              <a:rPr b="0" lang="en-US" sz="1800" spc="-1" strike="noStrike">
+                <a:solidFill>
+                  <a:srgbClr val="000000"/>
+                </a:solidFill>
+                <a:latin typeface="Arial"/>
               </a:rPr>
-              <a:t>Drugi poziom</a:t>
+              <a:t>Second Outline Level</a:t>
             </a:r>
-            <a:endParaRPr b="0" lang="pl-PL" sz="2400" spc="-1" strike="noStrike">
+            <a:endParaRPr b="0" lang="en-US" sz="1800" spc="-1" strike="noStrike">
               <a:solidFill>
-                <a:schemeClr val="dk1"/>
+                <a:srgbClr val="000000"/>
               </a:solidFill>
-              <a:latin typeface="Calibri"/>
+              <a:latin typeface="Arial"/>
             </a:endParaRPr>
           </a:p>
           <a:p>
-            <a:pPr lvl="2" marL="1143000" indent="-228600" defTabSz="914400">
-              <a:lnSpc>
-                <a:spcPct val="100000"/>
-              </a:lnSpc>
+            <a:pPr lvl="2" marL="1296000" indent="-288000">
               <a:spcBef>
-                <a:spcPts val="400"/>
+                <a:spcPts val="850"/>
               </a:spcBef>
               <a:buClr>
                 <a:srgbClr val="000000"/>
               </a:buClr>
-              <a:buFont typeface="Arial"/>
-              <a:buChar char="•"/>
+              <a:buSzPct val="45000"/>
+              <a:buFont typeface="Wingdings" charset="2"/>
+              <a:buChar char=""/>
             </a:pPr>
             <a:r>
-              <a:rPr b="0" lang="pl-PL" sz="2000" spc="-1" strike="noStrike">
-                <a:solidFill>
-                  <a:schemeClr val="dk1"/>
-                </a:solidFill>
-                <a:latin typeface="Calibri"/>
+              <a:rPr b="0" lang="en-US" sz="1800" spc="-1" strike="noStrike">
+                <a:solidFill>
+                  <a:srgbClr val="000000"/>
+                </a:solidFill>
+                <a:latin typeface="Arial"/>
               </a:rPr>
-              <a:t>Trzeci poziom</a:t>
+              <a:t>Third Outline Level</a:t>
             </a:r>
-            <a:endParaRPr b="0" lang="pl-PL" sz="2000" spc="-1" strike="noStrike">
+            <a:endParaRPr b="0" lang="en-US" sz="1800" spc="-1" strike="noStrike">
               <a:solidFill>
-                <a:schemeClr val="dk1"/>
+                <a:srgbClr val="000000"/>
               </a:solidFill>
-              <a:latin typeface="Calibri"/>
+              <a:latin typeface="Arial"/>
             </a:endParaRPr>
           </a:p>
           <a:p>
-            <a:pPr lvl="3" marL="1600200" indent="-228600" defTabSz="914400">
-              <a:lnSpc>
-                <a:spcPct val="100000"/>
-              </a:lnSpc>
+            <a:pPr lvl="3" marL="1728000" indent="-216000">
               <a:spcBef>
-                <a:spcPts val="360"/>
+                <a:spcPts val="567"/>
               </a:spcBef>
               <a:buClr>
                 <a:srgbClr val="000000"/>
               </a:buClr>
-              <a:buFont typeface="Arial"/>
-              <a:buChar char="–"/>
+              <a:buSzPct val="75000"/>
+              <a:buFont typeface="Symbol" charset="2"/>
+              <a:buChar char=""/>
             </a:pPr>
             <a:r>
-              <a:rPr b="0" lang="pl-PL" sz="1800" spc="-1" strike="noStrike">
-                <a:solidFill>
-                  <a:schemeClr val="dk1"/>
-                </a:solidFill>
-                <a:latin typeface="Calibri"/>
+              <a:rPr b="0" lang="en-US" sz="1800" spc="-1" strike="noStrike">
+                <a:solidFill>
+                  <a:srgbClr val="000000"/>
+                </a:solidFill>
+                <a:latin typeface="Arial"/>
               </a:rPr>
-              <a:t>Czwarty poziom</a:t>
+              <a:t>Fourth Outline Level</a:t>
             </a:r>
-            <a:endParaRPr b="0" lang="pl-PL" sz="1800" spc="-1" strike="noStrike">
+            <a:endParaRPr b="0" lang="en-US" sz="1800" spc="-1" strike="noStrike">
               <a:solidFill>
-                <a:schemeClr val="dk1"/>
+                <a:srgbClr val="000000"/>
               </a:solidFill>
-              <a:latin typeface="Calibri"/>
+              <a:latin typeface="Arial"/>
             </a:endParaRPr>
           </a:p>
           <a:p>
-            <a:pPr lvl="4" marL="2057400" indent="-228600" defTabSz="914400">
-              <a:lnSpc>
-                <a:spcPct val="100000"/>
-              </a:lnSpc>
+            <a:pPr lvl="4" marL="2160000" indent="-216000">
               <a:spcBef>
-                <a:spcPts val="360"/>
+                <a:spcPts val="283"/>
               </a:spcBef>
               <a:buClr>
                 <a:srgbClr val="000000"/>
               </a:buClr>
-              <a:buFont typeface="Arial"/>
-              <a:buChar char="»"/>
+              <a:buSzPct val="45000"/>
+              <a:buFont typeface="Wingdings" charset="2"/>
+              <a:buChar char=""/>
             </a:pPr>
             <a:r>
-              <a:rPr b="0" lang="pl-PL" sz="1800" spc="-1" strike="noStrike">
-                <a:solidFill>
-                  <a:schemeClr val="dk1"/>
-                </a:solidFill>
-                <a:latin typeface="Calibri"/>
+              <a:rPr b="0" lang="en-US" sz="1800" spc="-1" strike="noStrike">
+                <a:solidFill>
+                  <a:srgbClr val="000000"/>
+                </a:solidFill>
+                <a:latin typeface="Arial"/>
               </a:rPr>
-              <a:t>Piąty poziom</a:t>
+              <a:t>Fifth Outline Level</a:t>
             </a:r>
-            <a:endParaRPr b="0" lang="pl-PL" sz="1800" spc="-1" strike="noStrike">
+            <a:endParaRPr b="0" lang="en-US" sz="1800" spc="-1" strike="noStrike">
               <a:solidFill>
-                <a:schemeClr val="dk1"/>
+                <a:srgbClr val="000000"/>
               </a:solidFill>
-              <a:latin typeface="Calibri"/>
+              <a:latin typeface="Arial"/>
+            </a:endParaRPr>
+          </a:p>
+          <a:p>
+            <a:pPr lvl="5" marL="2592000" indent="-216000">
+              <a:spcBef>
+                <a:spcPts val="283"/>
+              </a:spcBef>
+              <a:buClr>
+                <a:srgbClr val="000000"/>
+              </a:buClr>
+              <a:buSzPct val="45000"/>
+              <a:buFont typeface="Wingdings" charset="2"/>
+              <a:buChar char=""/>
+            </a:pPr>
+            <a:r>
+              <a:rPr b="0" lang="en-US" sz="1800" spc="-1" strike="noStrike">
+                <a:solidFill>
+                  <a:srgbClr val="000000"/>
+                </a:solidFill>
+                <a:latin typeface="Arial"/>
+              </a:rPr>
+              <a:t>Sixth Outline Level</a:t>
+            </a:r>
+            <a:endParaRPr b="0" lang="en-US" sz="1800" spc="-1" strike="noStrike">
+              <a:solidFill>
+                <a:srgbClr val="000000"/>
+              </a:solidFill>
+              <a:latin typeface="Arial"/>
+            </a:endParaRPr>
+          </a:p>
+          <a:p>
+            <a:pPr lvl="6" marL="3024000" indent="-216000">
+              <a:spcBef>
+                <a:spcPts val="283"/>
+              </a:spcBef>
+              <a:buClr>
+                <a:srgbClr val="000000"/>
+              </a:buClr>
+              <a:buSzPct val="45000"/>
+              <a:buFont typeface="Wingdings" charset="2"/>
+              <a:buChar char=""/>
+            </a:pPr>
+            <a:r>
+              <a:rPr b="0" lang="en-US" sz="1800" spc="-1" strike="noStrike">
+                <a:solidFill>
+                  <a:srgbClr val="000000"/>
+                </a:solidFill>
+                <a:latin typeface="Arial"/>
+              </a:rPr>
+              <a:t>Seventh Outline Level</a:t>
+            </a:r>
+            <a:endParaRPr b="0" lang="en-US" sz="1800" spc="-1" strike="noStrike">
+              <a:solidFill>
+                <a:srgbClr val="000000"/>
+              </a:solidFill>
+              <a:latin typeface="Arial"/>
             </a:endParaRPr>
           </a:p>
         </p:txBody>
       </p:sp>
       <p:sp>
         <p:nvSpPr>
-          <p:cNvPr id="32" name="PlaceHolder 4"/>
+          <p:cNvPr id="26" name="PlaceHolder 4"/>
           <p:cNvSpPr>
             <a:spLocks noGrp="1"/>
           </p:cNvSpPr>
           <p:nvPr>
-            <p:ph type="dt" idx="16"/>
-          </p:nvPr>
-        </p:nvSpPr>
-        <p:spPr>
-          <a:xfrm>
-            <a:off x="457200" y="6356520"/>
-            <a:ext cx="2133360" cy="364680"/>
-          </a:xfrm>
-          <a:prstGeom prst="rect">
-            <a:avLst/>
-          </a:prstGeom>
-          <a:noFill/>
-          <a:ln w="0">
-            <a:noFill/>
-          </a:ln>
-        </p:spPr>
-        <p:txBody>
-          <a:bodyPr lIns="91440" rIns="91440" tIns="45720" bIns="45720" anchor="ctr">
-            <a:noAutofit/>
-          </a:bodyPr>
-          <a:lstStyle>
-            <a:lvl1pPr indent="0" defTabSz="914400">
-              <a:lnSpc>
-                <a:spcPct val="100000"/>
-              </a:lnSpc>
-              <a:buNone/>
-              <a:defRPr b="0" lang="pl-PL" sz="1200" spc="-1" strike="noStrike">
-                <a:solidFill>
-                  <a:schemeClr val="dk1">
-                    <a:tint val="75000"/>
-                  </a:schemeClr>
-                </a:solidFill>
-                <a:latin typeface="Calibri"/>
-              </a:defRPr>
-            </a:lvl1pPr>
-          </a:lstStyle>
-          <a:p>
-            <a:pPr indent="0" defTabSz="914400">
-              <a:lnSpc>
-                <a:spcPct val="100000"/>
-              </a:lnSpc>
-              <a:buNone/>
-            </a:pPr>
-            <a:r>
-              <a:rPr b="0" lang="pl-PL" sz="1200" spc="-1" strike="noStrike">
-                <a:solidFill>
-                  <a:schemeClr val="dk1">
-                    <a:tint val="75000"/>
-                  </a:schemeClr>
-                </a:solidFill>
-                <a:latin typeface="Calibri"/>
-              </a:rPr>
-              <a:t>&lt;date/time&gt;</a:t>
-            </a:r>
-            <a:endParaRPr b="0" lang="en-US" sz="1200" spc="-1" strike="noStrike">
-              <a:solidFill>
-                <a:srgbClr val="000000"/>
-              </a:solidFill>
-              <a:latin typeface="Times New Roman"/>
-            </a:endParaRPr>
-          </a:p>
-        </p:txBody>
-      </p:sp>
-      <p:sp>
-        <p:nvSpPr>
-          <p:cNvPr id="33" name="PlaceHolder 5"/>
-          <p:cNvSpPr>
-            <a:spLocks noGrp="1"/>
-          </p:cNvSpPr>
-          <p:nvPr>
-            <p:ph type="ftr" idx="17"/>
+            <p:ph type="ftr" idx="16"/>
           </p:nvPr>
         </p:nvSpPr>
         <p:spPr>
           <a:xfrm>
             <a:off x="3124080" y="6356520"/>
-            <a:ext cx="2895120" cy="364680"/>
+            <a:ext cx="2894760" cy="364320"/>
           </a:xfrm>
           <a:prstGeom prst="rect">
             <a:avLst/>
@@ -5136,7 +4053,13 @@
           </a:bodyPr>
           <a:lstStyle>
             <a:lvl1pPr indent="0" algn="ctr">
+              <a:lnSpc>
+                <a:spcPct val="100000"/>
+              </a:lnSpc>
               <a:buNone/>
+              <a:tabLst>
+                <a:tab algn="l" pos="0"/>
+              </a:tabLst>
               <a:defRPr b="0" lang="en-US" sz="1400" spc="-1" strike="noStrike">
                 <a:solidFill>
                   <a:srgbClr val="000000"/>
@@ -5147,7 +4070,13 @@
           </a:lstStyle>
           <a:p>
             <a:pPr indent="0" algn="ctr">
+              <a:lnSpc>
+                <a:spcPct val="100000"/>
+              </a:lnSpc>
               <a:buNone/>
+              <a:tabLst>
+                <a:tab algn="l" pos="0"/>
+              </a:tabLst>
             </a:pPr>
             <a:r>
               <a:rPr b="0" lang="en-US" sz="1400" spc="-1" strike="noStrike">
@@ -5169,18 +4098,18 @@
       </p:sp>
       <p:sp>
         <p:nvSpPr>
-          <p:cNvPr id="34" name="PlaceHolder 6"/>
+          <p:cNvPr id="27" name="PlaceHolder 5"/>
           <p:cNvSpPr>
             <a:spLocks noGrp="1"/>
           </p:cNvSpPr>
           <p:nvPr>
-            <p:ph type="sldNum" idx="18"/>
+            <p:ph type="sldNum" idx="17"/>
           </p:nvPr>
         </p:nvSpPr>
         <p:spPr>
           <a:xfrm>
             <a:off x="6553080" y="6356520"/>
-            <a:ext cx="2133360" cy="364680"/>
+            <a:ext cx="2133000" cy="364320"/>
           </a:xfrm>
           <a:prstGeom prst="rect">
             <a:avLst/>
@@ -5200,6 +4129,9 @@
                 <a:spcPct val="100000"/>
               </a:lnSpc>
               <a:buNone/>
+              <a:tabLst>
+                <a:tab algn="l" pos="0"/>
+              </a:tabLst>
               <a:defRPr b="0" lang="pl-PL" sz="1200" spc="-1" strike="noStrike">
                 <a:solidFill>
                   <a:schemeClr val="dk1">
@@ -5216,8 +4148,11 @@
                 <a:spcPct val="100000"/>
               </a:lnSpc>
               <a:buNone/>
+              <a:tabLst>
+                <a:tab algn="l" pos="0"/>
+              </a:tabLst>
             </a:pPr>
-            <a:fld id="{AEAC7D64-A9A5-4AE0-89F3-35082279AF01}" type="slidenum">
+            <a:fld id="{11ED29ED-E277-4C65-B605-80766581EE1D}" type="slidenum">
               <a:rPr b="0" lang="pl-PL" sz="1200" spc="-1" strike="noStrike">
                 <a:solidFill>
                   <a:schemeClr val="dk1">
@@ -5229,6 +4164,66 @@
               <a:t>&lt;number&gt;</a:t>
             </a:fld>
             <a:endParaRPr b="0" lang="en-US" sz="1200" spc="-1" strike="noStrike">
+              <a:solidFill>
+                <a:srgbClr val="000000"/>
+              </a:solidFill>
+              <a:latin typeface="Times New Roman"/>
+            </a:endParaRPr>
+          </a:p>
+        </p:txBody>
+      </p:sp>
+      <p:sp>
+        <p:nvSpPr>
+          <p:cNvPr id="28" name="PlaceHolder 6"/>
+          <p:cNvSpPr>
+            <a:spLocks noGrp="1"/>
+          </p:cNvSpPr>
+          <p:nvPr>
+            <p:ph type="dt" idx="18"/>
+          </p:nvPr>
+        </p:nvSpPr>
+        <p:spPr>
+          <a:xfrm>
+            <a:off x="457200" y="6356520"/>
+            <a:ext cx="2133000" cy="364320"/>
+          </a:xfrm>
+          <a:prstGeom prst="rect">
+            <a:avLst/>
+          </a:prstGeom>
+          <a:noFill/>
+          <a:ln w="0">
+            <a:noFill/>
+          </a:ln>
+        </p:spPr>
+        <p:txBody>
+          <a:bodyPr lIns="91440" rIns="91440" tIns="45720" bIns="45720" anchor="ctr">
+            <a:noAutofit/>
+          </a:bodyPr>
+          <a:lstStyle>
+            <a:lvl1pPr indent="0">
+              <a:buNone/>
+              <a:defRPr b="0" lang="en-US" sz="1400" spc="-1" strike="noStrike">
+                <a:solidFill>
+                  <a:srgbClr val="000000"/>
+                </a:solidFill>
+                <a:latin typeface="Times New Roman"/>
+              </a:defRPr>
+            </a:lvl1pPr>
+          </a:lstStyle>
+          <a:p>
+            <a:pPr indent="0">
+              <a:buNone/>
+            </a:pPr>
+            <a:r>
+              <a:rPr b="0" lang="en-US" sz="1400" spc="-1" strike="noStrike">
+                <a:solidFill>
+                  <a:srgbClr val="000000"/>
+                </a:solidFill>
+                <a:latin typeface="Times New Roman"/>
+              </a:rPr>
+              <a:t>&lt;date/time&gt;</a:t>
+            </a:r>
+            <a:endParaRPr b="0" lang="en-US" sz="1400" spc="-1" strike="noStrike">
               <a:solidFill>
                 <a:srgbClr val="000000"/>
               </a:solidFill>
@@ -5272,614 +4267,18 @@
       </p:grpSpPr>
       <p:sp>
         <p:nvSpPr>
-          <p:cNvPr id="38" name="PlaceHolder 1"/>
+          <p:cNvPr id="32" name="PlaceHolder 1"/>
           <p:cNvSpPr>
             <a:spLocks noGrp="1"/>
           </p:cNvSpPr>
           <p:nvPr>
-            <p:ph type="title"/>
-          </p:nvPr>
-        </p:nvSpPr>
-        <p:spPr>
-          <a:xfrm>
-            <a:off x="457200" y="274680"/>
-            <a:ext cx="8229240" cy="1142640"/>
-          </a:xfrm>
-          <a:prstGeom prst="rect">
-            <a:avLst/>
-          </a:prstGeom>
-          <a:noFill/>
-          <a:ln w="0">
-            <a:noFill/>
-          </a:ln>
-        </p:spPr>
-        <p:txBody>
-          <a:bodyPr lIns="91440" rIns="91440" tIns="45720" bIns="45720" anchor="ctr">
-            <a:noAutofit/>
-          </a:bodyPr>
-          <a:p>
-            <a:pPr indent="0" algn="ctr" defTabSz="914400">
-              <a:lnSpc>
-                <a:spcPct val="100000"/>
-              </a:lnSpc>
-              <a:buNone/>
-            </a:pPr>
-            <a:r>
-              <a:rPr b="0" lang="pl-PL" sz="4400" spc="-1" strike="noStrike">
-                <a:solidFill>
-                  <a:schemeClr val="dk1"/>
-                </a:solidFill>
-                <a:latin typeface="Calibri"/>
-              </a:rPr>
-              <a:t>Kliknij, aby edytować styl</a:t>
-            </a:r>
-            <a:endParaRPr b="0" lang="pl-PL" sz="4400" spc="-1" strike="noStrike">
-              <a:solidFill>
-                <a:schemeClr val="dk1"/>
-              </a:solidFill>
-              <a:latin typeface="Calibri"/>
-            </a:endParaRPr>
-          </a:p>
-        </p:txBody>
-      </p:sp>
-      <p:sp>
-        <p:nvSpPr>
-          <p:cNvPr id="39" name="PlaceHolder 2"/>
-          <p:cNvSpPr>
-            <a:spLocks noGrp="1"/>
-          </p:cNvSpPr>
-          <p:nvPr>
-            <p:ph type="body"/>
-          </p:nvPr>
-        </p:nvSpPr>
-        <p:spPr>
-          <a:xfrm>
-            <a:off x="457200" y="1535040"/>
-            <a:ext cx="4039920" cy="639360"/>
-          </a:xfrm>
-          <a:prstGeom prst="rect">
-            <a:avLst/>
-          </a:prstGeom>
-          <a:noFill/>
-          <a:ln w="0">
-            <a:noFill/>
-          </a:ln>
-        </p:spPr>
-        <p:txBody>
-          <a:bodyPr lIns="91440" rIns="91440" tIns="45720" bIns="45720" anchor="b">
-            <a:noAutofit/>
-          </a:bodyPr>
-          <a:p>
-            <a:pPr indent="0" defTabSz="914400">
-              <a:lnSpc>
-                <a:spcPct val="100000"/>
-              </a:lnSpc>
-              <a:spcBef>
-                <a:spcPts val="479"/>
-              </a:spcBef>
-              <a:buNone/>
-              <a:tabLst>
-                <a:tab algn="l" pos="0"/>
-              </a:tabLst>
-            </a:pPr>
-            <a:r>
-              <a:rPr b="1" lang="pl-PL" sz="2400" spc="-1" strike="noStrike">
-                <a:solidFill>
-                  <a:schemeClr val="dk1"/>
-                </a:solidFill>
-                <a:latin typeface="Calibri"/>
-              </a:rPr>
-              <a:t>Kliknij, aby edytować style wzorca tekstu</a:t>
-            </a:r>
-            <a:endParaRPr b="0" lang="pl-PL" sz="2400" spc="-1" strike="noStrike">
-              <a:solidFill>
-                <a:schemeClr val="dk1"/>
-              </a:solidFill>
-              <a:latin typeface="Calibri"/>
-            </a:endParaRPr>
-          </a:p>
-        </p:txBody>
-      </p:sp>
-      <p:sp>
-        <p:nvSpPr>
-          <p:cNvPr id="40" name="PlaceHolder 3"/>
-          <p:cNvSpPr>
-            <a:spLocks noGrp="1"/>
-          </p:cNvSpPr>
-          <p:nvPr>
-            <p:ph type="body"/>
-          </p:nvPr>
-        </p:nvSpPr>
-        <p:spPr>
-          <a:xfrm>
-            <a:off x="457200" y="2174760"/>
-            <a:ext cx="4039920" cy="3951000"/>
-          </a:xfrm>
-          <a:prstGeom prst="rect">
-            <a:avLst/>
-          </a:prstGeom>
-          <a:noFill/>
-          <a:ln w="0">
-            <a:noFill/>
-          </a:ln>
-        </p:spPr>
-        <p:txBody>
-          <a:bodyPr lIns="91440" rIns="91440" tIns="45720" bIns="45720" anchor="t">
-            <a:noAutofit/>
-          </a:bodyPr>
-          <a:p>
-            <a:pPr marL="343080" indent="-343080" defTabSz="914400">
-              <a:lnSpc>
-                <a:spcPct val="100000"/>
-              </a:lnSpc>
-              <a:spcBef>
-                <a:spcPts val="479"/>
-              </a:spcBef>
-              <a:buClr>
-                <a:srgbClr val="000000"/>
-              </a:buClr>
-              <a:buFont typeface="Arial"/>
-              <a:buChar char="•"/>
-            </a:pPr>
-            <a:r>
-              <a:rPr b="0" lang="pl-PL" sz="2400" spc="-1" strike="noStrike">
-                <a:solidFill>
-                  <a:schemeClr val="dk1"/>
-                </a:solidFill>
-                <a:latin typeface="Calibri"/>
-              </a:rPr>
-              <a:t>Kliknij, aby edytować style wzorca tekstu</a:t>
-            </a:r>
-            <a:endParaRPr b="0" lang="pl-PL" sz="2400" spc="-1" strike="noStrike">
-              <a:solidFill>
-                <a:schemeClr val="dk1"/>
-              </a:solidFill>
-              <a:latin typeface="Calibri"/>
-            </a:endParaRPr>
-          </a:p>
-          <a:p>
-            <a:pPr lvl="1" marL="743040" indent="-285840" defTabSz="914400">
-              <a:lnSpc>
-                <a:spcPct val="100000"/>
-              </a:lnSpc>
-              <a:spcBef>
-                <a:spcPts val="400"/>
-              </a:spcBef>
-              <a:buClr>
-                <a:srgbClr val="000000"/>
-              </a:buClr>
-              <a:buFont typeface="Arial"/>
-              <a:buChar char="–"/>
-            </a:pPr>
-            <a:r>
-              <a:rPr b="0" lang="pl-PL" sz="2000" spc="-1" strike="noStrike">
-                <a:solidFill>
-                  <a:schemeClr val="dk1"/>
-                </a:solidFill>
-                <a:latin typeface="Calibri"/>
-              </a:rPr>
-              <a:t>Drugi poziom</a:t>
-            </a:r>
-            <a:endParaRPr b="0" lang="pl-PL" sz="2000" spc="-1" strike="noStrike">
-              <a:solidFill>
-                <a:schemeClr val="dk1"/>
-              </a:solidFill>
-              <a:latin typeface="Calibri"/>
-            </a:endParaRPr>
-          </a:p>
-          <a:p>
-            <a:pPr lvl="2" marL="1143000" indent="-228600" defTabSz="914400">
-              <a:lnSpc>
-                <a:spcPct val="100000"/>
-              </a:lnSpc>
-              <a:spcBef>
-                <a:spcPts val="360"/>
-              </a:spcBef>
-              <a:buClr>
-                <a:srgbClr val="000000"/>
-              </a:buClr>
-              <a:buFont typeface="Arial"/>
-              <a:buChar char="•"/>
-            </a:pPr>
-            <a:r>
-              <a:rPr b="0" lang="pl-PL" sz="1800" spc="-1" strike="noStrike">
-                <a:solidFill>
-                  <a:schemeClr val="dk1"/>
-                </a:solidFill>
-                <a:latin typeface="Calibri"/>
-              </a:rPr>
-              <a:t>Trzeci poziom</a:t>
-            </a:r>
-            <a:endParaRPr b="0" lang="pl-PL" sz="1800" spc="-1" strike="noStrike">
-              <a:solidFill>
-                <a:schemeClr val="dk1"/>
-              </a:solidFill>
-              <a:latin typeface="Calibri"/>
-            </a:endParaRPr>
-          </a:p>
-          <a:p>
-            <a:pPr lvl="3" marL="1600200" indent="-228600" defTabSz="914400">
-              <a:lnSpc>
-                <a:spcPct val="100000"/>
-              </a:lnSpc>
-              <a:spcBef>
-                <a:spcPts val="320"/>
-              </a:spcBef>
-              <a:buClr>
-                <a:srgbClr val="000000"/>
-              </a:buClr>
-              <a:buFont typeface="Arial"/>
-              <a:buChar char="–"/>
-            </a:pPr>
-            <a:r>
-              <a:rPr b="0" lang="pl-PL" sz="1600" spc="-1" strike="noStrike">
-                <a:solidFill>
-                  <a:schemeClr val="dk1"/>
-                </a:solidFill>
-                <a:latin typeface="Calibri"/>
-              </a:rPr>
-              <a:t>Czwarty poziom</a:t>
-            </a:r>
-            <a:endParaRPr b="0" lang="pl-PL" sz="1600" spc="-1" strike="noStrike">
-              <a:solidFill>
-                <a:schemeClr val="dk1"/>
-              </a:solidFill>
-              <a:latin typeface="Calibri"/>
-            </a:endParaRPr>
-          </a:p>
-          <a:p>
-            <a:pPr lvl="4" marL="2057400" indent="-228600" defTabSz="914400">
-              <a:lnSpc>
-                <a:spcPct val="100000"/>
-              </a:lnSpc>
-              <a:spcBef>
-                <a:spcPts val="320"/>
-              </a:spcBef>
-              <a:buClr>
-                <a:srgbClr val="000000"/>
-              </a:buClr>
-              <a:buFont typeface="Arial"/>
-              <a:buChar char="»"/>
-            </a:pPr>
-            <a:r>
-              <a:rPr b="0" lang="pl-PL" sz="1600" spc="-1" strike="noStrike">
-                <a:solidFill>
-                  <a:schemeClr val="dk1"/>
-                </a:solidFill>
-                <a:latin typeface="Calibri"/>
-              </a:rPr>
-              <a:t>Piąty poziom</a:t>
-            </a:r>
-            <a:endParaRPr b="0" lang="pl-PL" sz="1600" spc="-1" strike="noStrike">
-              <a:solidFill>
-                <a:schemeClr val="dk1"/>
-              </a:solidFill>
-              <a:latin typeface="Calibri"/>
-            </a:endParaRPr>
-          </a:p>
-        </p:txBody>
-      </p:sp>
-      <p:sp>
-        <p:nvSpPr>
-          <p:cNvPr id="41" name="PlaceHolder 4"/>
-          <p:cNvSpPr>
-            <a:spLocks noGrp="1"/>
-          </p:cNvSpPr>
-          <p:nvPr>
-            <p:ph type="body"/>
-          </p:nvPr>
-        </p:nvSpPr>
-        <p:spPr>
-          <a:xfrm>
-            <a:off x="4645080" y="1535040"/>
-            <a:ext cx="4041360" cy="639360"/>
-          </a:xfrm>
-          <a:prstGeom prst="rect">
-            <a:avLst/>
-          </a:prstGeom>
-          <a:noFill/>
-          <a:ln w="0">
-            <a:noFill/>
-          </a:ln>
-        </p:spPr>
-        <p:txBody>
-          <a:bodyPr lIns="91440" rIns="91440" tIns="45720" bIns="45720" anchor="b">
-            <a:noAutofit/>
-          </a:bodyPr>
-          <a:p>
-            <a:pPr indent="0" defTabSz="914400">
-              <a:lnSpc>
-                <a:spcPct val="100000"/>
-              </a:lnSpc>
-              <a:spcBef>
-                <a:spcPts val="479"/>
-              </a:spcBef>
-              <a:buNone/>
-              <a:tabLst>
-                <a:tab algn="l" pos="0"/>
-              </a:tabLst>
-            </a:pPr>
-            <a:r>
-              <a:rPr b="1" lang="pl-PL" sz="2400" spc="-1" strike="noStrike">
-                <a:solidFill>
-                  <a:schemeClr val="dk1"/>
-                </a:solidFill>
-                <a:latin typeface="Calibri"/>
-              </a:rPr>
-              <a:t>Kliknij, aby edytować style wzorca tekstu</a:t>
-            </a:r>
-            <a:endParaRPr b="0" lang="pl-PL" sz="2400" spc="-1" strike="noStrike">
-              <a:solidFill>
-                <a:schemeClr val="dk1"/>
-              </a:solidFill>
-              <a:latin typeface="Calibri"/>
-            </a:endParaRPr>
-          </a:p>
-        </p:txBody>
-      </p:sp>
-      <p:sp>
-        <p:nvSpPr>
-          <p:cNvPr id="42" name="PlaceHolder 5"/>
-          <p:cNvSpPr>
-            <a:spLocks noGrp="1"/>
-          </p:cNvSpPr>
-          <p:nvPr>
-            <p:ph type="body"/>
-          </p:nvPr>
-        </p:nvSpPr>
-        <p:spPr>
-          <a:xfrm>
-            <a:off x="4645080" y="2174760"/>
-            <a:ext cx="4041360" cy="3951000"/>
-          </a:xfrm>
-          <a:prstGeom prst="rect">
-            <a:avLst/>
-          </a:prstGeom>
-          <a:noFill/>
-          <a:ln w="0">
-            <a:noFill/>
-          </a:ln>
-        </p:spPr>
-        <p:txBody>
-          <a:bodyPr lIns="91440" rIns="91440" tIns="45720" bIns="45720" anchor="t">
-            <a:noAutofit/>
-          </a:bodyPr>
-          <a:p>
-            <a:pPr marL="343080" indent="-343080" defTabSz="914400">
-              <a:lnSpc>
-                <a:spcPct val="100000"/>
-              </a:lnSpc>
-              <a:spcBef>
-                <a:spcPts val="479"/>
-              </a:spcBef>
-              <a:buClr>
-                <a:srgbClr val="000000"/>
-              </a:buClr>
-              <a:buFont typeface="Arial"/>
-              <a:buChar char="•"/>
-            </a:pPr>
-            <a:r>
-              <a:rPr b="0" lang="pl-PL" sz="2400" spc="-1" strike="noStrike">
-                <a:solidFill>
-                  <a:schemeClr val="dk1"/>
-                </a:solidFill>
-                <a:latin typeface="Calibri"/>
-              </a:rPr>
-              <a:t>Kliknij, aby edytować style wzorca tekstu</a:t>
-            </a:r>
-            <a:endParaRPr b="0" lang="pl-PL" sz="2400" spc="-1" strike="noStrike">
-              <a:solidFill>
-                <a:schemeClr val="dk1"/>
-              </a:solidFill>
-              <a:latin typeface="Calibri"/>
-            </a:endParaRPr>
-          </a:p>
-          <a:p>
-            <a:pPr lvl="1" marL="743040" indent="-285840" defTabSz="914400">
-              <a:lnSpc>
-                <a:spcPct val="100000"/>
-              </a:lnSpc>
-              <a:spcBef>
-                <a:spcPts val="400"/>
-              </a:spcBef>
-              <a:buClr>
-                <a:srgbClr val="000000"/>
-              </a:buClr>
-              <a:buFont typeface="Arial"/>
-              <a:buChar char="–"/>
-            </a:pPr>
-            <a:r>
-              <a:rPr b="0" lang="pl-PL" sz="2000" spc="-1" strike="noStrike">
-                <a:solidFill>
-                  <a:schemeClr val="dk1"/>
-                </a:solidFill>
-                <a:latin typeface="Calibri"/>
-              </a:rPr>
-              <a:t>Drugi poziom</a:t>
-            </a:r>
-            <a:endParaRPr b="0" lang="pl-PL" sz="2000" spc="-1" strike="noStrike">
-              <a:solidFill>
-                <a:schemeClr val="dk1"/>
-              </a:solidFill>
-              <a:latin typeface="Calibri"/>
-            </a:endParaRPr>
-          </a:p>
-          <a:p>
-            <a:pPr lvl="2" marL="1143000" indent="-228600" defTabSz="914400">
-              <a:lnSpc>
-                <a:spcPct val="100000"/>
-              </a:lnSpc>
-              <a:spcBef>
-                <a:spcPts val="360"/>
-              </a:spcBef>
-              <a:buClr>
-                <a:srgbClr val="000000"/>
-              </a:buClr>
-              <a:buFont typeface="Arial"/>
-              <a:buChar char="•"/>
-            </a:pPr>
-            <a:r>
-              <a:rPr b="0" lang="pl-PL" sz="1800" spc="-1" strike="noStrike">
-                <a:solidFill>
-                  <a:schemeClr val="dk1"/>
-                </a:solidFill>
-                <a:latin typeface="Calibri"/>
-              </a:rPr>
-              <a:t>Trzeci poziom</a:t>
-            </a:r>
-            <a:endParaRPr b="0" lang="pl-PL" sz="1800" spc="-1" strike="noStrike">
-              <a:solidFill>
-                <a:schemeClr val="dk1"/>
-              </a:solidFill>
-              <a:latin typeface="Calibri"/>
-            </a:endParaRPr>
-          </a:p>
-          <a:p>
-            <a:pPr lvl="3" marL="1600200" indent="-228600" defTabSz="914400">
-              <a:lnSpc>
-                <a:spcPct val="100000"/>
-              </a:lnSpc>
-              <a:spcBef>
-                <a:spcPts val="320"/>
-              </a:spcBef>
-              <a:buClr>
-                <a:srgbClr val="000000"/>
-              </a:buClr>
-              <a:buFont typeface="Arial"/>
-              <a:buChar char="–"/>
-            </a:pPr>
-            <a:r>
-              <a:rPr b="0" lang="pl-PL" sz="1600" spc="-1" strike="noStrike">
-                <a:solidFill>
-                  <a:schemeClr val="dk1"/>
-                </a:solidFill>
-                <a:latin typeface="Calibri"/>
-              </a:rPr>
-              <a:t>Czwarty poziom</a:t>
-            </a:r>
-            <a:endParaRPr b="0" lang="pl-PL" sz="1600" spc="-1" strike="noStrike">
-              <a:solidFill>
-                <a:schemeClr val="dk1"/>
-              </a:solidFill>
-              <a:latin typeface="Calibri"/>
-            </a:endParaRPr>
-          </a:p>
-          <a:p>
-            <a:pPr lvl="4" marL="2057400" indent="-228600" defTabSz="914400">
-              <a:lnSpc>
-                <a:spcPct val="100000"/>
-              </a:lnSpc>
-              <a:spcBef>
-                <a:spcPts val="320"/>
-              </a:spcBef>
-              <a:buClr>
-                <a:srgbClr val="000000"/>
-              </a:buClr>
-              <a:buFont typeface="Arial"/>
-              <a:buChar char="»"/>
-            </a:pPr>
-            <a:r>
-              <a:rPr b="0" lang="pl-PL" sz="1600" spc="-1" strike="noStrike">
-                <a:solidFill>
-                  <a:schemeClr val="dk1"/>
-                </a:solidFill>
-                <a:latin typeface="Calibri"/>
-              </a:rPr>
-              <a:t>Piąty poziom</a:t>
-            </a:r>
-            <a:endParaRPr b="0" lang="pl-PL" sz="1600" spc="-1" strike="noStrike">
-              <a:solidFill>
-                <a:schemeClr val="dk1"/>
-              </a:solidFill>
-              <a:latin typeface="Calibri"/>
-            </a:endParaRPr>
-          </a:p>
-        </p:txBody>
-      </p:sp>
-      <p:sp>
-        <p:nvSpPr>
-          <p:cNvPr id="43" name="PlaceHolder 6"/>
-          <p:cNvSpPr>
-            <a:spLocks noGrp="1"/>
-          </p:cNvSpPr>
-          <p:nvPr>
-            <p:ph type="dt" idx="19"/>
-          </p:nvPr>
-        </p:nvSpPr>
-        <p:spPr>
-          <a:xfrm>
-            <a:off x="457200" y="6356520"/>
-            <a:ext cx="2133360" cy="364680"/>
-          </a:xfrm>
-          <a:prstGeom prst="rect">
-            <a:avLst/>
-          </a:prstGeom>
-          <a:noFill/>
-          <a:ln w="0">
-            <a:noFill/>
-          </a:ln>
-        </p:spPr>
-        <p:txBody>
-          <a:bodyPr lIns="91440" rIns="91440" tIns="45720" bIns="45720" anchor="ctr">
-            <a:noAutofit/>
-          </a:bodyPr>
-          <a:lstStyle>
-            <a:lvl1pPr indent="0" defTabSz="914400">
-              <a:lnSpc>
-                <a:spcPct val="100000"/>
-              </a:lnSpc>
-              <a:buNone/>
-              <a:defRPr b="0" lang="pl-PL" sz="1200" spc="-1" strike="noStrike">
-                <a:solidFill>
-                  <a:schemeClr val="dk1">
-                    <a:tint val="75000"/>
-                  </a:schemeClr>
-                </a:solidFill>
-                <a:latin typeface="Calibri"/>
-              </a:defRPr>
-            </a:lvl1pPr>
-          </a:lstStyle>
-          <a:p>
-            <a:pPr indent="0" defTabSz="914400">
-              <a:lnSpc>
-                <a:spcPct val="100000"/>
-              </a:lnSpc>
-              <a:buNone/>
-            </a:pPr>
-            <a:r>
-              <a:rPr b="0" lang="pl-PL" sz="1200" spc="-1" strike="noStrike">
-                <a:solidFill>
-                  <a:schemeClr val="dk1">
-                    <a:tint val="75000"/>
-                  </a:schemeClr>
-                </a:solidFill>
-                <a:latin typeface="Calibri"/>
-              </a:rPr>
-              <a:t>&lt;date/time&gt;</a:t>
-            </a:r>
-            <a:endParaRPr b="0" lang="en-US" sz="1200" spc="-1" strike="noStrike">
-              <a:solidFill>
-                <a:srgbClr val="000000"/>
-              </a:solidFill>
-              <a:latin typeface="Times New Roman"/>
-            </a:endParaRPr>
-          </a:p>
-        </p:txBody>
-      </p:sp>
-      <p:sp>
-        <p:nvSpPr>
-          <p:cNvPr id="44" name="PlaceHolder 7"/>
-          <p:cNvSpPr>
-            <a:spLocks noGrp="1"/>
-          </p:cNvSpPr>
-          <p:nvPr>
-            <p:ph type="ftr" idx="20"/>
+            <p:ph type="ftr" idx="19"/>
           </p:nvPr>
         </p:nvSpPr>
         <p:spPr>
           <a:xfrm>
             <a:off x="3124080" y="6356520"/>
-            <a:ext cx="2895120" cy="364680"/>
+            <a:ext cx="2894760" cy="364320"/>
           </a:xfrm>
           <a:prstGeom prst="rect">
             <a:avLst/>
@@ -5895,7 +4294,13 @@
           </a:bodyPr>
           <a:lstStyle>
             <a:lvl1pPr indent="0" algn="ctr">
+              <a:lnSpc>
+                <a:spcPct val="100000"/>
+              </a:lnSpc>
               <a:buNone/>
+              <a:tabLst>
+                <a:tab algn="l" pos="0"/>
+              </a:tabLst>
               <a:defRPr b="0" lang="en-US" sz="1400" spc="-1" strike="noStrike">
                 <a:solidFill>
                   <a:srgbClr val="000000"/>
@@ -5906,7 +4311,13 @@
           </a:lstStyle>
           <a:p>
             <a:pPr indent="0" algn="ctr">
+              <a:lnSpc>
+                <a:spcPct val="100000"/>
+              </a:lnSpc>
               <a:buNone/>
+              <a:tabLst>
+                <a:tab algn="l" pos="0"/>
+              </a:tabLst>
             </a:pPr>
             <a:r>
               <a:rPr b="0" lang="en-US" sz="1400" spc="-1" strike="noStrike">
@@ -5928,18 +4339,18 @@
       </p:sp>
       <p:sp>
         <p:nvSpPr>
-          <p:cNvPr id="45" name="PlaceHolder 8"/>
+          <p:cNvPr id="33" name="PlaceHolder 2"/>
           <p:cNvSpPr>
             <a:spLocks noGrp="1"/>
           </p:cNvSpPr>
           <p:nvPr>
-            <p:ph type="sldNum" idx="21"/>
+            <p:ph type="sldNum" idx="20"/>
           </p:nvPr>
         </p:nvSpPr>
         <p:spPr>
           <a:xfrm>
             <a:off x="6553080" y="6356520"/>
-            <a:ext cx="2133360" cy="364680"/>
+            <a:ext cx="2133000" cy="364320"/>
           </a:xfrm>
           <a:prstGeom prst="rect">
             <a:avLst/>
@@ -5959,6 +4370,9 @@
                 <a:spcPct val="100000"/>
               </a:lnSpc>
               <a:buNone/>
+              <a:tabLst>
+                <a:tab algn="l" pos="0"/>
+              </a:tabLst>
               <a:defRPr b="0" lang="pl-PL" sz="1200" spc="-1" strike="noStrike">
                 <a:solidFill>
                   <a:schemeClr val="dk1">
@@ -5975,8 +4389,11 @@
                 <a:spcPct val="100000"/>
               </a:lnSpc>
               <a:buNone/>
+              <a:tabLst>
+                <a:tab algn="l" pos="0"/>
+              </a:tabLst>
             </a:pPr>
-            <a:fld id="{4E691882-4E05-4984-9BC8-77C122BFC2C5}" type="slidenum">
+            <a:fld id="{A1BE1BF7-050C-41D8-9512-E00F475EE3C7}" type="slidenum">
               <a:rPr b="0" lang="pl-PL" sz="1200" spc="-1" strike="noStrike">
                 <a:solidFill>
                   <a:schemeClr val="dk1">
@@ -5988,6 +4405,66 @@
               <a:t>&lt;number&gt;</a:t>
             </a:fld>
             <a:endParaRPr b="0" lang="en-US" sz="1200" spc="-1" strike="noStrike">
+              <a:solidFill>
+                <a:srgbClr val="000000"/>
+              </a:solidFill>
+              <a:latin typeface="Times New Roman"/>
+            </a:endParaRPr>
+          </a:p>
+        </p:txBody>
+      </p:sp>
+      <p:sp>
+        <p:nvSpPr>
+          <p:cNvPr id="34" name="PlaceHolder 3"/>
+          <p:cNvSpPr>
+            <a:spLocks noGrp="1"/>
+          </p:cNvSpPr>
+          <p:nvPr>
+            <p:ph type="dt" idx="21"/>
+          </p:nvPr>
+        </p:nvSpPr>
+        <p:spPr>
+          <a:xfrm>
+            <a:off x="457200" y="6356520"/>
+            <a:ext cx="2133000" cy="364320"/>
+          </a:xfrm>
+          <a:prstGeom prst="rect">
+            <a:avLst/>
+          </a:prstGeom>
+          <a:noFill/>
+          <a:ln w="0">
+            <a:noFill/>
+          </a:ln>
+        </p:spPr>
+        <p:txBody>
+          <a:bodyPr lIns="91440" rIns="91440" tIns="45720" bIns="45720" anchor="ctr">
+            <a:noAutofit/>
+          </a:bodyPr>
+          <a:lstStyle>
+            <a:lvl1pPr indent="0">
+              <a:buNone/>
+              <a:defRPr b="0" lang="en-US" sz="1400" spc="-1" strike="noStrike">
+                <a:solidFill>
+                  <a:srgbClr val="000000"/>
+                </a:solidFill>
+                <a:latin typeface="Times New Roman"/>
+              </a:defRPr>
+            </a:lvl1pPr>
+          </a:lstStyle>
+          <a:p>
+            <a:pPr indent="0">
+              <a:buNone/>
+            </a:pPr>
+            <a:r>
+              <a:rPr b="0" lang="en-US" sz="1400" spc="-1" strike="noStrike">
+                <a:solidFill>
+                  <a:srgbClr val="000000"/>
+                </a:solidFill>
+                <a:latin typeface="Times New Roman"/>
+              </a:rPr>
+              <a:t>&lt;date/time&gt;</a:t>
+            </a:r>
+            <a:endParaRPr b="0" lang="en-US" sz="1400" spc="-1" strike="noStrike">
               <a:solidFill>
                 <a:srgbClr val="000000"/>
               </a:solidFill>
@@ -6031,7 +4508,7 @@
       </p:grpSpPr>
       <p:sp>
         <p:nvSpPr>
-          <p:cNvPr id="46" name="PlaceHolder 1"/>
+          <p:cNvPr id="35" name="PlaceHolder 1"/>
           <p:cNvSpPr>
             <a:spLocks noGrp="1"/>
           </p:cNvSpPr>
@@ -6041,8 +4518,8 @@
         </p:nvSpPr>
         <p:spPr>
           <a:xfrm>
-            <a:off x="457200" y="274680"/>
-            <a:ext cx="8229240" cy="1142640"/>
+            <a:off x="685800" y="2130480"/>
+            <a:ext cx="7771680" cy="1469160"/>
           </a:xfrm>
           <a:prstGeom prst="rect">
             <a:avLst/>
@@ -6053,118 +4530,45 @@
           </a:ln>
         </p:spPr>
         <p:txBody>
-          <a:bodyPr lIns="91440" rIns="91440" tIns="45720" bIns="45720" anchor="ctr">
+          <a:bodyPr lIns="0" rIns="0" tIns="0" bIns="0" anchor="ctr">
             <a:noAutofit/>
           </a:bodyPr>
           <a:p>
-            <a:pPr indent="0" algn="ctr" defTabSz="914400">
-              <a:lnSpc>
-                <a:spcPct val="100000"/>
-              </a:lnSpc>
+            <a:pPr indent="0">
               <a:buNone/>
             </a:pPr>
             <a:r>
-              <a:rPr b="0" lang="pl-PL" sz="4400" spc="-1" strike="noStrike">
-                <a:solidFill>
-                  <a:schemeClr val="dk1"/>
-                </a:solidFill>
-                <a:latin typeface="Calibri"/>
+              <a:rPr b="0" lang="en-US" sz="1800" spc="-1" strike="noStrike">
+                <a:solidFill>
+                  <a:srgbClr val="000000"/>
+                </a:solidFill>
+                <a:latin typeface="Arial"/>
               </a:rPr>
-              <a:t>Kliknij, aby edytować styl</a:t>
+              <a:t>Click to edit the title text format</a:t>
             </a:r>
-            <a:endParaRPr b="0" lang="pl-PL" sz="4400" spc="-1" strike="noStrike">
+            <a:endParaRPr b="0" lang="en-US" sz="1800" spc="-1" strike="noStrike">
               <a:solidFill>
-                <a:schemeClr val="dk1"/>
+                <a:srgbClr val="000000"/>
               </a:solidFill>
-              <a:latin typeface="Calibri"/>
+              <a:latin typeface="Arial"/>
             </a:endParaRPr>
           </a:p>
         </p:txBody>
       </p:sp>
       <p:sp>
         <p:nvSpPr>
-          <p:cNvPr id="47" name="PlaceHolder 2"/>
+          <p:cNvPr id="36" name="PlaceHolder 2"/>
           <p:cNvSpPr>
             <a:spLocks noGrp="1"/>
           </p:cNvSpPr>
           <p:nvPr>
-            <p:ph type="dt" idx="22"/>
-          </p:nvPr>
-        </p:nvSpPr>
-        <p:spPr>
-          <a:xfrm>
-            <a:off x="457200" y="6356520"/>
-            <a:ext cx="2133360" cy="364680"/>
-          </a:xfrm>
-          <a:prstGeom prst="rect">
-            <a:avLst/>
-          </a:prstGeom>
-          <a:noFill/>
-          <a:ln w="0">
-            <a:noFill/>
-          </a:ln>
-        </p:spPr>
-        <p:txBody>
-          <a:bodyPr lIns="91440" rIns="91440" tIns="45720" bIns="45720" anchor="ctr">
-            <a:noAutofit/>
-          </a:bodyPr>
-          <a:lstStyle>
-            <a:lvl1pPr indent="0" defTabSz="914400">
-              <a:lnSpc>
-                <a:spcPct val="100000"/>
-              </a:lnSpc>
-              <a:buNone/>
-              <a:defRPr b="0" lang="pl-PL" sz="1200" spc="-1" strike="noStrike">
-                <a:solidFill>
-                  <a:schemeClr val="dk1">
-                    <a:tint val="75000"/>
-                  </a:schemeClr>
-                </a:solidFill>
-                <a:latin typeface="Calibri"/>
-              </a:defRPr>
-            </a:lvl1pPr>
-          </a:lstStyle>
-          <a:p>
-            <a:pPr indent="0" defTabSz="914400">
-              <a:lnSpc>
-                <a:spcPct val="100000"/>
-              </a:lnSpc>
-              <a:buNone/>
-            </a:pPr>
-            <a:r>
-              <a:rPr b="0" lang="pl-PL" sz="1200" spc="-1" strike="noStrike">
-                <a:solidFill>
-                  <a:schemeClr val="dk1">
-                    <a:tint val="75000"/>
-                  </a:schemeClr>
-                </a:solidFill>
-                <a:latin typeface="Calibri"/>
-              </a:rPr>
-              <a:t>&lt;date/time&gt;</a:t>
-            </a:r>
-            <a:endParaRPr b="0" lang="en-US" sz="1200" spc="-1" strike="noStrike">
-              <a:solidFill>
-                <a:srgbClr val="000000"/>
-              </a:solidFill>
-              <a:latin typeface="Times New Roman"/>
-            </a:endParaRPr>
-          </a:p>
-        </p:txBody>
-      </p:sp>
-      <p:sp>
-        <p:nvSpPr>
-          <p:cNvPr id="48" name="PlaceHolder 3"/>
-          <p:cNvSpPr>
-            <a:spLocks noGrp="1"/>
-          </p:cNvSpPr>
-          <p:nvPr>
-            <p:ph type="ftr" idx="23"/>
+            <p:ph type="ftr" idx="22"/>
           </p:nvPr>
         </p:nvSpPr>
         <p:spPr>
           <a:xfrm>
             <a:off x="3124080" y="6356520"/>
-            <a:ext cx="2895120" cy="364680"/>
+            <a:ext cx="2894760" cy="364320"/>
           </a:xfrm>
           <a:prstGeom prst="rect">
             <a:avLst/>
@@ -6180,7 +4584,13 @@
           </a:bodyPr>
           <a:lstStyle>
             <a:lvl1pPr indent="0" algn="ctr">
+              <a:lnSpc>
+                <a:spcPct val="100000"/>
+              </a:lnSpc>
               <a:buNone/>
+              <a:tabLst>
+                <a:tab algn="l" pos="0"/>
+              </a:tabLst>
               <a:defRPr b="0" lang="en-US" sz="1400" spc="-1" strike="noStrike">
                 <a:solidFill>
                   <a:srgbClr val="000000"/>
@@ -6191,7 +4601,13 @@
           </a:lstStyle>
           <a:p>
             <a:pPr indent="0" algn="ctr">
+              <a:lnSpc>
+                <a:spcPct val="100000"/>
+              </a:lnSpc>
               <a:buNone/>
+              <a:tabLst>
+                <a:tab algn="l" pos="0"/>
+              </a:tabLst>
             </a:pPr>
             <a:r>
               <a:rPr b="0" lang="en-US" sz="1400" spc="-1" strike="noStrike">
@@ -6213,18 +4629,18 @@
       </p:sp>
       <p:sp>
         <p:nvSpPr>
-          <p:cNvPr id="49" name="PlaceHolder 4"/>
+          <p:cNvPr id="37" name="PlaceHolder 3"/>
           <p:cNvSpPr>
             <a:spLocks noGrp="1"/>
           </p:cNvSpPr>
           <p:nvPr>
-            <p:ph type="sldNum" idx="24"/>
+            <p:ph type="sldNum" idx="23"/>
           </p:nvPr>
         </p:nvSpPr>
         <p:spPr>
           <a:xfrm>
             <a:off x="6553080" y="6356520"/>
-            <a:ext cx="2133360" cy="364680"/>
+            <a:ext cx="2133000" cy="364320"/>
           </a:xfrm>
           <a:prstGeom prst="rect">
             <a:avLst/>
@@ -6244,6 +4660,9 @@
                 <a:spcPct val="100000"/>
               </a:lnSpc>
               <a:buNone/>
+              <a:tabLst>
+                <a:tab algn="l" pos="0"/>
+              </a:tabLst>
               <a:defRPr b="0" lang="pl-PL" sz="1200" spc="-1" strike="noStrike">
                 <a:solidFill>
                   <a:schemeClr val="dk1">
@@ -6260,8 +4679,11 @@
                 <a:spcPct val="100000"/>
               </a:lnSpc>
               <a:buNone/>
+              <a:tabLst>
+                <a:tab algn="l" pos="0"/>
+              </a:tabLst>
             </a:pPr>
-            <a:fld id="{D78525CF-CF00-4A22-ADCA-C547C0098590}" type="slidenum">
+            <a:fld id="{ECE3E5A2-90BB-4640-9E0F-33AE8E7B3584}" type="slidenum">
               <a:rPr b="0" lang="pl-PL" sz="1200" spc="-1" strike="noStrike">
                 <a:solidFill>
                   <a:schemeClr val="dk1">
@@ -6273,6 +4695,66 @@
               <a:t>&lt;number&gt;</a:t>
             </a:fld>
             <a:endParaRPr b="0" lang="en-US" sz="1200" spc="-1" strike="noStrike">
+              <a:solidFill>
+                <a:srgbClr val="000000"/>
+              </a:solidFill>
+              <a:latin typeface="Times New Roman"/>
+            </a:endParaRPr>
+          </a:p>
+        </p:txBody>
+      </p:sp>
+      <p:sp>
+        <p:nvSpPr>
+          <p:cNvPr id="38" name="PlaceHolder 4"/>
+          <p:cNvSpPr>
+            <a:spLocks noGrp="1"/>
+          </p:cNvSpPr>
+          <p:nvPr>
+            <p:ph type="dt" idx="24"/>
+          </p:nvPr>
+        </p:nvSpPr>
+        <p:spPr>
+          <a:xfrm>
+            <a:off x="457200" y="6356520"/>
+            <a:ext cx="2133000" cy="364320"/>
+          </a:xfrm>
+          <a:prstGeom prst="rect">
+            <a:avLst/>
+          </a:prstGeom>
+          <a:noFill/>
+          <a:ln w="0">
+            <a:noFill/>
+          </a:ln>
+        </p:spPr>
+        <p:txBody>
+          <a:bodyPr lIns="91440" rIns="91440" tIns="45720" bIns="45720" anchor="ctr">
+            <a:noAutofit/>
+          </a:bodyPr>
+          <a:lstStyle>
+            <a:lvl1pPr indent="0">
+              <a:buNone/>
+              <a:defRPr b="0" lang="en-US" sz="1400" spc="-1" strike="noStrike">
+                <a:solidFill>
+                  <a:srgbClr val="000000"/>
+                </a:solidFill>
+                <a:latin typeface="Times New Roman"/>
+              </a:defRPr>
+            </a:lvl1pPr>
+          </a:lstStyle>
+          <a:p>
+            <a:pPr indent="0">
+              <a:buNone/>
+            </a:pPr>
+            <a:r>
+              <a:rPr b="0" lang="en-US" sz="1400" spc="-1" strike="noStrike">
+                <a:solidFill>
+                  <a:srgbClr val="000000"/>
+                </a:solidFill>
+                <a:latin typeface="Times New Roman"/>
+              </a:rPr>
+              <a:t>&lt;date/time&gt;</a:t>
+            </a:r>
+            <a:endParaRPr b="0" lang="en-US" sz="1400" spc="-1" strike="noStrike">
               <a:solidFill>
                 <a:srgbClr val="000000"/>
               </a:solidFill>
@@ -6316,88 +4798,18 @@
       </p:grpSpPr>
       <p:sp>
         <p:nvSpPr>
-          <p:cNvPr id="51" name="PlaceHolder 1"/>
+          <p:cNvPr id="40" name="PlaceHolder 1"/>
           <p:cNvSpPr>
             <a:spLocks noGrp="1"/>
           </p:cNvSpPr>
           <p:nvPr>
-            <p:ph type="dt" idx="25"/>
-          </p:nvPr>
-        </p:nvSpPr>
-        <p:spPr>
-          <a:xfrm>
-            <a:off x="457200" y="6356520"/>
-            <a:ext cx="2133360" cy="364680"/>
-          </a:xfrm>
-          <a:prstGeom prst="rect">
-            <a:avLst/>
-          </a:prstGeom>
-          <a:noFill/>
-          <a:ln w="0">
-            <a:noFill/>
-          </a:ln>
-        </p:spPr>
-        <p:txBody>
-          <a:bodyPr lIns="91440" rIns="91440" tIns="45720" bIns="45720" anchor="ctr">
-            <a:noAutofit/>
-          </a:bodyPr>
-          <a:lstStyle>
-            <a:lvl1pPr indent="0" defTabSz="914400">
-              <a:lnSpc>
-                <a:spcPct val="100000"/>
-              </a:lnSpc>
-              <a:buNone/>
-              <a:defRPr b="0" lang="pl-PL" sz="1200" spc="-1" strike="noStrike">
-                <a:solidFill>
-                  <a:schemeClr val="dk1">
-                    <a:tint val="75000"/>
-                  </a:schemeClr>
-                </a:solidFill>
-                <a:latin typeface="Calibri"/>
-              </a:defRPr>
-            </a:lvl1pPr>
-          </a:lstStyle>
-          <a:p>
-            <a:pPr indent="0" defTabSz="914400">
-              <a:lnSpc>
-                <a:spcPct val="100000"/>
-              </a:lnSpc>
-              <a:buNone/>
-            </a:pPr>
-            <a:r>
-              <a:rPr b="0" lang="pl-PL" sz="1200" spc="-1" strike="noStrike">
-                <a:solidFill>
-                  <a:schemeClr val="dk1">
-                    <a:tint val="75000"/>
-                  </a:schemeClr>
-                </a:solidFill>
-                <a:latin typeface="Calibri"/>
-              </a:rPr>
-              <a:t>&lt;date/time&gt;</a:t>
-            </a:r>
-            <a:endParaRPr b="0" lang="en-US" sz="1200" spc="-1" strike="noStrike">
-              <a:solidFill>
-                <a:srgbClr val="000000"/>
-              </a:solidFill>
-              <a:latin typeface="Times New Roman"/>
-            </a:endParaRPr>
-          </a:p>
-        </p:txBody>
-      </p:sp>
-      <p:sp>
-        <p:nvSpPr>
-          <p:cNvPr id="52" name="PlaceHolder 2"/>
-          <p:cNvSpPr>
-            <a:spLocks noGrp="1"/>
-          </p:cNvSpPr>
-          <p:nvPr>
-            <p:ph type="ftr" idx="26"/>
+            <p:ph type="ftr" idx="25"/>
           </p:nvPr>
         </p:nvSpPr>
         <p:spPr>
           <a:xfrm>
             <a:off x="3124080" y="6356520"/>
-            <a:ext cx="2895120" cy="364680"/>
+            <a:ext cx="2894760" cy="364320"/>
           </a:xfrm>
           <a:prstGeom prst="rect">
             <a:avLst/>
@@ -6413,7 +4825,13 @@
           </a:bodyPr>
           <a:lstStyle>
             <a:lvl1pPr indent="0" algn="ctr">
+              <a:lnSpc>
+                <a:spcPct val="100000"/>
+              </a:lnSpc>
               <a:buNone/>
+              <a:tabLst>
+                <a:tab algn="l" pos="0"/>
+              </a:tabLst>
               <a:defRPr b="0" lang="en-US" sz="1400" spc="-1" strike="noStrike">
                 <a:solidFill>
                   <a:srgbClr val="000000"/>
@@ -6424,7 +4842,13 @@
           </a:lstStyle>
           <a:p>
             <a:pPr indent="0" algn="ctr">
+              <a:lnSpc>
+                <a:spcPct val="100000"/>
+              </a:lnSpc>
               <a:buNone/>
+              <a:tabLst>
+                <a:tab algn="l" pos="0"/>
+              </a:tabLst>
             </a:pPr>
             <a:r>
               <a:rPr b="0" lang="en-US" sz="1400" spc="-1" strike="noStrike">
@@ -6446,18 +4870,18 @@
       </p:sp>
       <p:sp>
         <p:nvSpPr>
-          <p:cNvPr id="53" name="PlaceHolder 3"/>
+          <p:cNvPr id="41" name="PlaceHolder 2"/>
           <p:cNvSpPr>
             <a:spLocks noGrp="1"/>
           </p:cNvSpPr>
           <p:nvPr>
-            <p:ph type="sldNum" idx="27"/>
+            <p:ph type="sldNum" idx="26"/>
           </p:nvPr>
         </p:nvSpPr>
         <p:spPr>
           <a:xfrm>
             <a:off x="6553080" y="6356520"/>
-            <a:ext cx="2133360" cy="364680"/>
+            <a:ext cx="2133000" cy="364320"/>
           </a:xfrm>
           <a:prstGeom prst="rect">
             <a:avLst/>
@@ -6477,6 +4901,9 @@
                 <a:spcPct val="100000"/>
               </a:lnSpc>
               <a:buNone/>
+              <a:tabLst>
+                <a:tab algn="l" pos="0"/>
+              </a:tabLst>
               <a:defRPr b="0" lang="pl-PL" sz="1200" spc="-1" strike="noStrike">
                 <a:solidFill>
                   <a:schemeClr val="dk1">
@@ -6493,8 +4920,11 @@
                 <a:spcPct val="100000"/>
               </a:lnSpc>
               <a:buNone/>
+              <a:tabLst>
+                <a:tab algn="l" pos="0"/>
+              </a:tabLst>
             </a:pPr>
-            <a:fld id="{54A254B9-77B3-478D-B902-F1959E5C8242}" type="slidenum">
+            <a:fld id="{9397C773-CFD9-415C-9820-51A01410B35B}" type="slidenum">
               <a:rPr b="0" lang="pl-PL" sz="1200" spc="-1" strike="noStrike">
                 <a:solidFill>
                   <a:schemeClr val="dk1">
@@ -6506,6 +4936,66 @@
               <a:t>&lt;number&gt;</a:t>
             </a:fld>
             <a:endParaRPr b="0" lang="en-US" sz="1200" spc="-1" strike="noStrike">
+              <a:solidFill>
+                <a:srgbClr val="000000"/>
+              </a:solidFill>
+              <a:latin typeface="Times New Roman"/>
+            </a:endParaRPr>
+          </a:p>
+        </p:txBody>
+      </p:sp>
+      <p:sp>
+        <p:nvSpPr>
+          <p:cNvPr id="42" name="PlaceHolder 3"/>
+          <p:cNvSpPr>
+            <a:spLocks noGrp="1"/>
+          </p:cNvSpPr>
+          <p:nvPr>
+            <p:ph type="dt" idx="27"/>
+          </p:nvPr>
+        </p:nvSpPr>
+        <p:spPr>
+          <a:xfrm>
+            <a:off x="457200" y="6356520"/>
+            <a:ext cx="2133000" cy="364320"/>
+          </a:xfrm>
+          <a:prstGeom prst="rect">
+            <a:avLst/>
+          </a:prstGeom>
+          <a:noFill/>
+          <a:ln w="0">
+            <a:noFill/>
+          </a:ln>
+        </p:spPr>
+        <p:txBody>
+          <a:bodyPr lIns="91440" rIns="91440" tIns="45720" bIns="45720" anchor="ctr">
+            <a:noAutofit/>
+          </a:bodyPr>
+          <a:lstStyle>
+            <a:lvl1pPr indent="0">
+              <a:buNone/>
+              <a:defRPr b="0" lang="en-US" sz="1400" spc="-1" strike="noStrike">
+                <a:solidFill>
+                  <a:srgbClr val="000000"/>
+                </a:solidFill>
+                <a:latin typeface="Times New Roman"/>
+              </a:defRPr>
+            </a:lvl1pPr>
+          </a:lstStyle>
+          <a:p>
+            <a:pPr indent="0">
+              <a:buNone/>
+            </a:pPr>
+            <a:r>
+              <a:rPr b="0" lang="en-US" sz="1400" spc="-1" strike="noStrike">
+                <a:solidFill>
+                  <a:srgbClr val="000000"/>
+                </a:solidFill>
+                <a:latin typeface="Times New Roman"/>
+              </a:rPr>
+              <a:t>&lt;date/time&gt;</a:t>
+            </a:r>
+            <a:endParaRPr b="0" lang="en-US" sz="1400" spc="-1" strike="noStrike">
               <a:solidFill>
                 <a:srgbClr val="000000"/>
               </a:solidFill>
@@ -6542,7 +5032,7 @@
       </p:grpSpPr>
       <p:sp>
         <p:nvSpPr>
-          <p:cNvPr id="66" name="PlaceHolder 1"/>
+          <p:cNvPr id="49" name="PlaceHolder 1"/>
           <p:cNvSpPr>
             <a:spLocks noGrp="1"/>
           </p:cNvSpPr>
@@ -6553,7 +5043,7 @@
         <p:spPr>
           <a:xfrm>
             <a:off x="457200" y="274680"/>
-            <a:ext cx="8229240" cy="1142640"/>
+            <a:ext cx="8228880" cy="1142280"/>
           </a:xfrm>
           <a:prstGeom prst="rect">
             <a:avLst/>
@@ -6573,6 +5063,9 @@
                 <a:spcPct val="100000"/>
               </a:lnSpc>
               <a:buNone/>
+              <a:tabLst>
+                <a:tab algn="l" pos="0"/>
+              </a:tabLst>
             </a:pPr>
             <a:r>
               <a:rPr b="0" lang="pl-PL" sz="3600" spc="-1" strike="noStrike">
@@ -6583,18 +5076,18 @@
               </a:rPr>
               <a:t>Zadanie nr 4</a:t>
             </a:r>
-            <a:endParaRPr b="0" lang="pl-PL" sz="3600" spc="-1" strike="noStrike">
+            <a:endParaRPr b="0" lang="en-US" sz="3600" spc="-1" strike="noStrike">
               <a:solidFill>
-                <a:schemeClr val="dk1"/>
+                <a:srgbClr val="000000"/>
               </a:solidFill>
-              <a:latin typeface="Calibri"/>
+              <a:latin typeface="Arial"/>
             </a:endParaRPr>
           </a:p>
         </p:txBody>
       </p:sp>
       <p:pic>
         <p:nvPicPr>
-          <p:cNvPr id="67" name="Picture 4" descr="Znalezione obrazy dla zapytania politechnika wrocławska logotyp">
+          <p:cNvPr id="50" name="Picture 4" descr="Znalezione obrazy dla zapytania politechnika wrocławska logotyp">
             <a:hlinkClick r:id="rId1"/>
           </p:cNvPr>
           <p:cNvPicPr/>
@@ -6607,7 +5100,7 @@
         <p:spPr>
           <a:xfrm>
             <a:off x="0" y="12960"/>
-            <a:ext cx="1824480" cy="535320"/>
+            <a:ext cx="1824120" cy="534960"/>
           </a:xfrm>
           <a:prstGeom prst="rect">
             <a:avLst/>
@@ -6619,7 +5112,7 @@
       </p:pic>
       <p:sp>
         <p:nvSpPr>
-          <p:cNvPr id="68" name="PlaceHolder 2"/>
+          <p:cNvPr id="51" name="PlaceHolder 2"/>
           <p:cNvSpPr>
             <a:spLocks noGrp="1"/>
           </p:cNvSpPr>
@@ -6630,7 +5123,7 @@
         <p:spPr>
           <a:xfrm>
             <a:off x="323640" y="2493000"/>
-            <a:ext cx="8424360" cy="3492360"/>
+            <a:ext cx="8424000" cy="3492000"/>
           </a:xfrm>
           <a:prstGeom prst="rect">
             <a:avLst/>
@@ -6667,11 +5160,11 @@
               </a:rPr>
               <a:t>Analiza i opis docelowego segmentu odbiorców</a:t>
             </a:r>
-            <a:endParaRPr b="0" lang="pl-PL" sz="2800" spc="-1" strike="noStrike">
+            <a:endParaRPr b="0" lang="en-US" sz="2800" spc="-1" strike="noStrike">
               <a:solidFill>
-                <a:schemeClr val="dk1"/>
+                <a:srgbClr val="000000"/>
               </a:solidFill>
-              <a:latin typeface="Calibri"/>
+              <a:latin typeface="Arial"/>
             </a:endParaRPr>
           </a:p>
           <a:p>
@@ -6697,11 +5190,11 @@
               </a:rPr>
               <a:t>W tabeli na następnym slajdzie proszę postarać się scharakteryzować docelowy segment odbiorców – kto i w jaki sposób będzie użytkował produkt/usługę? Ale też jaki jest rynek i konkurencja? </a:t>
             </a:r>
-            <a:endParaRPr b="0" lang="pl-PL" sz="2800" spc="-1" strike="noStrike">
+            <a:endParaRPr b="0" lang="en-US" sz="2800" spc="-1" strike="noStrike">
               <a:solidFill>
-                <a:schemeClr val="dk1"/>
+                <a:srgbClr val="000000"/>
               </a:solidFill>
-              <a:latin typeface="Calibri"/>
+              <a:latin typeface="Arial"/>
             </a:endParaRPr>
           </a:p>
         </p:txBody>
@@ -6738,7 +5231,7 @@
       </p:grpSpPr>
       <p:pic>
         <p:nvPicPr>
-          <p:cNvPr id="69" name="Picture 4" descr="Znalezione obrazy dla zapytania politechnika wrocławska logotyp">
+          <p:cNvPr id="52" name="Picture 4" descr="Znalezione obrazy dla zapytania politechnika wrocławska logotyp">
             <a:hlinkClick r:id="rId1"/>
           </p:cNvPr>
           <p:cNvPicPr/>
@@ -6751,7 +5244,7 @@
         <p:spPr>
           <a:xfrm>
             <a:off x="0" y="11160"/>
-            <a:ext cx="1824480" cy="535320"/>
+            <a:ext cx="1824120" cy="534960"/>
           </a:xfrm>
           <a:prstGeom prst="rect">
             <a:avLst/>
@@ -6763,14 +5256,14 @@
       </p:pic>
       <p:sp>
         <p:nvSpPr>
-          <p:cNvPr id="70" name="pole tekstowe 32"/>
+          <p:cNvPr id="53" name="pole tekstowe 32"/>
           <p:cNvSpPr/>
           <p:nvPr/>
         </p:nvSpPr>
         <p:spPr>
           <a:xfrm>
-            <a:off x="1907640" y="177840"/>
-            <a:ext cx="5400360" cy="638280"/>
+            <a:off x="1600200" y="177840"/>
+            <a:ext cx="6400800" cy="364680"/>
           </a:xfrm>
           <a:prstGeom prst="rect">
             <a:avLst/>
@@ -6816,13 +5309,13 @@
       </p:sp>
       <p:graphicFrame>
         <p:nvGraphicFramePr>
-          <p:cNvPr id="71" name="Tabela 1"/>
+          <p:cNvPr id="54" name="Tabela 1"/>
           <p:cNvGraphicFramePr/>
           <p:nvPr/>
         </p:nvGraphicFramePr>
         <p:xfrm>
           <a:off x="107640" y="620640"/>
-          <a:ext cx="8856720" cy="6787440"/>
+          <a:ext cx="8856360" cy="7092720"/>
         </p:xfrm>
         <a:graphic>
           <a:graphicData uri="http://schemas.openxmlformats.org/drawingml/2006/table">
@@ -6857,7 +5350,7 @@
                         <a:rPr sz="1400"/>
                       </a:br>
                       <a:r>
-                        <a:rPr b="0" lang="pl-PL" sz="1200" spc="-1" strike="noStrike">
+                        <a:rPr b="0" lang="pl-PL" sz="1000" spc="-1" strike="noStrike">
                           <a:solidFill>
                             <a:schemeClr val="dk1"/>
                           </a:solidFill>
@@ -6865,7 +5358,7 @@
                         </a:rPr>
                         <a:t>(Kto konkretnie będzie korzystał z produktu/usług?)</a:t>
                       </a:r>
-                      <a:endParaRPr b="0" lang="en-US" sz="1200" spc="-1" strike="noStrike">
+                      <a:endParaRPr b="0" lang="en-US" sz="1000" spc="-1" strike="noStrike">
                         <a:solidFill>
                           <a:srgbClr val="000000"/>
                         </a:solidFill>
@@ -6907,8 +5400,13 @@
                       <a:noAutofit/>
                     </a:bodyPr>
                     <a:p>
+                      <a:pPr>
+                        <a:lnSpc>
+                          <a:spcPct val="100000"/>
+                        </a:lnSpc>
+                      </a:pPr>
                       <a:r>
-                        <a:rPr b="0" lang="pl-PL" sz="1400" spc="-1" strike="noStrike">
+                        <a:rPr b="0" lang="pl-PL" sz="1200" spc="-1" strike="noStrike">
                           <a:solidFill>
                             <a:schemeClr val="dk1"/>
                           </a:solidFill>
@@ -6916,16 +5414,21 @@
                         </a:rPr>
                         <a:t>Studenci (, nauczyciele (25+) oraz uczniowie (12-19 rok życia),  chcący prowadzić korepetycje lub poszukujący korepetytora;</a:t>
                       </a:r>
-                      <a:endParaRPr b="0" lang="pl-PL" sz="1400" spc="-1" strike="noStrike">
+                      <a:endParaRPr b="0" lang="en-US" sz="1200" spc="-1" strike="noStrike">
                         <a:solidFill>
-                          <a:schemeClr val="dk1"/>
+                          <a:srgbClr val="000000"/>
                         </a:solidFill>
-                        <a:latin typeface="Calibri"/>
+                        <a:latin typeface="Arial"/>
                       </a:endParaRPr>
                     </a:p>
                     <a:p>
+                      <a:pPr>
+                        <a:lnSpc>
+                          <a:spcPct val="100000"/>
+                        </a:lnSpc>
+                      </a:pPr>
                       <a:r>
-                        <a:rPr b="0" lang="pl-PL" sz="1400" spc="-1" strike="noStrike">
+                        <a:rPr b="0" lang="pl-PL" sz="1200" spc="-1" strike="noStrike">
                           <a:solidFill>
                             <a:schemeClr val="dk1"/>
                           </a:solidFill>
@@ -6933,11 +5436,11 @@
                         </a:rPr>
                         <a:t>2 grupy użytkowników: korepetytorzy i klienci</a:t>
                       </a:r>
-                      <a:endParaRPr b="0" lang="pl-PL" sz="1400" spc="-1" strike="noStrike">
+                      <a:endParaRPr b="0" lang="en-US" sz="1200" spc="-1" strike="noStrike">
                         <a:solidFill>
-                          <a:schemeClr val="dk1"/>
+                          <a:srgbClr val="000000"/>
                         </a:solidFill>
-                        <a:latin typeface="Calibri"/>
+                        <a:latin typeface="Arial"/>
                       </a:endParaRPr>
                     </a:p>
                   </a:txBody>
@@ -6998,7 +5501,7 @@
                         <a:rPr sz="1400"/>
                       </a:br>
                       <a:r>
-                        <a:rPr b="0" lang="pl-PL" sz="1200" spc="-1" strike="noStrike">
+                        <a:rPr b="0" lang="pl-PL" sz="1000" spc="-1" strike="noStrike">
                           <a:solidFill>
                             <a:schemeClr val="dk1"/>
                           </a:solidFill>
@@ -7006,7 +5509,7 @@
                         </a:rPr>
                         <a:t>(Do czego ostateczny użytkownik będzie używał produktu/ usługi?)</a:t>
                       </a:r>
-                      <a:endParaRPr b="0" lang="en-US" sz="1200" spc="-1" strike="noStrike">
+                      <a:endParaRPr b="0" lang="en-US" sz="1000" spc="-1" strike="noStrike">
                         <a:solidFill>
                           <a:srgbClr val="000000"/>
                         </a:solidFill>
@@ -7048,20 +5551,25 @@
                       <a:noAutofit/>
                     </a:bodyPr>
                     <a:p>
+                      <a:pPr>
+                        <a:lnSpc>
+                          <a:spcPct val="100000"/>
+                        </a:lnSpc>
+                      </a:pPr>
                       <a:r>
-                        <a:rPr b="0" lang="pl-PL" sz="1300" spc="-1" strike="noStrike">
+                        <a:rPr b="0" lang="pl-PL" sz="1200" spc="-1" strike="noStrike">
                           <a:solidFill>
                             <a:schemeClr val="dk1"/>
                           </a:solidFill>
                           <a:latin typeface="Calibri"/>
                         </a:rPr>
-                        <a:t>Możliwość wystawiania ofert korepetycji oraz umawiani się na nie</a:t>
+                        <a:t>Szybkie znalezienie i poróœnanie korepetytora (przedmio, poziom, lokalizacja, cena, opinie). Rezerwacja terminu w kalendarzu i płatność online. Bezpieczna realizacja lekcji. Zarządzanie lakcjami, odwołaniami</a:t>
                       </a:r>
-                      <a:endParaRPr b="0" lang="pl-PL" sz="1300" spc="-1" strike="noStrike">
+                      <a:endParaRPr b="0" lang="en-US" sz="1200" spc="-1" strike="noStrike">
                         <a:solidFill>
-                          <a:schemeClr val="dk1"/>
+                          <a:srgbClr val="000000"/>
                         </a:solidFill>
-                        <a:latin typeface="Calibri"/>
+                        <a:latin typeface="Arial"/>
                       </a:endParaRPr>
                     </a:p>
                   </a:txBody>
@@ -7122,7 +5630,7 @@
                         <a:rPr sz="1400"/>
                       </a:br>
                       <a:r>
-                        <a:rPr b="0" lang="pl-PL" sz="1200" spc="-1" strike="noStrike">
+                        <a:rPr b="0" lang="pl-PL" sz="1000" spc="-1" strike="noStrike">
                           <a:solidFill>
                             <a:schemeClr val="dk1"/>
                           </a:solidFill>
@@ -7130,7 +5638,7 @@
                         </a:rPr>
                         <a:t>(Jakie korzyści uzyska z usługi? Oszczędność czasu, kosztów? Inne korzyści)</a:t>
                       </a:r>
-                      <a:endParaRPr b="0" lang="en-US" sz="1200" spc="-1" strike="noStrike">
+                      <a:endParaRPr b="0" lang="en-US" sz="1000" spc="-1" strike="noStrike">
                         <a:solidFill>
                           <a:srgbClr val="000000"/>
                         </a:solidFill>
@@ -7172,21 +5680,26 @@
                       <a:noAutofit/>
                     </a:bodyPr>
                     <a:p>
+                      <a:pPr>
+                        <a:lnSpc>
+                          <a:spcPct val="100000"/>
+                        </a:lnSpc>
+                      </a:pPr>
                       <a:r>
-                        <a:rPr b="0" lang="pl-PL" sz="1300" spc="-1" strike="noStrike">
+                        <a:rPr b="0" lang="pl-PL" sz="1200" spc="-1" strike="noStrike">
                           <a:solidFill>
                             <a:schemeClr val="dk1"/>
                           </a:solidFill>
                           <a:latin typeface="Calibri"/>
                           <a:ea typeface="Noto Sans CJK SC"/>
                         </a:rPr>
-                        <a:t>Ułatwienie komunikacji między klientem a korepetytorem, dostęp do obszernej bazy klientów/korepetytorów, oszczędzanie czasu w szukaniu klientów/korepetytorów</a:t>
+                        <a:t>Ułatwienie komunikacji między klientem a korepetytorem, dostęp do obszernej bazy klientów/korepetytorów, oszczędzanie czasu w szukaniu klientów/korepetytorów, większe bezpieczeństwo transakcji</a:t>
                       </a:r>
-                      <a:endParaRPr b="0" lang="pl-PL" sz="1300" spc="-1" strike="noStrike">
+                      <a:endParaRPr b="0" lang="en-US" sz="1200" spc="-1" strike="noStrike">
                         <a:solidFill>
-                          <a:schemeClr val="dk1"/>
+                          <a:srgbClr val="000000"/>
                         </a:solidFill>
-                        <a:latin typeface="Calibri"/>
+                        <a:latin typeface="Arial"/>
                       </a:endParaRPr>
                     </a:p>
                   </a:txBody>
@@ -7247,7 +5760,7 @@
                         <a:rPr sz="1400"/>
                       </a:br>
                       <a:r>
-                        <a:rPr b="0" lang="pl-PL" sz="1200" spc="-1" strike="noStrike">
+                        <a:rPr b="0" lang="pl-PL" sz="1000" spc="-1" strike="noStrike">
                           <a:solidFill>
                             <a:schemeClr val="dk1"/>
                           </a:solidFill>
@@ -7255,7 +5768,7 @@
                         </a:rPr>
                         <a:t>(Kim są najbardziej wpływowi klienci? Kto będzie „lighthouse customers” – klientami latarniami)</a:t>
                       </a:r>
-                      <a:endParaRPr b="0" lang="en-US" sz="1200" spc="-1" strike="noStrike">
+                      <a:endParaRPr b="0" lang="en-US" sz="1000" spc="-1" strike="noStrike">
                         <a:solidFill>
                           <a:srgbClr val="000000"/>
                         </a:solidFill>
@@ -7297,20 +5810,25 @@
                       <a:noAutofit/>
                     </a:bodyPr>
                     <a:p>
+                      <a:pPr>
+                        <a:lnSpc>
+                          <a:spcPct val="100000"/>
+                        </a:lnSpc>
+                      </a:pPr>
                       <a:r>
-                        <a:rPr b="0" lang="pl-PL" sz="1800" spc="-1" strike="noStrike">
+                        <a:rPr b="0" lang="pl-PL" sz="1200" spc="-1" strike="noStrike">
                           <a:solidFill>
                             <a:schemeClr val="dk1"/>
                           </a:solidFill>
                           <a:latin typeface="Calibri"/>
                         </a:rPr>
-                        <a:t>Studenci</a:t>
+                        <a:t>Rodzice klas egazminacyjnych (8 i maturzyści) z dużych miast. Studenci mogą spełniać rolę zarówno klientów jak i korepetytorów</a:t>
                       </a:r>
-                      <a:endParaRPr b="0" lang="pl-PL" sz="1800" spc="-1" strike="noStrike">
+                      <a:endParaRPr b="0" lang="en-US" sz="1200" spc="-1" strike="noStrike">
                         <a:solidFill>
-                          <a:schemeClr val="dk1"/>
+                          <a:srgbClr val="000000"/>
                         </a:solidFill>
-                        <a:latin typeface="Calibri"/>
+                        <a:latin typeface="Arial"/>
                       </a:endParaRPr>
                     </a:p>
                   </a:txBody>
@@ -7371,7 +5889,7 @@
                         <a:rPr sz="1400"/>
                       </a:br>
                       <a:r>
-                        <a:rPr b="0" lang="pl-PL" sz="1200" spc="-1" strike="noStrike">
+                        <a:rPr b="0" lang="pl-PL" sz="1000" spc="-1" strike="noStrike">
                           <a:solidFill>
                             <a:schemeClr val="dk1"/>
                           </a:solidFill>
@@ -7379,7 +5897,7 @@
                         </a:rPr>
                         <a:t>(B2C czy B2B?)</a:t>
                       </a:r>
-                      <a:endParaRPr b="0" lang="en-US" sz="1200" spc="-1" strike="noStrike">
+                      <a:endParaRPr b="0" lang="en-US" sz="1000" spc="-1" strike="noStrike">
                         <a:solidFill>
                           <a:srgbClr val="000000"/>
                         </a:solidFill>
@@ -7421,20 +5939,25 @@
                       <a:noAutofit/>
                     </a:bodyPr>
                     <a:p>
+                      <a:pPr>
+                        <a:lnSpc>
+                          <a:spcPct val="100000"/>
+                        </a:lnSpc>
+                      </a:pPr>
                       <a:r>
-                        <a:rPr b="0" lang="pl-PL" sz="1300" spc="-1" strike="noStrike">
+                        <a:rPr b="0" lang="pl-PL" sz="1200" spc="-1" strike="noStrike">
                           <a:solidFill>
                             <a:schemeClr val="dk1"/>
                           </a:solidFill>
                           <a:latin typeface="Calibri"/>
                         </a:rPr>
-                        <a:t>B2C – poszukiwanie klientów i utrzymywanie relacji ze stałymi (np. promocje, programy lojalnościowe, ochrony korepetytorów), stały / malejący – klienci, którzy ukończyli edukację mogą zacząć pracowac jako korepetytorzy</a:t>
+                        <a:t>B2C – poszukiwanie klientów i utrzymywanie relacji ze stałymi (np. promocje, programy lojalnościowe, ochrony korepetytorów), stały / malejący – klienci, którzy ukończyli edukację mogą zacząć pracowac jako korepetytorzy. Możliwość B2B – np. współpraca z szkołami językowimi</a:t>
                       </a:r>
-                      <a:endParaRPr b="0" lang="pl-PL" sz="1300" spc="-1" strike="noStrike">
+                      <a:endParaRPr b="0" lang="en-US" sz="1200" spc="-1" strike="noStrike">
                         <a:solidFill>
-                          <a:schemeClr val="dk1"/>
+                          <a:srgbClr val="000000"/>
                         </a:solidFill>
-                        <a:latin typeface="Calibri"/>
+                        <a:latin typeface="Arial"/>
                       </a:endParaRPr>
                     </a:p>
                   </a:txBody>
@@ -7495,7 +6018,7 @@
                         <a:rPr sz="1400"/>
                       </a:br>
                       <a:r>
-                        <a:rPr b="0" lang="pl-PL" sz="1200" spc="-1" strike="noStrike">
+                        <a:rPr b="0" lang="pl-PL" sz="1000" spc="-1" strike="noStrike">
                           <a:solidFill>
                             <a:schemeClr val="dk1"/>
                           </a:solidFill>
@@ -7503,7 +6026,7 @@
                         </a:rPr>
                         <a:t>(Jakich partnerów potrzebujesz oferując usługi?)</a:t>
                       </a:r>
-                      <a:endParaRPr b="0" lang="en-US" sz="1200" spc="-1" strike="noStrike">
+                      <a:endParaRPr b="0" lang="en-US" sz="1000" spc="-1" strike="noStrike">
                         <a:solidFill>
                           <a:srgbClr val="000000"/>
                         </a:solidFill>
@@ -7519,7 +6042,7 @@
                           <a:tab algn="l" pos="0"/>
                         </a:tabLst>
                       </a:pPr>
-                      <a:endParaRPr b="0" lang="en-US" sz="1200" spc="-1" strike="noStrike">
+                      <a:endParaRPr b="0" lang="en-US" sz="1400" spc="-1" strike="noStrike">
                         <a:solidFill>
                           <a:srgbClr val="000000"/>
                         </a:solidFill>
@@ -7561,11 +6084,20 @@
                       <a:noAutofit/>
                     </a:bodyPr>
                     <a:p>
-                      <a:endParaRPr b="0" lang="pl-PL" sz="1800" spc="-1" strike="noStrike">
+                      <a:r>
+                        <a:rPr b="0" lang="pl-PL" sz="1200" spc="-1" strike="noStrike">
+                          <a:solidFill>
+                            <a:schemeClr val="dk1"/>
+                          </a:solidFill>
+                          <a:latin typeface="Calibri"/>
+                        </a:rPr>
+                        <a:t>Potrzebni będą przede wszystkim partnerzy do obsługi płatności online, w tym BLIK i szybkie przelewy, oraz dostawcy narzędzi do weryfikacji tożsamości i dokumentów. Przydatni będą także partnerzy technologiczni do komunikacji SMS/e-mail, integracji spotkań online oraz wsparcia prawnego, księgowego i compliance.</a:t>
+                      </a:r>
+                      <a:endParaRPr b="0" lang="pl-PL" sz="1200" spc="-1" strike="noStrike">
                         <a:solidFill>
                           <a:schemeClr val="dk1"/>
                         </a:solidFill>
-                        <a:latin typeface="Calibri"/>
+                        <a:latin typeface="Arial"/>
                       </a:endParaRPr>
                     </a:p>
                   </a:txBody>
@@ -7626,7 +6158,7 @@
                         <a:rPr sz="1400"/>
                       </a:br>
                       <a:r>
-                        <a:rPr b="0" lang="pl-PL" sz="1200" spc="-1" strike="noStrike">
+                        <a:rPr b="0" lang="pl-PL" sz="1000" spc="-1" strike="noStrike">
                           <a:solidFill>
                             <a:schemeClr val="dk1"/>
                           </a:solidFill>
@@ -7634,7 +6166,7 @@
                         </a:rPr>
                         <a:t>(Mniej więcej ilu jest potencjalnych klientów?)</a:t>
                       </a:r>
-                      <a:endParaRPr b="0" lang="en-US" sz="1200" spc="-1" strike="noStrike">
+                      <a:endParaRPr b="0" lang="en-US" sz="1000" spc="-1" strike="noStrike">
                         <a:solidFill>
                           <a:srgbClr val="000000"/>
                         </a:solidFill>
@@ -7650,7 +6182,7 @@
                           <a:tab algn="l" pos="0"/>
                         </a:tabLst>
                       </a:pPr>
-                      <a:endParaRPr b="0" lang="en-US" sz="1200" spc="-1" strike="noStrike">
+                      <a:endParaRPr b="0" lang="en-US" sz="1400" spc="-1" strike="noStrike">
                         <a:solidFill>
                           <a:srgbClr val="000000"/>
                         </a:solidFill>
@@ -7692,7 +6224,16 @@
                       <a:noAutofit/>
                     </a:bodyPr>
                     <a:p>
-                      <a:endParaRPr b="0" lang="pl-PL" sz="1800" spc="-1" strike="noStrike">
+                      <a:r>
+                        <a:rPr b="0" lang="pl-PL" sz="1200" spc="-1" strike="noStrike">
+                          <a:solidFill>
+                            <a:schemeClr val="dk1"/>
+                          </a:solidFill>
+                          <a:latin typeface="Calibri"/>
+                        </a:rPr>
+                        <a:t>Szacunkowo: 4-5 mld zł rocznie. Potencjalni klienci ok. 1-1.8 mln rocznie. Potencjalni korepetytorzy ok. 80-150tys osób. MVP: duże miasta + przedmioty egzaminacyjne</a:t>
+                      </a:r>
+                      <a:endParaRPr b="0" lang="pl-PL" sz="1200" spc="-1" strike="noStrike">
                         <a:solidFill>
                           <a:schemeClr val="dk1"/>
                         </a:solidFill>
@@ -7757,7 +6298,7 @@
                         <a:rPr sz="1400"/>
                       </a:br>
                       <a:r>
-                        <a:rPr b="0" lang="pl-PL" sz="1200" spc="-1" strike="noStrike">
+                        <a:rPr b="0" lang="pl-PL" sz="1000" spc="-1" strike="noStrike">
                           <a:solidFill>
                             <a:schemeClr val="dk1"/>
                           </a:solidFill>
@@ -7765,7 +6306,7 @@
                         </a:rPr>
                         <a:t>(Kto oferuje podobne produkty/usługi? Czy to konkurenci obecni czy potencjalni?)</a:t>
                       </a:r>
-                      <a:endParaRPr b="0" lang="en-US" sz="1200" spc="-1" strike="noStrike">
+                      <a:endParaRPr b="0" lang="en-US" sz="1000" spc="-1" strike="noStrike">
                         <a:solidFill>
                           <a:srgbClr val="000000"/>
                         </a:solidFill>
@@ -7807,7 +6348,16 @@
                       <a:noAutofit/>
                     </a:bodyPr>
                     <a:p>
-                      <a:endParaRPr b="0" lang="pl-PL" sz="1800" spc="-1" strike="noStrike">
+                      <a:r>
+                        <a:rPr b="0" lang="pl-PL" sz="1200" spc="-1" strike="noStrike">
+                          <a:solidFill>
+                            <a:schemeClr val="dk1"/>
+                          </a:solidFill>
+                          <a:latin typeface="Calibri"/>
+                        </a:rPr>
+                        <a:t>E-korepetycje, BUKI, Superpof. Zalety: rozpoznawalność, dużo ogłosceń. Wady: często model tablicy ogłoszeń, brak domkniętej transakcji, słabsze gwarancje. OLX/Facebook – Z: niski koszt wejścia W: niski poziom standaryzacji, słaba porównywalność</a:t>
+                      </a:r>
+                      <a:endParaRPr b="0" lang="pl-PL" sz="1200" spc="-1" strike="noStrike">
                         <a:solidFill>
                           <a:schemeClr val="dk1"/>
                         </a:solidFill>
@@ -7872,7 +6422,7 @@
                         <a:rPr sz="1400"/>
                       </a:br>
                       <a:r>
-                        <a:rPr b="0" lang="pl-PL" sz="1200" spc="-1" strike="noStrike">
+                        <a:rPr b="0" lang="pl-PL" sz="1000" spc="-1" strike="noStrike">
                           <a:solidFill>
                             <a:schemeClr val="dk1"/>
                           </a:solidFill>
@@ -7880,7 +6430,7 @@
                         </a:rPr>
                         <a:t>(Co dodatkowo klient będzie chciał, aby osiągnąć pełną funkcjonalność? Czy potrzebne są dodatkowe zasoby?)</a:t>
                       </a:r>
-                      <a:endParaRPr b="0" lang="en-US" sz="1200" spc="-1" strike="noStrike">
+                      <a:endParaRPr b="0" lang="en-US" sz="1000" spc="-1" strike="noStrike">
                         <a:solidFill>
                           <a:srgbClr val="000000"/>
                         </a:solidFill>
@@ -7922,11 +6472,20 @@
                       <a:noAutofit/>
                     </a:bodyPr>
                     <a:p>
-                      <a:endParaRPr b="0" lang="pl-PL" sz="1800" spc="-1" strike="noStrike">
+                      <a:r>
+                        <a:rPr b="0" lang="pl-PL" sz="1200" spc="-1" strike="noStrike">
+                          <a:solidFill>
+                            <a:schemeClr val="dk1"/>
+                          </a:solidFill>
+                          <a:latin typeface="Calibri"/>
+                        </a:rPr>
+                        <a:t>Użytkownik będzie potrzebował dostępu do internetu, urządzenia mobilnego lub komputera oraz metody płatności online. Dla pełnej funkcjonalności ważne są także opinie, system reputacji, szybkie wsparcie klienta, jasne zasady odwołań i zwrotów oraz zaufanie do weryfikacji korepetytorów.</a:t>
+                      </a:r>
+                      <a:endParaRPr b="0" lang="pl-PL" sz="1200" spc="-1" strike="noStrike">
                         <a:solidFill>
                           <a:schemeClr val="dk1"/>
                         </a:solidFill>
-                        <a:latin typeface="Calibri"/>
+                        <a:latin typeface="Arial"/>
                       </a:endParaRPr>
                     </a:p>
                   </a:txBody>
@@ -7995,7 +6554,7 @@
       </p:grpSpPr>
       <p:pic>
         <p:nvPicPr>
-          <p:cNvPr id="72" name="Picture 4" descr="Znalezione obrazy dla zapytania politechnika wrocławska logotyp">
+          <p:cNvPr id="55" name="Picture 4" descr="Znalezione obrazy dla zapytania politechnika wrocławska logotyp">
             <a:hlinkClick r:id="rId1"/>
           </p:cNvPr>
           <p:cNvPicPr/>
@@ -8008,7 +6567,7 @@
         <p:spPr>
           <a:xfrm>
             <a:off x="0" y="-17640"/>
-            <a:ext cx="1368360" cy="535320"/>
+            <a:ext cx="1368000" cy="534960"/>
           </a:xfrm>
           <a:prstGeom prst="rect">
             <a:avLst/>
@@ -8020,14 +6579,14 @@
       </p:pic>
       <p:sp>
         <p:nvSpPr>
-          <p:cNvPr id="73" name="pole tekstowe 32"/>
+          <p:cNvPr id="56" name="pole tekstowe 32"/>
           <p:cNvSpPr/>
           <p:nvPr/>
         </p:nvSpPr>
         <p:spPr>
           <a:xfrm>
             <a:off x="539640" y="-99360"/>
-            <a:ext cx="8780400" cy="607680"/>
+            <a:ext cx="8780040" cy="607680"/>
           </a:xfrm>
           <a:prstGeom prst="rect">
             <a:avLst/>
@@ -8085,13 +6644,13 @@
       </p:sp>
       <p:graphicFrame>
         <p:nvGraphicFramePr>
-          <p:cNvPr id="74" name="Tabela 1"/>
+          <p:cNvPr id="57" name="Tabela 1"/>
           <p:cNvGraphicFramePr/>
           <p:nvPr/>
         </p:nvGraphicFramePr>
         <p:xfrm>
           <a:off x="0" y="518400"/>
-          <a:ext cx="9143640" cy="6666480"/>
+          <a:ext cx="9143280" cy="6666480"/>
         </p:xfrm>
         <a:graphic>
           <a:graphicData uri="http://schemas.openxmlformats.org/drawingml/2006/table">
